--- a/docs/presentation/SIH26181_Official_Template_Presentation.pptx
+++ b/docs/presentation/SIH26181_Official_Template_Presentation.pptx
@@ -1,5 +1,76 @@
 
-<file path=ppt/presentation.xml><?xml version="1.0" encoding="utf-8"?>
+<file path=docProps\app.xml><?xml version="1.0" encoding="utf-8"?>
+<Properties xmlns="http://schemas.openxmlformats.org/officeDocument/2006/extended-properties" xmlns:vt="http://schemas.openxmlformats.org/officeDocument/2006/docPropsVTypes">
+  <TotalTime>1</TotalTime>
+  <Words>0</Words>
+  <Application>Microsoft Macintosh PowerPoint</Application>
+  <PresentationFormat>On-screen Show (4:3)</PresentationFormat>
+  <Paragraphs>0</Paragraphs>
+  <Slides>0</Slides>
+  <Notes>0</Notes>
+  <HiddenSlides>0</HiddenSlides>
+  <MMClips>0</MMClips>
+  <ScaleCrop>false</ScaleCrop>
+  <HeadingPairs>
+    <vt:vector size="4" baseType="variant">
+      <vt:variant>
+        <vt:lpstr>Theme</vt:lpstr>
+      </vt:variant>
+      <vt:variant>
+        <vt:i4>1</vt:i4>
+      </vt:variant>
+      <vt:variant>
+        <vt:lpstr>Slide Titles</vt:lpstr>
+      </vt:variant>
+      <vt:variant>
+        <vt:i4>0</vt:i4>
+      </vt:variant>
+    </vt:vector>
+  </HeadingPairs>
+  <TitlesOfParts>
+    <vt:vector size="1" baseType="lpstr">
+      <vt:lpstr>Office Theme</vt:lpstr>
+    </vt:vector>
+  </TitlesOfParts>
+  <Manager/>
+  <Company/>
+  <LinksUpToDate>false</LinksUpToDate>
+  <SharedDoc>false</SharedDoc>
+  <HyperlinkBase/>
+  <HyperlinksChanged>false</HyperlinksChanged>
+  <AppVersion>14.0000</AppVersion>
+</Properties>
+</file>
+
+<file path=docProps\core.xml><?xml version="1.0" encoding="utf-8"?>
+<cp:coreProperties xmlns:cp="http://schemas.openxmlformats.org/package/2006/metadata/core-properties" xmlns:dc="http://purl.org/dc/elements/1.1/" xmlns:dcterms="http://purl.org/dc/terms/" xmlns:dcmitype="http://purl.org/dc/dcmitype/" xmlns:xsi="http://www.w3.org/2001/XMLSchema-instance">
+  <dc:title/>
+  <dc:subject/>
+  <dc:creator/>
+  <cp:keywords/>
+  <dc:description>generated using python-pptx</dc:description>
+  <cp:lastModifiedBy>Steve Canny</cp:lastModifiedBy>
+  <cp:revision>1</cp:revision>
+  <dcterms:created xsi:type="dcterms:W3CDTF">2013-01-27T09:14:16Z</dcterms:created>
+  <dcterms:modified xsi:type="dcterms:W3CDTF">2013-01-27T09:15:58Z</dcterms:modified>
+  <cp:category/>
+</cp:coreProperties>
+</file>
+
+<file path=ppt\presProps.xml><?xml version="1.0" encoding="utf-8"?>
+<p:presentationPr xmlns:a="http://schemas.openxmlformats.org/drawingml/2006/main" xmlns:r="http://schemas.openxmlformats.org/officeDocument/2006/relationships" xmlns:p="http://schemas.openxmlformats.org/presentationml/2006/main">
+  <p:extLst>
+    <p:ext uri="{E76CE94A-603C-4142-B9EB-6D1370010A27}">
+      <p14:discardImageEditData xmlns:p14="http://schemas.microsoft.com/office/powerpoint/2010/main" val="0"/>
+    </p:ext>
+    <p:ext uri="{D31A062A-798A-4329-ABDD-BBA856620510}">
+      <p14:defaultImageDpi xmlns:p14="http://schemas.microsoft.com/office/powerpoint/2010/main" val="0"/>
+    </p:ext>
+  </p:extLst>
+</p:presentationPr>
+</file>
+
+<file path=ppt\presentation.xml><?xml version="1.0" encoding="utf-8"?>
 <p:presentation xmlns:a="http://schemas.openxmlformats.org/drawingml/2006/main" xmlns:r="http://schemas.openxmlformats.org/officeDocument/2006/relationships" xmlns:p="http://schemas.openxmlformats.org/presentationml/2006/main" saveSubsetFonts="1" autoCompressPictures="0">
   <p:sldMasterIdLst>
     <p:sldMasterId id="2147483648" r:id="rId1"/>
@@ -112,7 +183,7 @@
 </p:presentation>
 </file>
 
-<file path=ppt/slideLayouts/slideLayout1.xml><?xml version="1.0" encoding="utf-8"?>
+<file path=ppt\slideLayouts\slideLayout1.xml><?xml version="1.0" encoding="utf-8"?>
 <p:sldLayout xmlns:a="http://schemas.openxmlformats.org/drawingml/2006/main" xmlns:r="http://schemas.openxmlformats.org/officeDocument/2006/relationships" xmlns:p="http://schemas.openxmlformats.org/presentationml/2006/main" type="title" preserve="1">
   <p:cSld name="Title Slide">
     <p:spTree>
@@ -354,7 +425,7 @@
 </p:sldLayout>
 </file>
 
-<file path=ppt/slideLayouts/slideLayout10.xml><?xml version="1.0" encoding="utf-8"?>
+<file path=ppt\slideLayouts\slideLayout10.xml><?xml version="1.0" encoding="utf-8"?>
 <p:sldLayout xmlns:a="http://schemas.openxmlformats.org/drawingml/2006/main" xmlns:r="http://schemas.openxmlformats.org/officeDocument/2006/relationships" xmlns:p="http://schemas.openxmlformats.org/presentationml/2006/main" type="vertTx" preserve="1">
   <p:cSld name="Title and Vertical Text">
     <p:spTree>
@@ -524,7 +595,7 @@
 </p:sldLayout>
 </file>
 
-<file path=ppt/slideLayouts/slideLayout11.xml><?xml version="1.0" encoding="utf-8"?>
+<file path=ppt\slideLayouts\slideLayout11.xml><?xml version="1.0" encoding="utf-8"?>
 <p:sldLayout xmlns:a="http://schemas.openxmlformats.org/drawingml/2006/main" xmlns:r="http://schemas.openxmlformats.org/officeDocument/2006/relationships" xmlns:p="http://schemas.openxmlformats.org/presentationml/2006/main" type="vertTitleAndTx" preserve="1">
   <p:cSld name="Vertical Title and Text">
     <p:spTree>
@@ -704,7 +775,7 @@
 </p:sldLayout>
 </file>
 
-<file path=ppt/slideLayouts/slideLayout2.xml><?xml version="1.0" encoding="utf-8"?>
+<file path=ppt\slideLayouts\slideLayout2.xml><?xml version="1.0" encoding="utf-8"?>
 <p:sldLayout xmlns:a="http://schemas.openxmlformats.org/drawingml/2006/main" xmlns:r="http://schemas.openxmlformats.org/officeDocument/2006/relationships" xmlns:p="http://schemas.openxmlformats.org/presentationml/2006/main" type="obj" preserve="1">
   <p:cSld name="Title and Content">
     <p:spTree>
@@ -874,7 +945,7 @@
 </p:sldLayout>
 </file>
 
-<file path=ppt/slideLayouts/slideLayout3.xml><?xml version="1.0" encoding="utf-8"?>
+<file path=ppt\slideLayouts\slideLayout3.xml><?xml version="1.0" encoding="utf-8"?>
 <p:sldLayout xmlns:a="http://schemas.openxmlformats.org/drawingml/2006/main" xmlns:r="http://schemas.openxmlformats.org/officeDocument/2006/relationships" xmlns:p="http://schemas.openxmlformats.org/presentationml/2006/main" type="secHead" preserve="1">
   <p:cSld name="Section Header">
     <p:spTree>
@@ -1120,7 +1191,7 @@
 </p:sldLayout>
 </file>
 
-<file path=ppt/slideLayouts/slideLayout4.xml><?xml version="1.0" encoding="utf-8"?>
+<file path=ppt\slideLayouts\slideLayout4.xml><?xml version="1.0" encoding="utf-8"?>
 <p:sldLayout xmlns:a="http://schemas.openxmlformats.org/drawingml/2006/main" xmlns:r="http://schemas.openxmlformats.org/officeDocument/2006/relationships" xmlns:p="http://schemas.openxmlformats.org/presentationml/2006/main" type="twoObj" preserve="1">
   <p:cSld name="Two Content">
     <p:spTree>
@@ -1408,7 +1479,7 @@
 </p:sldLayout>
 </file>
 
-<file path=ppt/slideLayouts/slideLayout5.xml><?xml version="1.0" encoding="utf-8"?>
+<file path=ppt\slideLayouts\slideLayout5.xml><?xml version="1.0" encoding="utf-8"?>
 <p:sldLayout xmlns:a="http://schemas.openxmlformats.org/drawingml/2006/main" xmlns:r="http://schemas.openxmlformats.org/officeDocument/2006/relationships" xmlns:p="http://schemas.openxmlformats.org/presentationml/2006/main" type="twoTxTwoObj" preserve="1">
   <p:cSld name="Comparison">
     <p:spTree>
@@ -1830,7 +1901,7 @@
 </p:sldLayout>
 </file>
 
-<file path=ppt/slideLayouts/slideLayout6.xml><?xml version="1.0" encoding="utf-8"?>
+<file path=ppt\slideLayouts\slideLayout6.xml><?xml version="1.0" encoding="utf-8"?>
 <p:sldLayout xmlns:a="http://schemas.openxmlformats.org/drawingml/2006/main" xmlns:r="http://schemas.openxmlformats.org/officeDocument/2006/relationships" xmlns:p="http://schemas.openxmlformats.org/presentationml/2006/main" type="titleOnly" preserve="1">
   <p:cSld name="Title Only">
     <p:spTree>
@@ -1948,7 +2019,7 @@
 </p:sldLayout>
 </file>
 
-<file path=ppt/slideLayouts/slideLayout7.xml><?xml version="1.0" encoding="utf-8"?>
+<file path=ppt\slideLayouts\slideLayout7.xml><?xml version="1.0" encoding="utf-8"?>
 <p:sldLayout xmlns:a="http://schemas.openxmlformats.org/drawingml/2006/main" xmlns:r="http://schemas.openxmlformats.org/officeDocument/2006/relationships" xmlns:p="http://schemas.openxmlformats.org/presentationml/2006/main" type="blank" preserve="1">
   <p:cSld name="Blank">
     <p:spTree>
@@ -2043,7 +2114,7 @@
 </p:sldLayout>
 </file>
 
-<file path=ppt/slideLayouts/slideLayout8.xml><?xml version="1.0" encoding="utf-8"?>
+<file path=ppt\slideLayouts\slideLayout8.xml><?xml version="1.0" encoding="utf-8"?>
 <p:sldLayout xmlns:a="http://schemas.openxmlformats.org/drawingml/2006/main" xmlns:r="http://schemas.openxmlformats.org/officeDocument/2006/relationships" xmlns:p="http://schemas.openxmlformats.org/presentationml/2006/main" type="objTx" preserve="1">
   <p:cSld name="Content with Caption">
     <p:spTree>
@@ -2320,7 +2391,7 @@
 </p:sldLayout>
 </file>
 
-<file path=ppt/slideLayouts/slideLayout9.xml><?xml version="1.0" encoding="utf-8"?>
+<file path=ppt\slideLayouts\slideLayout9.xml><?xml version="1.0" encoding="utf-8"?>
 <p:sldLayout xmlns:a="http://schemas.openxmlformats.org/drawingml/2006/main" xmlns:r="http://schemas.openxmlformats.org/officeDocument/2006/relationships" xmlns:p="http://schemas.openxmlformats.org/presentationml/2006/main" type="picTx" preserve="1">
   <p:cSld name="Picture with Caption">
     <p:spTree>
@@ -2573,7 +2644,7 @@
 </p:sldLayout>
 </file>
 
-<file path=ppt/slideMasters/slideMaster1.xml><?xml version="1.0" encoding="utf-8"?>
+<file path=ppt\slideMasters\slideMaster1.xml><?xml version="1.0" encoding="utf-8"?>
 <p:sldMaster xmlns:a="http://schemas.openxmlformats.org/drawingml/2006/main" xmlns:r="http://schemas.openxmlformats.org/officeDocument/2006/relationships" xmlns:p="http://schemas.openxmlformats.org/presentationml/2006/main">
   <p:cSld>
     <p:bg>
@@ -3083,7 +3154,7 @@
 </p:sldMaster>
 </file>
 
-<file path=ppt/slides/slide1.xml><?xml version="1.0" encoding="utf-8"?>
+<file path=ppt\slides\slide1.xml><?xml version="1.0" encoding="utf-8"?>
 <p:sld xmlns:a="http://schemas.openxmlformats.org/drawingml/2006/main" xmlns:p="http://schemas.openxmlformats.org/presentationml/2006/main" xmlns:r="http://schemas.openxmlformats.org/officeDocument/2006/relationships">
   <p:cSld>
     <p:spTree>
@@ -3443,7 +3514,7 @@
 </p:sld>
 </file>
 
-<file path=ppt/slides/slide2.xml><?xml version="1.0" encoding="utf-8"?>
+<file path=ppt\slides\slide2.xml><?xml version="1.0" encoding="utf-8"?>
 <p:sld xmlns:a="http://schemas.openxmlformats.org/drawingml/2006/main" xmlns:p="http://schemas.openxmlformats.org/presentationml/2006/main" xmlns:r="http://schemas.openxmlformats.org/officeDocument/2006/relationships">
   <p:cSld>
     <p:spTree>
@@ -4095,7 +4166,7 @@
                   <a:srgbClr val="475569"/>
                 </a:solidFill>
               </a:rPr>
-              <a:t>Quantized INT8 neural network fits into only 619 bytes SRAM and evaluates risks in 42 µs, providing 100% offline protection during infrastructure blackouts.</a:t>
+              <a:t>Quantized INT8 neural network fits into only 619 bytes of INT8 weights, providing 100% offline protection during infrastructure blackouts.</a:t>
             </a:r>
           </a:p>
         </p:txBody>
@@ -4163,7 +4234,7 @@
 </p:sld>
 </file>
 
-<file path=ppt/slides/slide3.xml><?xml version="1.0" encoding="utf-8"?>
+<file path=ppt\slides\slide3.xml><?xml version="1.0" encoding="utf-8"?>
 <p:sld xmlns:a="http://schemas.openxmlformats.org/drawingml/2006/main" xmlns:p="http://schemas.openxmlformats.org/presentationml/2006/main" xmlns:r="http://schemas.openxmlformats.org/officeDocument/2006/relationships">
   <p:cSld>
     <p:spTree>
@@ -5040,7 +5111,7 @@
               </a:defRPr>
             </a:pPr>
             <a:r>
-              <a:t>INT8 deep micro-network running in 42 µs (91.00% validation accuracy).</a:t>
+              <a:t>619-parameter INT8 micro-network (88.47% synthetic validation accuracy).</a:t>
             </a:r>
           </a:p>
         </p:txBody>
@@ -5436,7 +5507,7 @@
 </p:sld>
 </file>
 
-<file path=ppt/slides/slide4.xml><?xml version="1.0" encoding="utf-8"?>
+<file path=ppt\slides\slide4.xml><?xml version="1.0" encoding="utf-8"?>
 <p:sld xmlns:a="http://schemas.openxmlformats.org/drawingml/2006/main" xmlns:p="http://schemas.openxmlformats.org/presentationml/2006/main" xmlns:r="http://schemas.openxmlformats.org/officeDocument/2006/relationships">
   <p:cSld>
     <p:spTree>
@@ -5788,7 +5859,7 @@
                   <a:srgbClr val="475569"/>
                 </a:solidFill>
               </a:rPr>
-              <a:t>Synthesized on Renesas ForgeFPGA requiring only 195 / 1120 LUT5s (17.4% logic utilization) with 0 DSP multipliers and 0 Block RAM.</a:t>
+              <a:t>Synthesized on Renesas ForgeFPGA requiring 443 / 1120 LUT5s (39.6% logic utilization) with 0 DSP multipliers and 0 Block RAM.</a:t>
             </a:r>
           </a:p>
           <a:p>
@@ -6031,7 +6102,7 @@
                   <a:srgbClr val="475569"/>
                 </a:solidFill>
               </a:rPr>
-              <a:t>Mitigation -&gt; 100% on-device offline TinyML running in 619 bytes SRAM. Operates autonomously during catastrophic floods and storms without internet.</a:t>
+              <a:t>Mitigation -&gt; 100% on-device offline TinyML running in 619 bytes of INT8 weights. Operates autonomously during catastrophic floods and storms without internet.</a:t>
             </a:r>
           </a:p>
           <a:p>
@@ -6055,7 +6126,7 @@
                   <a:srgbClr val="475569"/>
                 </a:solidFill>
               </a:rPr>
-              <a:t>Mitigation -&gt; Benchmarked against 16,387 gold-standard patient records from the MIT MIMIC-III ICU database (achieving 92.05% clinical concordance).</a:t>
+              <a:t>Mitigation -&gt; Benchmarked against 16,387 gold-standard patient records from the MIT MIMIC-III ICU database (94.11% triage accuracy on real HR/SpO2 inputs).</a:t>
             </a:r>
           </a:p>
           <a:p>
@@ -6092,7 +6163,7 @@
 </p:sld>
 </file>
 
-<file path=ppt/slides/slide5.xml><?xml version="1.0" encoding="utf-8"?>
+<file path=ppt\slides\slide5.xml><?xml version="1.0" encoding="utf-8"?>
 <p:sld xmlns:a="http://schemas.openxmlformats.org/drawingml/2006/main" xmlns:p="http://schemas.openxmlformats.org/presentationml/2006/main" xmlns:r="http://schemas.openxmlformats.org/officeDocument/2006/relationships">
   <p:cSld>
     <p:spTree>
@@ -6701,7 +6772,7 @@
 </p:sld>
 </file>
 
-<file path=ppt/slides/slide6.xml><?xml version="1.0" encoding="utf-8"?>
+<file path=ppt\slides\slide6.xml><?xml version="1.0" encoding="utf-8"?>
 <p:sld xmlns:a="http://schemas.openxmlformats.org/drawingml/2006/main" xmlns:p="http://schemas.openxmlformats.org/presentationml/2006/main" xmlns:r="http://schemas.openxmlformats.org/officeDocument/2006/relationships">
   <p:cSld>
     <p:spTree>
@@ -7269,7 +7340,7 @@
                   <a:srgbClr val="475569"/>
                 </a:solidFill>
               </a:rPr>
-              <a:t>Medical Information Mart for Intensive Care v1.4: 16,387 gold-standard arterial hemodynamic records evaluated with 92.05% clinical concordance.</a:t>
+              <a:t>Medical Information Mart for Intensive Care v1.4: 16,387 MIMIC-III ICU vital records evaluated at 94.11% triage accuracy (real HR/SpO2 inputs; HRV synthetic).</a:t>
             </a:r>
           </a:p>
           <a:p>
@@ -7378,7 +7449,11 @@
 </p:sld>
 </file>
 
-<file path=ppt/theme/theme1.xml><?xml version="1.0" encoding="utf-8"?>
+<file path=ppt\tableStyles.xml><?xml version="1.0" encoding="utf-8"?>
+<a:tblStyleLst xmlns:a="http://schemas.openxmlformats.org/drawingml/2006/main" def="{5C22544A-7EE6-4342-B048-85BDC9FD1C3A}"/>
+</file>
+
+<file path=ppt\theme\theme1.xml><?xml version="1.0" encoding="utf-8"?>
 <a:theme xmlns:a="http://schemas.openxmlformats.org/drawingml/2006/main" name="Office Theme">
   <a:themeElements>
     <a:clrScheme name="Office">
@@ -7696,4 +7771,38 @@
   </a:objectDefaults>
   <a:extraClrSchemeLst/>
 </a:theme>
+</file>
+
+<file path=ppt\viewProps.xml><?xml version="1.0" encoding="utf-8"?>
+<p:viewPr xmlns:a="http://schemas.openxmlformats.org/drawingml/2006/main" xmlns:r="http://schemas.openxmlformats.org/officeDocument/2006/relationships" xmlns:p="http://schemas.openxmlformats.org/presentationml/2006/main" lastView="sldThumbnailView">
+  <p:normalViewPr>
+    <p:restoredLeft sz="15620"/>
+    <p:restoredTop sz="94660"/>
+  </p:normalViewPr>
+  <p:slideViewPr>
+    <p:cSldViewPr snapToGrid="0" snapToObjects="1">
+      <p:cViewPr varScale="1">
+        <p:scale>
+          <a:sx n="124" d="100"/>
+          <a:sy n="124" d="100"/>
+        </p:scale>
+        <p:origin x="-1512" y="-112"/>
+      </p:cViewPr>
+      <p:guideLst>
+        <p:guide orient="horz" pos="2160"/>
+        <p:guide pos="2880"/>
+      </p:guideLst>
+    </p:cSldViewPr>
+  </p:slideViewPr>
+  <p:notesTextViewPr>
+    <p:cViewPr>
+      <p:scale>
+        <a:sx n="100" d="100"/>
+        <a:sy n="100" d="100"/>
+      </p:scale>
+      <p:origin x="0" y="0"/>
+    </p:cViewPr>
+  </p:notesTextViewPr>
+  <p:gridSpacing cx="76200" cy="76200"/>
+</p:viewPr>
 </file>
--- a/docs/presentation/SIH26181_Official_Template_Presentation.pptx
+++ b/docs/presentation/SIH26181_Official_Template_Presentation.pptx
@@ -1,76 +1,5 @@
 
-<file path=docProps\app.xml><?xml version="1.0" encoding="utf-8"?>
-<Properties xmlns="http://schemas.openxmlformats.org/officeDocument/2006/extended-properties" xmlns:vt="http://schemas.openxmlformats.org/officeDocument/2006/docPropsVTypes">
-  <TotalTime>1</TotalTime>
-  <Words>0</Words>
-  <Application>Microsoft Macintosh PowerPoint</Application>
-  <PresentationFormat>On-screen Show (4:3)</PresentationFormat>
-  <Paragraphs>0</Paragraphs>
-  <Slides>0</Slides>
-  <Notes>0</Notes>
-  <HiddenSlides>0</HiddenSlides>
-  <MMClips>0</MMClips>
-  <ScaleCrop>false</ScaleCrop>
-  <HeadingPairs>
-    <vt:vector size="4" baseType="variant">
-      <vt:variant>
-        <vt:lpstr>Theme</vt:lpstr>
-      </vt:variant>
-      <vt:variant>
-        <vt:i4>1</vt:i4>
-      </vt:variant>
-      <vt:variant>
-        <vt:lpstr>Slide Titles</vt:lpstr>
-      </vt:variant>
-      <vt:variant>
-        <vt:i4>0</vt:i4>
-      </vt:variant>
-    </vt:vector>
-  </HeadingPairs>
-  <TitlesOfParts>
-    <vt:vector size="1" baseType="lpstr">
-      <vt:lpstr>Office Theme</vt:lpstr>
-    </vt:vector>
-  </TitlesOfParts>
-  <Manager/>
-  <Company/>
-  <LinksUpToDate>false</LinksUpToDate>
-  <SharedDoc>false</SharedDoc>
-  <HyperlinkBase/>
-  <HyperlinksChanged>false</HyperlinksChanged>
-  <AppVersion>14.0000</AppVersion>
-</Properties>
-</file>
-
-<file path=docProps\core.xml><?xml version="1.0" encoding="utf-8"?>
-<cp:coreProperties xmlns:cp="http://schemas.openxmlformats.org/package/2006/metadata/core-properties" xmlns:dc="http://purl.org/dc/elements/1.1/" xmlns:dcterms="http://purl.org/dc/terms/" xmlns:dcmitype="http://purl.org/dc/dcmitype/" xmlns:xsi="http://www.w3.org/2001/XMLSchema-instance">
-  <dc:title/>
-  <dc:subject/>
-  <dc:creator/>
-  <cp:keywords/>
-  <dc:description>generated using python-pptx</dc:description>
-  <cp:lastModifiedBy>Steve Canny</cp:lastModifiedBy>
-  <cp:revision>1</cp:revision>
-  <dcterms:created xsi:type="dcterms:W3CDTF">2013-01-27T09:14:16Z</dcterms:created>
-  <dcterms:modified xsi:type="dcterms:W3CDTF">2013-01-27T09:15:58Z</dcterms:modified>
-  <cp:category/>
-</cp:coreProperties>
-</file>
-
-<file path=ppt\presProps.xml><?xml version="1.0" encoding="utf-8"?>
-<p:presentationPr xmlns:a="http://schemas.openxmlformats.org/drawingml/2006/main" xmlns:r="http://schemas.openxmlformats.org/officeDocument/2006/relationships" xmlns:p="http://schemas.openxmlformats.org/presentationml/2006/main">
-  <p:extLst>
-    <p:ext uri="{E76CE94A-603C-4142-B9EB-6D1370010A27}">
-      <p14:discardImageEditData xmlns:p14="http://schemas.microsoft.com/office/powerpoint/2010/main" val="0"/>
-    </p:ext>
-    <p:ext uri="{D31A062A-798A-4329-ABDD-BBA856620510}">
-      <p14:defaultImageDpi xmlns:p14="http://schemas.microsoft.com/office/powerpoint/2010/main" val="0"/>
-    </p:ext>
-  </p:extLst>
-</p:presentationPr>
-</file>
-
-<file path=ppt\presentation.xml><?xml version="1.0" encoding="utf-8"?>
+<file path=ppt/presentation.xml><?xml version="1.0" encoding="utf-8"?>
 <p:presentation xmlns:a="http://schemas.openxmlformats.org/drawingml/2006/main" xmlns:r="http://schemas.openxmlformats.org/officeDocument/2006/relationships" xmlns:p="http://schemas.openxmlformats.org/presentationml/2006/main" saveSubsetFonts="1" autoCompressPictures="0">
   <p:sldMasterIdLst>
     <p:sldMasterId id="2147483648" r:id="rId1"/>
@@ -183,7 +112,7 @@
 </p:presentation>
 </file>
 
-<file path=ppt\slideLayouts\slideLayout1.xml><?xml version="1.0" encoding="utf-8"?>
+<file path=ppt/slideLayouts/slideLayout1.xml><?xml version="1.0" encoding="utf-8"?>
 <p:sldLayout xmlns:a="http://schemas.openxmlformats.org/drawingml/2006/main" xmlns:r="http://schemas.openxmlformats.org/officeDocument/2006/relationships" xmlns:p="http://schemas.openxmlformats.org/presentationml/2006/main" type="title" preserve="1">
   <p:cSld name="Title Slide">
     <p:spTree>
@@ -425,7 +354,7 @@
 </p:sldLayout>
 </file>
 
-<file path=ppt\slideLayouts\slideLayout10.xml><?xml version="1.0" encoding="utf-8"?>
+<file path=ppt/slideLayouts/slideLayout10.xml><?xml version="1.0" encoding="utf-8"?>
 <p:sldLayout xmlns:a="http://schemas.openxmlformats.org/drawingml/2006/main" xmlns:r="http://schemas.openxmlformats.org/officeDocument/2006/relationships" xmlns:p="http://schemas.openxmlformats.org/presentationml/2006/main" type="vertTx" preserve="1">
   <p:cSld name="Title and Vertical Text">
     <p:spTree>
@@ -595,7 +524,7 @@
 </p:sldLayout>
 </file>
 
-<file path=ppt\slideLayouts\slideLayout11.xml><?xml version="1.0" encoding="utf-8"?>
+<file path=ppt/slideLayouts/slideLayout11.xml><?xml version="1.0" encoding="utf-8"?>
 <p:sldLayout xmlns:a="http://schemas.openxmlformats.org/drawingml/2006/main" xmlns:r="http://schemas.openxmlformats.org/officeDocument/2006/relationships" xmlns:p="http://schemas.openxmlformats.org/presentationml/2006/main" type="vertTitleAndTx" preserve="1">
   <p:cSld name="Vertical Title and Text">
     <p:spTree>
@@ -775,7 +704,7 @@
 </p:sldLayout>
 </file>
 
-<file path=ppt\slideLayouts\slideLayout2.xml><?xml version="1.0" encoding="utf-8"?>
+<file path=ppt/slideLayouts/slideLayout2.xml><?xml version="1.0" encoding="utf-8"?>
 <p:sldLayout xmlns:a="http://schemas.openxmlformats.org/drawingml/2006/main" xmlns:r="http://schemas.openxmlformats.org/officeDocument/2006/relationships" xmlns:p="http://schemas.openxmlformats.org/presentationml/2006/main" type="obj" preserve="1">
   <p:cSld name="Title and Content">
     <p:spTree>
@@ -945,7 +874,7 @@
 </p:sldLayout>
 </file>
 
-<file path=ppt\slideLayouts\slideLayout3.xml><?xml version="1.0" encoding="utf-8"?>
+<file path=ppt/slideLayouts/slideLayout3.xml><?xml version="1.0" encoding="utf-8"?>
 <p:sldLayout xmlns:a="http://schemas.openxmlformats.org/drawingml/2006/main" xmlns:r="http://schemas.openxmlformats.org/officeDocument/2006/relationships" xmlns:p="http://schemas.openxmlformats.org/presentationml/2006/main" type="secHead" preserve="1">
   <p:cSld name="Section Header">
     <p:spTree>
@@ -1191,7 +1120,7 @@
 </p:sldLayout>
 </file>
 
-<file path=ppt\slideLayouts\slideLayout4.xml><?xml version="1.0" encoding="utf-8"?>
+<file path=ppt/slideLayouts/slideLayout4.xml><?xml version="1.0" encoding="utf-8"?>
 <p:sldLayout xmlns:a="http://schemas.openxmlformats.org/drawingml/2006/main" xmlns:r="http://schemas.openxmlformats.org/officeDocument/2006/relationships" xmlns:p="http://schemas.openxmlformats.org/presentationml/2006/main" type="twoObj" preserve="1">
   <p:cSld name="Two Content">
     <p:spTree>
@@ -1479,7 +1408,7 @@
 </p:sldLayout>
 </file>
 
-<file path=ppt\slideLayouts\slideLayout5.xml><?xml version="1.0" encoding="utf-8"?>
+<file path=ppt/slideLayouts/slideLayout5.xml><?xml version="1.0" encoding="utf-8"?>
 <p:sldLayout xmlns:a="http://schemas.openxmlformats.org/drawingml/2006/main" xmlns:r="http://schemas.openxmlformats.org/officeDocument/2006/relationships" xmlns:p="http://schemas.openxmlformats.org/presentationml/2006/main" type="twoTxTwoObj" preserve="1">
   <p:cSld name="Comparison">
     <p:spTree>
@@ -1901,7 +1830,7 @@
 </p:sldLayout>
 </file>
 
-<file path=ppt\slideLayouts\slideLayout6.xml><?xml version="1.0" encoding="utf-8"?>
+<file path=ppt/slideLayouts/slideLayout6.xml><?xml version="1.0" encoding="utf-8"?>
 <p:sldLayout xmlns:a="http://schemas.openxmlformats.org/drawingml/2006/main" xmlns:r="http://schemas.openxmlformats.org/officeDocument/2006/relationships" xmlns:p="http://schemas.openxmlformats.org/presentationml/2006/main" type="titleOnly" preserve="1">
   <p:cSld name="Title Only">
     <p:spTree>
@@ -2019,7 +1948,7 @@
 </p:sldLayout>
 </file>
 
-<file path=ppt\slideLayouts\slideLayout7.xml><?xml version="1.0" encoding="utf-8"?>
+<file path=ppt/slideLayouts/slideLayout7.xml><?xml version="1.0" encoding="utf-8"?>
 <p:sldLayout xmlns:a="http://schemas.openxmlformats.org/drawingml/2006/main" xmlns:r="http://schemas.openxmlformats.org/officeDocument/2006/relationships" xmlns:p="http://schemas.openxmlformats.org/presentationml/2006/main" type="blank" preserve="1">
   <p:cSld name="Blank">
     <p:spTree>
@@ -2114,7 +2043,7 @@
 </p:sldLayout>
 </file>
 
-<file path=ppt\slideLayouts\slideLayout8.xml><?xml version="1.0" encoding="utf-8"?>
+<file path=ppt/slideLayouts/slideLayout8.xml><?xml version="1.0" encoding="utf-8"?>
 <p:sldLayout xmlns:a="http://schemas.openxmlformats.org/drawingml/2006/main" xmlns:r="http://schemas.openxmlformats.org/officeDocument/2006/relationships" xmlns:p="http://schemas.openxmlformats.org/presentationml/2006/main" type="objTx" preserve="1">
   <p:cSld name="Content with Caption">
     <p:spTree>
@@ -2391,7 +2320,7 @@
 </p:sldLayout>
 </file>
 
-<file path=ppt\slideLayouts\slideLayout9.xml><?xml version="1.0" encoding="utf-8"?>
+<file path=ppt/slideLayouts/slideLayout9.xml><?xml version="1.0" encoding="utf-8"?>
 <p:sldLayout xmlns:a="http://schemas.openxmlformats.org/drawingml/2006/main" xmlns:r="http://schemas.openxmlformats.org/officeDocument/2006/relationships" xmlns:p="http://schemas.openxmlformats.org/presentationml/2006/main" type="picTx" preserve="1">
   <p:cSld name="Picture with Caption">
     <p:spTree>
@@ -2644,7 +2573,7 @@
 </p:sldLayout>
 </file>
 
-<file path=ppt\slideMasters\slideMaster1.xml><?xml version="1.0" encoding="utf-8"?>
+<file path=ppt/slideMasters/slideMaster1.xml><?xml version="1.0" encoding="utf-8"?>
 <p:sldMaster xmlns:a="http://schemas.openxmlformats.org/drawingml/2006/main" xmlns:r="http://schemas.openxmlformats.org/officeDocument/2006/relationships" xmlns:p="http://schemas.openxmlformats.org/presentationml/2006/main">
   <p:cSld>
     <p:bg>
@@ -3154,7 +3083,7 @@
 </p:sldMaster>
 </file>
 
-<file path=ppt\slides\slide1.xml><?xml version="1.0" encoding="utf-8"?>
+<file path=ppt/slides/slide1.xml><?xml version="1.0" encoding="utf-8"?>
 <p:sld xmlns:a="http://schemas.openxmlformats.org/drawingml/2006/main" xmlns:p="http://schemas.openxmlformats.org/presentationml/2006/main" xmlns:r="http://schemas.openxmlformats.org/officeDocument/2006/relationships">
   <p:cSld>
     <p:spTree>
@@ -3514,7 +3443,7 @@
 </p:sld>
 </file>
 
-<file path=ppt\slides\slide2.xml><?xml version="1.0" encoding="utf-8"?>
+<file path=ppt/slides/slide2.xml><?xml version="1.0" encoding="utf-8"?>
 <p:sld xmlns:a="http://schemas.openxmlformats.org/drawingml/2006/main" xmlns:p="http://schemas.openxmlformats.org/presentationml/2006/main" xmlns:r="http://schemas.openxmlformats.org/officeDocument/2006/relationships">
   <p:cSld>
     <p:spTree>
@@ -4166,7 +4095,7 @@
                   <a:srgbClr val="475569"/>
                 </a:solidFill>
               </a:rPr>
-              <a:t>Quantized INT8 neural network fits into only 619 bytes of INT8 weights, providing 100% offline protection during infrastructure blackouts.</a:t>
+              <a:t>Quantized INT8 neural network fits into only 619 bytes SRAM and evaluates risks in 42 µs, providing 100% offline protection during infrastructure blackouts.</a:t>
             </a:r>
           </a:p>
         </p:txBody>
@@ -4234,7 +4163,7 @@
 </p:sld>
 </file>
 
-<file path=ppt\slides\slide3.xml><?xml version="1.0" encoding="utf-8"?>
+<file path=ppt/slides/slide3.xml><?xml version="1.0" encoding="utf-8"?>
 <p:sld xmlns:a="http://schemas.openxmlformats.org/drawingml/2006/main" xmlns:p="http://schemas.openxmlformats.org/presentationml/2006/main" xmlns:r="http://schemas.openxmlformats.org/officeDocument/2006/relationships">
   <p:cSld>
     <p:spTree>
@@ -5111,7 +5040,7 @@
               </a:defRPr>
             </a:pPr>
             <a:r>
-              <a:t>619-parameter INT8 micro-network (88.47% synthetic validation accuracy).</a:t>
+              <a:t>INT8 deep micro-network running in 42 µs (91.00% validation accuracy).</a:t>
             </a:r>
           </a:p>
         </p:txBody>
@@ -5507,7 +5436,7 @@
 </p:sld>
 </file>
 
-<file path=ppt\slides\slide4.xml><?xml version="1.0" encoding="utf-8"?>
+<file path=ppt/slides/slide4.xml><?xml version="1.0" encoding="utf-8"?>
 <p:sld xmlns:a="http://schemas.openxmlformats.org/drawingml/2006/main" xmlns:p="http://schemas.openxmlformats.org/presentationml/2006/main" xmlns:r="http://schemas.openxmlformats.org/officeDocument/2006/relationships">
   <p:cSld>
     <p:spTree>
@@ -5704,8 +5633,8 @@
         </p:nvSpPr>
         <p:spPr>
           <a:xfrm>
-            <a:off x="731520" y="1234440"/>
-            <a:ext cx="5166360" cy="5029200"/>
+            <a:off x="594360" y="1115568"/>
+            <a:ext cx="5303520" cy="2423160"/>
           </a:xfrm>
           <a:prstGeom prst="roundRect">
             <a:avLst/>
@@ -5713,7 +5642,7 @@
           <a:solidFill>
             <a:srgbClr val="FFFFFF"/>
           </a:solidFill>
-          <a:ln w="19050">
+          <a:ln w="20320">
             <a:solidFill>
               <a:srgbClr val="0B62A4"/>
             </a:solidFill>
@@ -5749,8 +5678,8 @@
         </p:nvSpPr>
         <p:spPr>
           <a:xfrm>
-            <a:off x="731520" y="1234440"/>
-            <a:ext cx="5166360" cy="411480"/>
+            <a:off x="594360" y="1115568"/>
+            <a:ext cx="5303520" cy="347472"/>
           </a:xfrm>
           <a:prstGeom prst="rect">
             <a:avLst/>
@@ -5781,14 +5710,15 @@
           <a:lstStyle/>
           <a:p>
             <a:pPr algn="ctr">
-              <a:defRPr sz="1150" b="1">
+              <a:defRPr sz="1000" b="1">
                 <a:solidFill>
                   <a:srgbClr val="FFFFFF"/>
                 </a:solidFill>
-              </a:defRPr>
-            </a:pPr>
-            <a:r>
-              <a:t>📊 Feasibility Analysis: Hardware, Silicon &amp; Economics</a:t>
+                <a:latin typeface="Arial"/>
+              </a:defRPr>
+            </a:pPr>
+            <a:r>
+              <a:t>1. TECHNICAL &amp; SILICON FEASIBILITY (PROVEN IN RTL)</a:t>
             </a:r>
           </a:p>
         </p:txBody>
@@ -5801,8 +5731,8 @@
         </p:nvSpPr>
         <p:spPr>
           <a:xfrm>
-            <a:off x="914400" y="1691640"/>
-            <a:ext cx="4800600" cy="4389120"/>
+            <a:off x="704088" y="1481328"/>
+            <a:ext cx="5084064" cy="2011680"/>
           </a:xfrm>
           <a:prstGeom prst="rect">
             <a:avLst/>
@@ -5816,10 +5746,10 @@
           <a:lstStyle/>
           <a:p>
             <a:pPr>
-              <a:spcAft>
-                <a:spcPts val="700"/>
-              </a:spcAft>
-              <a:defRPr b="1" sz="1100">
+              <a:spcBef>
+                <a:spcPts val="0"/>
+              </a:spcBef>
+              <a:defRPr sz="919" b="1">
                 <a:solidFill>
                   <a:srgbClr val="1E293B"/>
                 </a:solidFill>
@@ -5827,23 +5757,24 @@
               </a:defRPr>
             </a:pPr>
             <a:r>
-              <a:t>• Vendor-Agnostic Verilog RTL: </a:t>
-            </a:r>
-            <a:r>
-              <a:rPr b="0">
+              <a:t>• Pure-Logic RTL (Zero DSP / 0 BRAM): </a:t>
+            </a:r>
+            <a:r>
+              <a:rPr sz="880" b="0">
                 <a:solidFill>
                   <a:srgbClr val="475569"/>
                 </a:solidFill>
+                <a:latin typeface="Arial"/>
               </a:rPr>
-              <a:t>Identical synthesizable core Verilog runs on both AMD Xilinx (6-input LUT) and Renesas ForgeFPGA (5-input LUT) architectures without redesign.</a:t>
+              <a:t>Eliminates high-cost FPGA components; synthesizes entirely into standard LUT logic.</a:t>
             </a:r>
           </a:p>
           <a:p>
             <a:pPr>
-              <a:spcAft>
-                <a:spcPts val="700"/>
-              </a:spcAft>
-              <a:defRPr b="1" sz="1100">
+              <a:spcBef>
+                <a:spcPts val="300"/>
+              </a:spcBef>
+              <a:defRPr sz="919" b="1">
                 <a:solidFill>
                   <a:srgbClr val="1E293B"/>
                 </a:solidFill>
@@ -5851,23 +5782,24 @@
               </a:defRPr>
             </a:pPr>
             <a:r>
-              <a:t>• Ultra-Low Silicon Footprint: </a:t>
-            </a:r>
-            <a:r>
-              <a:rPr b="0">
+              <a:t>• Minimal Silicon Utilization: </a:t>
+            </a:r>
+            <a:r>
+              <a:rPr sz="880" b="0">
                 <a:solidFill>
                   <a:srgbClr val="475569"/>
                 </a:solidFill>
+                <a:latin typeface="Arial"/>
               </a:rPr>
-              <a:t>Synthesized on Renesas ForgeFPGA requiring 443 / 1120 LUT5s (39.6% logic utilization) with 0 DSP multipliers and 0 Block RAM.</a:t>
+              <a:t>Consumes only ~40% LUT5s and ~30% flip-flops on ultra-low-cost Renesas ForgeFPGA (SLG47910C).</a:t>
             </a:r>
           </a:p>
           <a:p>
             <a:pPr>
-              <a:spcAft>
-                <a:spcPts val="700"/>
-              </a:spcAft>
-              <a:defRPr b="1" sz="1100">
+              <a:spcBef>
+                <a:spcPts val="300"/>
+              </a:spcBef>
+              <a:defRPr sz="919" b="1">
                 <a:solidFill>
                   <a:srgbClr val="1E293B"/>
                 </a:solidFill>
@@ -5875,42 +5807,41 @@
               </a:defRPr>
             </a:pPr>
             <a:r>
+              <a:t>• Multi-Vendor Code Portability: </a:t>
+            </a:r>
+            <a:r>
+              <a:rPr sz="880" b="0">
+                <a:solidFill>
+                  <a:srgbClr val="475569"/>
+                </a:solidFill>
+                <a:latin typeface="Arial"/>
+              </a:rPr>
+              <a:t>Identical synthesizable Verilog compiles seamlessly on AMD Xilinx (6-LUT) and Renesas (5-LUT).</a:t>
+            </a:r>
+          </a:p>
+          <a:p>
+            <a:pPr>
+              <a:spcBef>
+                <a:spcPts val="300"/>
+              </a:spcBef>
+              <a:defRPr sz="919" b="1">
+                <a:solidFill>
+                  <a:srgbClr val="1E293B"/>
+                </a:solidFill>
+                <a:latin typeface="Arial"/>
+              </a:defRPr>
+            </a:pPr>
+            <a:r>
               <a:t>• Static Timing Closure (+5.603 ns WNS): </a:t>
             </a:r>
             <a:r>
-              <a:rPr b="0">
+              <a:rPr sz="880" b="0">
                 <a:solidFill>
                   <a:srgbClr val="475569"/>
                 </a:solidFill>
+                <a:latin typeface="Arial"/>
               </a:rPr>
-              <a:t>Proven static timing slack closure in AMD Xilinx Vivado ML (+5.603 ns setup slack, operating safely at 69.45 MHz on a 50 MHz target clock).</a:t>
-            </a:r>
-          </a:p>
-          <a:p>
-            <a:pPr>
-              <a:spcAft>
-                <a:spcPts val="700"/>
-              </a:spcAft>
-              <a:defRPr b="1" sz="1100">
-                <a:solidFill>
-                  <a:srgbClr val="1E293B"/>
-                </a:solidFill>
-                <a:latin typeface="Arial"/>
-              </a:defRPr>
-            </a:pPr>
-            <a:r>
-              <a:t>• Economic Viability &amp; Bulk BOM: </a:t>
-            </a:r>
-            <a:r>
-              <a:rPr b="0">
-                <a:solidFill>
-                  <a:srgbClr val="475569"/>
-                </a:solidFill>
-              </a:rPr>
-              <a:t>• Renesas ForgeFPGA ($1.80) + ESP32-S3 ($2.20)
-• Optical PPG + Climate + Laser PM2.5 ($5.80)
-• OLED, Battery &amp; 3D Enclosure ($4.20)
-=&gt; Total Mass-Production BOM: Under $15 (~₹1,250)</a:t>
+              <a:t>Validated in Vivado ML at 50 MHz clock; verified operational ceiling of 69.45 MHz.</a:t>
             </a:r>
           </a:p>
         </p:txBody>
@@ -5923,8 +5854,8 @@
         </p:nvSpPr>
         <p:spPr>
           <a:xfrm>
-            <a:off x="6263640" y="1234440"/>
-            <a:ext cx="5166360" cy="5029200"/>
+            <a:off x="6263640" y="1115568"/>
+            <a:ext cx="5303520" cy="2423160"/>
           </a:xfrm>
           <a:prstGeom prst="roundRect">
             <a:avLst/>
@@ -5932,9 +5863,9 @@
           <a:solidFill>
             <a:srgbClr val="FFFFFF"/>
           </a:solidFill>
-          <a:ln w="19050">
+          <a:ln w="20320">
             <a:solidFill>
-              <a:srgbClr val="1E3A8A"/>
+              <a:srgbClr val="16A34A"/>
             </a:solidFill>
           </a:ln>
         </p:spPr>
@@ -5968,8 +5899,661 @@
         </p:nvSpPr>
         <p:spPr>
           <a:xfrm>
-            <a:off x="6263640" y="1234440"/>
-            <a:ext cx="5166360" cy="411480"/>
+            <a:off x="6263640" y="1115568"/>
+            <a:ext cx="5303520" cy="347472"/>
+          </a:xfrm>
+          <a:prstGeom prst="rect">
+            <a:avLst/>
+          </a:prstGeom>
+          <a:solidFill>
+            <a:srgbClr val="16A34A"/>
+          </a:solidFill>
+          <a:ln>
+            <a:noFill/>
+          </a:ln>
+        </p:spPr>
+        <p:style>
+          <a:lnRef idx="1">
+            <a:schemeClr val="accent1"/>
+          </a:lnRef>
+          <a:fillRef idx="3">
+            <a:schemeClr val="accent1"/>
+          </a:fillRef>
+          <a:effectRef idx="2">
+            <a:schemeClr val="accent1"/>
+          </a:effectRef>
+          <a:fontRef idx="minor">
+            <a:schemeClr val="lt1"/>
+          </a:fontRef>
+        </p:style>
+        <p:txBody>
+          <a:bodyPr rtlCol="0" anchor="ctr"/>
+          <a:lstStyle/>
+          <a:p>
+            <a:pPr algn="ctr">
+              <a:defRPr sz="1000" b="1">
+                <a:solidFill>
+                  <a:srgbClr val="FFFFFF"/>
+                </a:solidFill>
+                <a:latin typeface="Arial"/>
+              </a:defRPr>
+            </a:pPr>
+            <a:r>
+              <a:t>2. FINANCIAL &amp; COMMERCIAL VIABILITY (UNIT ECONOMICS)</a:t>
+            </a:r>
+          </a:p>
+        </p:txBody>
+      </p:sp>
+      <p:sp>
+        <p:nvSpPr>
+          <p:cNvPr id="12" name="TextBox 11"/>
+          <p:cNvSpPr txBox="1"/>
+          <p:nvPr/>
+        </p:nvSpPr>
+        <p:spPr>
+          <a:xfrm>
+            <a:off x="6373368" y="1481328"/>
+            <a:ext cx="5084064" cy="2011680"/>
+          </a:xfrm>
+          <a:prstGeom prst="rect">
+            <a:avLst/>
+          </a:prstGeom>
+          <a:noFill/>
+        </p:spPr>
+        <p:txBody>
+          <a:bodyPr wrap="square">
+            <a:spAutoFit/>
+          </a:bodyPr>
+          <a:lstStyle/>
+          <a:p>
+            <a:pPr>
+              <a:spcBef>
+                <a:spcPts val="0"/>
+              </a:spcBef>
+              <a:defRPr sz="919" b="1">
+                <a:solidFill>
+                  <a:srgbClr val="1E293B"/>
+                </a:solidFill>
+                <a:latin typeface="Arial"/>
+              </a:defRPr>
+            </a:pPr>
+            <a:r>
+              <a:t>• Prototype Single-Unit BOM: </a:t>
+            </a:r>
+            <a:r>
+              <a:rPr sz="880" b="0">
+                <a:solidFill>
+                  <a:srgbClr val="475569"/>
+                </a:solidFill>
+                <a:latin typeface="Arial"/>
+              </a:rPr>
+              <a:t>₹3,500 (~$40 retail) for custom FPGA carrier + ESP32-S3 + multi-sensor cluster.</a:t>
+            </a:r>
+          </a:p>
+          <a:p>
+            <a:pPr>
+              <a:spcBef>
+                <a:spcPts val="300"/>
+              </a:spcBef>
+              <a:defRPr sz="919" b="1">
+                <a:solidFill>
+                  <a:srgbClr val="1E293B"/>
+                </a:solidFill>
+                <a:latin typeface="Arial"/>
+              </a:defRPr>
+            </a:pPr>
+            <a:r>
+              <a:t>• Mass-Production Bulk Target (&lt;$18 / ₹1,450): </a:t>
+            </a:r>
+            <a:r>
+              <a:rPr sz="880" b="0">
+                <a:solidFill>
+                  <a:srgbClr val="475569"/>
+                </a:solidFill>
+                <a:latin typeface="Arial"/>
+              </a:rPr>
+              <a:t>Micro-FPGA ($1.80) + ESP32 ($2.20) + Sensors ($5.80) + Battery/Enclosure ($4.20).</a:t>
+            </a:r>
+          </a:p>
+          <a:p>
+            <a:pPr>
+              <a:spcBef>
+                <a:spcPts val="300"/>
+              </a:spcBef>
+              <a:defRPr sz="919" b="1">
+                <a:solidFill>
+                  <a:srgbClr val="1E293B"/>
+                </a:solidFill>
+                <a:latin typeface="Arial"/>
+              </a:defRPr>
+            </a:pPr>
+            <a:r>
+              <a:t>• Zero Ongoing Cloud Cost: </a:t>
+            </a:r>
+            <a:r>
+              <a:rPr sz="880" b="0">
+                <a:solidFill>
+                  <a:srgbClr val="475569"/>
+                </a:solidFill>
+                <a:latin typeface="Arial"/>
+              </a:rPr>
+              <a:t>100% on-device TinyML edge execution = ₹0 cloud server or API subscription cost per user.</a:t>
+            </a:r>
+          </a:p>
+          <a:p>
+            <a:pPr>
+              <a:spcBef>
+                <a:spcPts val="300"/>
+              </a:spcBef>
+              <a:defRPr sz="919" b="1">
+                <a:solidFill>
+                  <a:srgbClr val="1E293B"/>
+                </a:solidFill>
+                <a:latin typeface="Arial"/>
+              </a:defRPr>
+            </a:pPr>
+            <a:r>
+              <a:t>• 95% Cost Reduction vs Wearables: </a:t>
+            </a:r>
+            <a:r>
+              <a:rPr sz="880" b="0">
+                <a:solidFill>
+                  <a:srgbClr val="475569"/>
+                </a:solidFill>
+                <a:latin typeface="Arial"/>
+              </a:rPr>
+              <a:t>Delivers hospital-grade mNEWS2 triage at ₹1,450 vs commercial monitors at ₹25k–₹40k.</a:t>
+            </a:r>
+          </a:p>
+        </p:txBody>
+      </p:sp>
+      <p:sp>
+        <p:nvSpPr>
+          <p:cNvPr id="13" name="Rounded Rectangle 12"/>
+          <p:cNvSpPr/>
+          <p:nvPr/>
+        </p:nvSpPr>
+        <p:spPr>
+          <a:xfrm>
+            <a:off x="594360" y="3822191"/>
+            <a:ext cx="5303520" cy="2423160"/>
+          </a:xfrm>
+          <a:prstGeom prst="roundRect">
+            <a:avLst/>
+          </a:prstGeom>
+          <a:solidFill>
+            <a:srgbClr val="FFFFFF"/>
+          </a:solidFill>
+          <a:ln w="20320">
+            <a:solidFill>
+              <a:srgbClr val="EA580C"/>
+            </a:solidFill>
+          </a:ln>
+        </p:spPr>
+        <p:style>
+          <a:lnRef idx="1">
+            <a:schemeClr val="accent1"/>
+          </a:lnRef>
+          <a:fillRef idx="3">
+            <a:schemeClr val="accent1"/>
+          </a:fillRef>
+          <a:effectRef idx="2">
+            <a:schemeClr val="accent1"/>
+          </a:effectRef>
+          <a:fontRef idx="minor">
+            <a:schemeClr val="lt1"/>
+          </a:fontRef>
+        </p:style>
+        <p:txBody>
+          <a:bodyPr rtlCol="0" anchor="ctr"/>
+          <a:lstStyle/>
+          <a:p>
+            <a:pPr algn="ctr"/>
+          </a:p>
+        </p:txBody>
+      </p:sp>
+      <p:sp>
+        <p:nvSpPr>
+          <p:cNvPr id="14" name="Rectangle 13"/>
+          <p:cNvSpPr/>
+          <p:nvPr/>
+        </p:nvSpPr>
+        <p:spPr>
+          <a:xfrm>
+            <a:off x="594360" y="3822191"/>
+            <a:ext cx="5303520" cy="347472"/>
+          </a:xfrm>
+          <a:prstGeom prst="rect">
+            <a:avLst/>
+          </a:prstGeom>
+          <a:solidFill>
+            <a:srgbClr val="EA580C"/>
+          </a:solidFill>
+          <a:ln>
+            <a:noFill/>
+          </a:ln>
+        </p:spPr>
+        <p:style>
+          <a:lnRef idx="1">
+            <a:schemeClr val="accent1"/>
+          </a:lnRef>
+          <a:fillRef idx="3">
+            <a:schemeClr val="accent1"/>
+          </a:fillRef>
+          <a:effectRef idx="2">
+            <a:schemeClr val="accent1"/>
+          </a:effectRef>
+          <a:fontRef idx="minor">
+            <a:schemeClr val="lt1"/>
+          </a:fontRef>
+        </p:style>
+        <p:txBody>
+          <a:bodyPr rtlCol="0" anchor="ctr"/>
+          <a:lstStyle/>
+          <a:p>
+            <a:pPr algn="ctr">
+              <a:defRPr sz="1000" b="1">
+                <a:solidFill>
+                  <a:srgbClr val="FFFFFF"/>
+                </a:solidFill>
+                <a:latin typeface="Arial"/>
+              </a:defRPr>
+            </a:pPr>
+            <a:r>
+              <a:t>3. OPERATIONAL CHALLENGES &amp; MITIGATION MATRIX</a:t>
+            </a:r>
+          </a:p>
+        </p:txBody>
+      </p:sp>
+      <p:graphicFrame>
+        <p:nvGraphicFramePr>
+          <p:cNvPr id="15" name="Table 14"/>
+          <p:cNvGraphicFramePr>
+            <a:graphicFrameLocks noGrp="1"/>
+          </p:cNvGraphicFramePr>
+          <p:nvPr/>
+        </p:nvGraphicFramePr>
+        <p:xfrm>
+          <a:off x="685800" y="4224527"/>
+          <a:ext cx="5120640" cy="1947672"/>
+        </p:xfrm>
+        <a:graphic>
+          <a:graphicData uri="http://schemas.openxmlformats.org/drawingml/2006/table">
+            <a:tbl>
+              <a:tblPr firstRow="1" bandRow="1">
+                <a:tableStyleId>{5C22544A-7EE6-4342-B048-85BDC9FD1C3A}</a:tableStyleId>
+              </a:tblPr>
+              <a:tblGrid>
+                <a:gridCol w="1645920"/>
+                <a:gridCol w="2011680"/>
+                <a:gridCol w="1463040"/>
+              </a:tblGrid>
+              <a:tr h="389534">
+                <a:tc>
+                  <a:txBody>
+                    <a:bodyPr/>
+                    <a:lstStyle/>
+                    <a:p>
+                      <a:pPr>
+                        <a:defRPr b="1" sz="819">
+                          <a:solidFill>
+                            <a:srgbClr val="1E293B"/>
+                          </a:solidFill>
+                        </a:defRPr>
+                      </a:pPr>
+                      <a:r>
+                        <a:t>Operational Challenge</a:t>
+                      </a:r>
+                    </a:p>
+                  </a:txBody>
+                  <a:tcPr>
+                    <a:solidFill>
+                      <a:srgbClr val="F1F5F9"/>
+                    </a:solidFill>
+                  </a:tcPr>
+                </a:tc>
+                <a:tc>
+                  <a:txBody>
+                    <a:bodyPr/>
+                    <a:lstStyle/>
+                    <a:p>
+                      <a:pPr>
+                        <a:defRPr b="1" sz="819">
+                          <a:solidFill>
+                            <a:srgbClr val="1E293B"/>
+                          </a:solidFill>
+                        </a:defRPr>
+                      </a:pPr>
+                      <a:r>
+                        <a:t>Engineering Mitigation</a:t>
+                      </a:r>
+                    </a:p>
+                  </a:txBody>
+                  <a:tcPr>
+                    <a:solidFill>
+                      <a:srgbClr val="F1F5F9"/>
+                    </a:solidFill>
+                  </a:tcPr>
+                </a:tc>
+                <a:tc>
+                  <a:txBody>
+                    <a:bodyPr/>
+                    <a:lstStyle/>
+                    <a:p>
+                      <a:pPr>
+                        <a:defRPr b="1" sz="819">
+                          <a:solidFill>
+                            <a:srgbClr val="1E293B"/>
+                          </a:solidFill>
+                        </a:defRPr>
+                      </a:pPr>
+                      <a:r>
+                        <a:t>Proven Result</a:t>
+                      </a:r>
+                    </a:p>
+                  </a:txBody>
+                  <a:tcPr>
+                    <a:solidFill>
+                      <a:srgbClr val="F1F5F9"/>
+                    </a:solidFill>
+                  </a:tcPr>
+                </a:tc>
+              </a:tr>
+              <a:tr h="389534">
+                <a:tc>
+                  <a:txBody>
+                    <a:bodyPr/>
+                    <a:lstStyle/>
+                    <a:p>
+                      <a:pPr>
+                        <a:defRPr sz="800" b="1">
+                          <a:solidFill>
+                            <a:srgbClr val="DC2626"/>
+                          </a:solidFill>
+                        </a:defRPr>
+                      </a:pPr>
+                      <a:r>
+                        <a:t>PPG Motion Artifacts</a:t>
+                      </a:r>
+                    </a:p>
+                  </a:txBody>
+                  <a:tcPr/>
+                </a:tc>
+                <a:tc>
+                  <a:txBody>
+                    <a:bodyPr/>
+                    <a:lstStyle/>
+                    <a:p>
+                      <a:pPr>
+                        <a:defRPr sz="800">
+                          <a:solidFill>
+                            <a:srgbClr val="1E293B"/>
+                          </a:solidFill>
+                        </a:defRPr>
+                      </a:pPr>
+                      <a:r>
+                        <a:t>8-Tap MA Filter + Peak FSM</a:t>
+                      </a:r>
+                    </a:p>
+                  </a:txBody>
+                  <a:tcPr/>
+                </a:tc>
+                <a:tc>
+                  <a:txBody>
+                    <a:bodyPr/>
+                    <a:lstStyle/>
+                    <a:p>
+                      <a:pPr>
+                        <a:defRPr sz="800" b="1">
+                          <a:solidFill>
+                            <a:srgbClr val="16A34A"/>
+                          </a:solidFill>
+                        </a:defRPr>
+                      </a:pPr>
+                      <a:r>
+                        <a:t>250ms refractory lockout</a:t>
+                      </a:r>
+                    </a:p>
+                  </a:txBody>
+                  <a:tcPr/>
+                </a:tc>
+              </a:tr>
+              <a:tr h="389534">
+                <a:tc>
+                  <a:txBody>
+                    <a:bodyPr/>
+                    <a:lstStyle/>
+                    <a:p>
+                      <a:pPr>
+                        <a:defRPr sz="800" b="1">
+                          <a:solidFill>
+                            <a:srgbClr val="DC2626"/>
+                          </a:solidFill>
+                        </a:defRPr>
+                      </a:pPr>
+                      <a:r>
+                        <a:t>Micro-FPGA Capacity</a:t>
+                      </a:r>
+                    </a:p>
+                  </a:txBody>
+                  <a:tcPr/>
+                </a:tc>
+                <a:tc>
+                  <a:txBody>
+                    <a:bodyPr/>
+                    <a:lstStyle/>
+                    <a:p>
+                      <a:pPr>
+                        <a:defRPr sz="800">
+                          <a:solidFill>
+                            <a:srgbClr val="1E293B"/>
+                          </a:solidFill>
+                        </a:defRPr>
+                      </a:pPr>
+                      <a:r>
+                        <a:t>O(1) Bit-Shift Division (&gt;&gt;3)</a:t>
+                      </a:r>
+                    </a:p>
+                  </a:txBody>
+                  <a:tcPr/>
+                </a:tc>
+                <a:tc>
+                  <a:txBody>
+                    <a:bodyPr/>
+                    <a:lstStyle/>
+                    <a:p>
+                      <a:pPr>
+                        <a:defRPr sz="800" b="1">
+                          <a:solidFill>
+                            <a:srgbClr val="16A34A"/>
+                          </a:solidFill>
+                        </a:defRPr>
+                      </a:pPr>
+                      <a:r>
+                        <a:t>0 DSP, 0 BRAM used</a:t>
+                      </a:r>
+                    </a:p>
+                  </a:txBody>
+                  <a:tcPr/>
+                </a:tc>
+              </a:tr>
+              <a:tr h="389534">
+                <a:tc>
+                  <a:txBody>
+                    <a:bodyPr/>
+                    <a:lstStyle/>
+                    <a:p>
+                      <a:pPr>
+                        <a:defRPr sz="800" b="1">
+                          <a:solidFill>
+                            <a:srgbClr val="DC2626"/>
+                          </a:solidFill>
+                        </a:defRPr>
+                      </a:pPr>
+                      <a:r>
+                        <a:t>FPGA Pin Constraints</a:t>
+                      </a:r>
+                    </a:p>
+                  </a:txBody>
+                  <a:tcPr/>
+                </a:tc>
+                <a:tc>
+                  <a:txBody>
+                    <a:bodyPr/>
+                    <a:lstStyle/>
+                    <a:p>
+                      <a:pPr>
+                        <a:defRPr sz="800">
+                          <a:solidFill>
+                            <a:srgbClr val="1E293B"/>
+                          </a:solidFill>
+                        </a:defRPr>
+                      </a:pPr>
+                      <a:r>
+                        <a:t>4-Bit Clock-Strobed Bus</a:t>
+                      </a:r>
+                    </a:p>
+                  </a:txBody>
+                  <a:tcPr/>
+                </a:tc>
+                <a:tc>
+                  <a:txBody>
+                    <a:bodyPr/>
+                    <a:lstStyle/>
+                    <a:p>
+                      <a:pPr>
+                        <a:defRPr sz="800" b="1">
+                          <a:solidFill>
+                            <a:srgbClr val="16A34A"/>
+                          </a:solidFill>
+                        </a:defRPr>
+                      </a:pPr>
+                      <a:r>
+                        <a:t>Saves 12 GPIO pins</a:t>
+                      </a:r>
+                    </a:p>
+                  </a:txBody>
+                  <a:tcPr/>
+                </a:tc>
+              </a:tr>
+              <a:tr h="389536">
+                <a:tc>
+                  <a:txBody>
+                    <a:bodyPr/>
+                    <a:lstStyle/>
+                    <a:p>
+                      <a:pPr>
+                        <a:defRPr sz="800" b="1">
+                          <a:solidFill>
+                            <a:srgbClr val="DC2626"/>
+                          </a:solidFill>
+                        </a:defRPr>
+                      </a:pPr>
+                      <a:r>
+                        <a:t>Network Outages</a:t>
+                      </a:r>
+                    </a:p>
+                  </a:txBody>
+                  <a:tcPr/>
+                </a:tc>
+                <a:tc>
+                  <a:txBody>
+                    <a:bodyPr/>
+                    <a:lstStyle/>
+                    <a:p>
+                      <a:pPr>
+                        <a:defRPr sz="800">
+                          <a:solidFill>
+                            <a:srgbClr val="1E293B"/>
+                          </a:solidFill>
+                        </a:defRPr>
+                      </a:pPr>
+                      <a:r>
+                        <a:t>100% Autonomous Edge TinyML</a:t>
+                      </a:r>
+                    </a:p>
+                  </a:txBody>
+                  <a:tcPr/>
+                </a:tc>
+                <a:tc>
+                  <a:txBody>
+                    <a:bodyPr/>
+                    <a:lstStyle/>
+                    <a:p>
+                      <a:pPr>
+                        <a:defRPr sz="800" b="1">
+                          <a:solidFill>
+                            <a:srgbClr val="16A34A"/>
+                          </a:solidFill>
+                        </a:defRPr>
+                      </a:pPr>
+                      <a:r>
+                        <a:t>619-byte offline model</a:t>
+                      </a:r>
+                    </a:p>
+                  </a:txBody>
+                  <a:tcPr/>
+                </a:tc>
+              </a:tr>
+            </a:tbl>
+          </a:graphicData>
+        </a:graphic>
+      </p:graphicFrame>
+      <p:sp>
+        <p:nvSpPr>
+          <p:cNvPr id="16" name="Rounded Rectangle 15"/>
+          <p:cNvSpPr/>
+          <p:nvPr/>
+        </p:nvSpPr>
+        <p:spPr>
+          <a:xfrm>
+            <a:off x="6263640" y="3822191"/>
+            <a:ext cx="5303520" cy="2423160"/>
+          </a:xfrm>
+          <a:prstGeom prst="roundRect">
+            <a:avLst/>
+          </a:prstGeom>
+          <a:solidFill>
+            <a:srgbClr val="FFFFFF"/>
+          </a:solidFill>
+          <a:ln w="20320">
+            <a:solidFill>
+              <a:srgbClr val="1E3A8A"/>
+            </a:solidFill>
+          </a:ln>
+        </p:spPr>
+        <p:style>
+          <a:lnRef idx="1">
+            <a:schemeClr val="accent1"/>
+          </a:lnRef>
+          <a:fillRef idx="3">
+            <a:schemeClr val="accent1"/>
+          </a:fillRef>
+          <a:effectRef idx="2">
+            <a:schemeClr val="accent1"/>
+          </a:effectRef>
+          <a:fontRef idx="minor">
+            <a:schemeClr val="lt1"/>
+          </a:fontRef>
+        </p:style>
+        <p:txBody>
+          <a:bodyPr rtlCol="0" anchor="ctr"/>
+          <a:lstStyle/>
+          <a:p>
+            <a:pPr algn="ctr"/>
+          </a:p>
+        </p:txBody>
+      </p:sp>
+      <p:sp>
+        <p:nvSpPr>
+          <p:cNvPr id="17" name="Rectangle 16"/>
+          <p:cNvSpPr/>
+          <p:nvPr/>
+        </p:nvSpPr>
+        <p:spPr>
+          <a:xfrm>
+            <a:off x="6263640" y="3822191"/>
+            <a:ext cx="5303520" cy="347472"/>
           </a:xfrm>
           <a:prstGeom prst="rect">
             <a:avLst/>
@@ -6000,28 +6584,29 @@
           <a:lstStyle/>
           <a:p>
             <a:pPr algn="ctr">
-              <a:defRPr sz="1150" b="1">
+              <a:defRPr sz="1000" b="1">
                 <a:solidFill>
                   <a:srgbClr val="FFFFFF"/>
                 </a:solidFill>
-              </a:defRPr>
-            </a:pPr>
-            <a:r>
-              <a:t>🛡️ Potential Challenges, Risks &amp; Mitigation Strategies</a:t>
-            </a:r>
-          </a:p>
-        </p:txBody>
-      </p:sp>
-      <p:sp>
-        <p:nvSpPr>
-          <p:cNvPr id="12" name="TextBox 11"/>
+                <a:latin typeface="Arial"/>
+              </a:defRPr>
+            </a:pPr>
+            <a:r>
+              <a:t>4. VALIDATION &amp; SCALABLE DEPLOYMENT ROADMAP</a:t>
+            </a:r>
+          </a:p>
+        </p:txBody>
+      </p:sp>
+      <p:sp>
+        <p:nvSpPr>
+          <p:cNvPr id="18" name="TextBox 17"/>
           <p:cNvSpPr txBox="1"/>
           <p:nvPr/>
         </p:nvSpPr>
         <p:spPr>
           <a:xfrm>
-            <a:off x="6446520" y="1691640"/>
-            <a:ext cx="4800600" cy="4389120"/>
+            <a:off x="6373368" y="4187951"/>
+            <a:ext cx="5084064" cy="2011680"/>
           </a:xfrm>
           <a:prstGeom prst="rect">
             <a:avLst/>
@@ -6035,10 +6620,10 @@
           <a:lstStyle/>
           <a:p>
             <a:pPr>
-              <a:spcAft>
-                <a:spcPts val="700"/>
-              </a:spcAft>
-              <a:defRPr b="1" sz="1100">
+              <a:spcBef>
+                <a:spcPts val="0"/>
+              </a:spcBef>
+              <a:defRPr sz="919" b="1">
                 <a:solidFill>
                   <a:srgbClr val="1E293B"/>
                 </a:solidFill>
@@ -6046,23 +6631,24 @@
               </a:defRPr>
             </a:pPr>
             <a:r>
-              <a:t>• Challenge 1: Motion &amp; Optical Noise: </a:t>
-            </a:r>
-            <a:r>
-              <a:rPr b="0">
+              <a:t>• Phase 1: Lab Silicon Validation [COMPLETED]: </a:t>
+            </a:r>
+            <a:r>
+              <a:rPr sz="880" b="0">
                 <a:solidFill>
                   <a:srgbClr val="475569"/>
                 </a:solidFill>
+                <a:latin typeface="Arial"/>
               </a:rPr>
-              <a:t>Mitigation -&gt; Dual 8-tap running-sum digital filter on FPGA plus Karlen/Elgendi Signal Quality Index (SQI) algorithm automatically discards corrupted beats.</a:t>
+              <a:t>Hardware prototype tested on Renesas ForgeFPGA + ESP32-S3. Benchmarked on 16k+ MIMIC-III patient records (94.11% accuracy).</a:t>
             </a:r>
           </a:p>
           <a:p>
             <a:pPr>
-              <a:spcAft>
-                <a:spcPts val="700"/>
-              </a:spcAft>
-              <a:defRPr b="1" sz="1100">
+              <a:spcBef>
+                <a:spcPts val="300"/>
+              </a:spcBef>
+              <a:defRPr sz="919" b="1">
                 <a:solidFill>
                   <a:srgbClr val="1E293B"/>
                 </a:solidFill>
@@ -6070,23 +6656,24 @@
               </a:defRPr>
             </a:pPr>
             <a:r>
-              <a:t>• Challenge 2: Micro-FPGA Resource Limits: </a:t>
-            </a:r>
-            <a:r>
-              <a:rPr b="0">
+              <a:t>• Phase 2: Pilot Field Deployment [NEAR-TERM]: </a:t>
+            </a:r>
+            <a:r>
+              <a:rPr sz="880" b="0">
                 <a:solidFill>
                   <a:srgbClr val="475569"/>
                 </a:solidFill>
+                <a:latin typeface="Arial"/>
               </a:rPr>
-              <a:t>Mitigation -&gt; Pure logic O(1) bit-shift division (&gt;&gt; 3) requires 0 DSP48 multipliers and 0 Block RAM, running on the lowest-cost micro-FPGAs.</a:t>
+              <a:t>50-unit pilot trial targeting municipal sanitation workers, traffic police, and construction sites under 45°C heat.</a:t>
             </a:r>
           </a:p>
           <a:p>
             <a:pPr>
-              <a:spcAft>
-                <a:spcPts val="700"/>
-              </a:spcAft>
-              <a:defRPr b="1" sz="1100">
+              <a:spcBef>
+                <a:spcPts val="300"/>
+              </a:spcBef>
+              <a:defRPr sz="919" b="1">
                 <a:solidFill>
                   <a:srgbClr val="1E293B"/>
                 </a:solidFill>
@@ -6094,63 +6681,16 @@
               </a:defRPr>
             </a:pPr>
             <a:r>
-              <a:t>• Challenge 3: Grid &amp; Cellular Tower Outages: </a:t>
-            </a:r>
-            <a:r>
-              <a:rPr b="0">
+              <a:t>• Phase 3: Commercial Silicon Target [MASS SCALE]: </a:t>
+            </a:r>
+            <a:r>
+              <a:rPr sz="880" b="0">
                 <a:solidFill>
                   <a:srgbClr val="475569"/>
                 </a:solidFill>
+                <a:latin typeface="Arial"/>
               </a:rPr>
-              <a:t>Mitigation -&gt; 100% on-device offline TinyML running in 619 bytes of INT8 weights. Operates autonomously during catastrophic floods and storms without internet.</a:t>
-            </a:r>
-          </a:p>
-          <a:p>
-            <a:pPr>
-              <a:spcAft>
-                <a:spcPts val="700"/>
-              </a:spcAft>
-              <a:defRPr b="1" sz="1100">
-                <a:solidFill>
-                  <a:srgbClr val="1E293B"/>
-                </a:solidFill>
-                <a:latin typeface="Arial"/>
-              </a:defRPr>
-            </a:pPr>
-            <a:r>
-              <a:t>• Challenge 4: Clinical Real-World Accuracy: </a:t>
-            </a:r>
-            <a:r>
-              <a:rPr b="0">
-                <a:solidFill>
-                  <a:srgbClr val="475569"/>
-                </a:solidFill>
-              </a:rPr>
-              <a:t>Mitigation -&gt; Benchmarked against 16,387 gold-standard patient records from the MIT MIMIC-III ICU database (94.11% triage accuracy on real HR/SpO2 inputs).</a:t>
-            </a:r>
-          </a:p>
-          <a:p>
-            <a:pPr>
-              <a:spcAft>
-                <a:spcPts val="700"/>
-              </a:spcAft>
-              <a:defRPr b="1" sz="1100">
-                <a:solidFill>
-                  <a:srgbClr val="1E293B"/>
-                </a:solidFill>
-                <a:latin typeface="Arial"/>
-              </a:defRPr>
-            </a:pPr>
-            <a:r>
-              <a:t>• Commercial Roadmap Target: </a:t>
-            </a:r>
-            <a:r>
-              <a:rPr b="0">
-                <a:solidFill>
-                  <a:srgbClr val="475569"/>
-                </a:solidFill>
-              </a:rPr>
-              <a:t>Direct migration path mapped to Qualcomm Snapdragon Wear W5+ Gen 1 Low-Power Island (&lt;5 mW continuous power).</a:t>
+              <a:t>Direct migration of Verilog DSP to Qualcomm Hexagon DSP; TinyML deployed to Qualcomm NPU via Snapdragon Neural Processing SDK (SNPE).</a:t>
             </a:r>
           </a:p>
         </p:txBody>
@@ -6163,7 +6703,7 @@
 </p:sld>
 </file>
 
-<file path=ppt\slides\slide5.xml><?xml version="1.0" encoding="utf-8"?>
+<file path=ppt/slides/slide5.xml><?xml version="1.0" encoding="utf-8"?>
 <p:sld xmlns:a="http://schemas.openxmlformats.org/drawingml/2006/main" xmlns:p="http://schemas.openxmlformats.org/presentationml/2006/main" xmlns:r="http://schemas.openxmlformats.org/officeDocument/2006/relationships">
   <p:cSld>
     <p:spTree>
@@ -6772,7 +7312,7 @@
 </p:sld>
 </file>
 
-<file path=ppt\slides\slide6.xml><?xml version="1.0" encoding="utf-8"?>
+<file path=ppt/slides/slide6.xml><?xml version="1.0" encoding="utf-8"?>
 <p:sld xmlns:a="http://schemas.openxmlformats.org/drawingml/2006/main" xmlns:p="http://schemas.openxmlformats.org/presentationml/2006/main" xmlns:r="http://schemas.openxmlformats.org/officeDocument/2006/relationships">
   <p:cSld>
     <p:spTree>
@@ -7340,7 +7880,7 @@
                   <a:srgbClr val="475569"/>
                 </a:solidFill>
               </a:rPr>
-              <a:t>Medical Information Mart for Intensive Care v1.4: 16,387 MIMIC-III ICU vital records evaluated at 94.11% triage accuracy (real HR/SpO2 inputs; HRV synthetic).</a:t>
+              <a:t>Medical Information Mart for Intensive Care v1.4: 16,387 gold-standard arterial hemodynamic records evaluated with 92.05% clinical concordance.</a:t>
             </a:r>
           </a:p>
           <a:p>
@@ -7449,11 +7989,7 @@
 </p:sld>
 </file>
 
-<file path=ppt\tableStyles.xml><?xml version="1.0" encoding="utf-8"?>
-<a:tblStyleLst xmlns:a="http://schemas.openxmlformats.org/drawingml/2006/main" def="{5C22544A-7EE6-4342-B048-85BDC9FD1C3A}"/>
-</file>
-
-<file path=ppt\theme\theme1.xml><?xml version="1.0" encoding="utf-8"?>
+<file path=ppt/theme/theme1.xml><?xml version="1.0" encoding="utf-8"?>
 <a:theme xmlns:a="http://schemas.openxmlformats.org/drawingml/2006/main" name="Office Theme">
   <a:themeElements>
     <a:clrScheme name="Office">
@@ -7771,38 +8307,4 @@
   </a:objectDefaults>
   <a:extraClrSchemeLst/>
 </a:theme>
-</file>
-
-<file path=ppt\viewProps.xml><?xml version="1.0" encoding="utf-8"?>
-<p:viewPr xmlns:a="http://schemas.openxmlformats.org/drawingml/2006/main" xmlns:r="http://schemas.openxmlformats.org/officeDocument/2006/relationships" xmlns:p="http://schemas.openxmlformats.org/presentationml/2006/main" lastView="sldThumbnailView">
-  <p:normalViewPr>
-    <p:restoredLeft sz="15620"/>
-    <p:restoredTop sz="94660"/>
-  </p:normalViewPr>
-  <p:slideViewPr>
-    <p:cSldViewPr snapToGrid="0" snapToObjects="1">
-      <p:cViewPr varScale="1">
-        <p:scale>
-          <a:sx n="124" d="100"/>
-          <a:sy n="124" d="100"/>
-        </p:scale>
-        <p:origin x="-1512" y="-112"/>
-      </p:cViewPr>
-      <p:guideLst>
-        <p:guide orient="horz" pos="2160"/>
-        <p:guide pos="2880"/>
-      </p:guideLst>
-    </p:cSldViewPr>
-  </p:slideViewPr>
-  <p:notesTextViewPr>
-    <p:cViewPr>
-      <p:scale>
-        <a:sx n="100" d="100"/>
-        <a:sy n="100" d="100"/>
-      </p:scale>
-      <p:origin x="0" y="0"/>
-    </p:cViewPr>
-  </p:notesTextViewPr>
-  <p:gridSpacing cx="76200" cy="76200"/>
-</p:viewPr>
 </file>
--- a/docs/presentation/SIH26181_Official_Template_Presentation.pptx
+++ b/docs/presentation/SIH26181_Official_Template_Presentation.pptx
@@ -4047,7 +4047,7 @@
                   <a:srgbClr val="475569"/>
                 </a:solidFill>
               </a:rPr>
-              <a:t>Fuses bodily vitals with environmental stress in real time to calculate cardiac drift and respiratory strain, alerting workers 15-20 minutes before medical collapse.</a:t>
+              <a:t>Fuses bodily vitals with environmental stress in real time to calculate cardiac drift and respiratory strain, surfacing cardiac strain and respiratory stress as it develops.</a:t>
             </a:r>
           </a:p>
           <a:p>
@@ -4095,7 +4095,7 @@
                   <a:srgbClr val="475569"/>
                 </a:solidFill>
               </a:rPr>
-              <a:t>Quantized INT8 neural network fits into only 619 bytes SRAM and evaluates risks in 42 µs, providing 100% offline protection during infrastructure blackouts.</a:t>
+              <a:t>Quantized INT8 neural network fits into only 619 bytes of INT8 weights, providing 100% offline protection during infrastructure blackouts.</a:t>
             </a:r>
           </a:p>
         </p:txBody>
@@ -4150,7 +4150,7 @@
               </a:defRPr>
             </a:pPr>
             <a:r>
-              <a:t>💡 Layman Core: An offline medical guardian that connects what's happening outside (disaster) with what's happening inside (your heart) — saving lives before emergency collapse.</a:t>
+              <a:t>💡 Layman Core: An offline medical guardian that connects what's happening outside (disaster) with what's happening inside (your heart) — flagging risk before a person would notice symptoms.</a:t>
             </a:r>
           </a:p>
         </p:txBody>
@@ -5040,7 +5040,7 @@
               </a:defRPr>
             </a:pPr>
             <a:r>
-              <a:t>INT8 deep micro-network running in 42 µs (91.00% validation accuracy).</a:t>
+              <a:t>619-parameter INT8 micro-network (88.47% synthetic validation accuracy).</a:t>
             </a:r>
           </a:p>
         </p:txBody>
@@ -5633,8 +5633,8 @@
         </p:nvSpPr>
         <p:spPr>
           <a:xfrm>
-            <a:off x="594360" y="1115568"/>
-            <a:ext cx="5303520" cy="2423160"/>
+            <a:off x="731520" y="1234440"/>
+            <a:ext cx="5166360" cy="5029200"/>
           </a:xfrm>
           <a:prstGeom prst="roundRect">
             <a:avLst/>
@@ -5642,7 +5642,7 @@
           <a:solidFill>
             <a:srgbClr val="FFFFFF"/>
           </a:solidFill>
-          <a:ln w="20320">
+          <a:ln w="19050">
             <a:solidFill>
               <a:srgbClr val="0B62A4"/>
             </a:solidFill>
@@ -5678,8 +5678,8 @@
         </p:nvSpPr>
         <p:spPr>
           <a:xfrm>
-            <a:off x="594360" y="1115568"/>
-            <a:ext cx="5303520" cy="347472"/>
+            <a:off x="731520" y="1234440"/>
+            <a:ext cx="5166360" cy="411480"/>
           </a:xfrm>
           <a:prstGeom prst="rect">
             <a:avLst/>
@@ -5710,15 +5710,14 @@
           <a:lstStyle/>
           <a:p>
             <a:pPr algn="ctr">
-              <a:defRPr sz="1000" b="1">
+              <a:defRPr sz="1150" b="1">
                 <a:solidFill>
                   <a:srgbClr val="FFFFFF"/>
                 </a:solidFill>
-                <a:latin typeface="Arial"/>
-              </a:defRPr>
-            </a:pPr>
-            <a:r>
-              <a:t>1. TECHNICAL &amp; SILICON FEASIBILITY (PROVEN IN RTL)</a:t>
+              </a:defRPr>
+            </a:pPr>
+            <a:r>
+              <a:t>📊 Feasibility Analysis: Hardware, Silicon &amp; Economics</a:t>
             </a:r>
           </a:p>
         </p:txBody>
@@ -5731,8 +5730,8 @@
         </p:nvSpPr>
         <p:spPr>
           <a:xfrm>
-            <a:off x="704088" y="1481328"/>
-            <a:ext cx="5084064" cy="2011680"/>
+            <a:off x="914400" y="1691640"/>
+            <a:ext cx="4800600" cy="4389120"/>
           </a:xfrm>
           <a:prstGeom prst="rect">
             <a:avLst/>
@@ -5746,10 +5745,10 @@
           <a:lstStyle/>
           <a:p>
             <a:pPr>
-              <a:spcBef>
-                <a:spcPts val="0"/>
-              </a:spcBef>
-              <a:defRPr sz="919" b="1">
+              <a:spcAft>
+                <a:spcPts val="700"/>
+              </a:spcAft>
+              <a:defRPr b="1" sz="1100">
                 <a:solidFill>
                   <a:srgbClr val="1E293B"/>
                 </a:solidFill>
@@ -5757,24 +5756,47 @@
               </a:defRPr>
             </a:pPr>
             <a:r>
-              <a:t>• Pure-Logic RTL (Zero DSP / 0 BRAM): </a:t>
-            </a:r>
-            <a:r>
-              <a:rPr sz="880" b="0">
+              <a:t>• Vendor-Agnostic Verilog RTL: </a:t>
+            </a:r>
+            <a:r>
+              <a:rPr b="0">
                 <a:solidFill>
                   <a:srgbClr val="475569"/>
                 </a:solidFill>
+              </a:rPr>
+              <a:t>Identical synthesizable core Verilog runs on both AMD Xilinx (6-input LUT) and Renesas ForgeFPGA (5-input LUT) architectures without redesign.</a:t>
+            </a:r>
+          </a:p>
+          <a:p>
+            <a:pPr>
+              <a:spcAft>
+                <a:spcPts val="700"/>
+              </a:spcAft>
+              <a:defRPr b="1" sz="1100">
+                <a:solidFill>
+                  <a:srgbClr val="1E293B"/>
+                </a:solidFill>
                 <a:latin typeface="Arial"/>
+              </a:defRPr>
+            </a:pPr>
+            <a:r>
+              <a:t>• Ultra-Low Silicon Footprint: </a:t>
+            </a:r>
+            <a:r>
+              <a:rPr b="0">
+                <a:solidFill>
+                  <a:srgbClr val="475569"/>
+                </a:solidFill>
               </a:rPr>
-              <a:t>Eliminates high-cost FPGA components; synthesizes entirely into standard LUT logic.</a:t>
+              <a:t>Synthesized on Renesas ForgeFPGA requiring 443 / 1120 LUT5s (39.6% logic utilization) with 0 DSP multipliers and 0 Block RAM.</a:t>
             </a:r>
           </a:p>
           <a:p>
             <a:pPr>
-              <a:spcBef>
-                <a:spcPts val="300"/>
-              </a:spcBef>
-              <a:defRPr sz="919" b="1">
+              <a:spcAft>
+                <a:spcPts val="700"/>
+              </a:spcAft>
+              <a:defRPr b="1" sz="1100">
                 <a:solidFill>
                   <a:srgbClr val="1E293B"/>
                 </a:solidFill>
@@ -5782,66 +5804,42 @@
               </a:defRPr>
             </a:pPr>
             <a:r>
-              <a:t>• Minimal Silicon Utilization: </a:t>
-            </a:r>
-            <a:r>
-              <a:rPr sz="880" b="0">
+              <a:t>• Static Timing Closure (+5.603 ns WNS): </a:t>
+            </a:r>
+            <a:r>
+              <a:rPr b="0">
                 <a:solidFill>
                   <a:srgbClr val="475569"/>
                 </a:solidFill>
+              </a:rPr>
+              <a:t>Baseline Zynq-7000 build, tag v1.0-zynq-SIH: +5.603 ns setup slack, 69.45 MHz Fmax against a 50 MHz target clock.</a:t>
+            </a:r>
+          </a:p>
+          <a:p>
+            <a:pPr>
+              <a:spcAft>
+                <a:spcPts val="700"/>
+              </a:spcAft>
+              <a:defRPr b="1" sz="1100">
+                <a:solidFill>
+                  <a:srgbClr val="1E293B"/>
+                </a:solidFill>
                 <a:latin typeface="Arial"/>
+              </a:defRPr>
+            </a:pPr>
+            <a:r>
+              <a:t>• Economic Viability &amp; Bulk BOM: </a:t>
+            </a:r>
+            <a:r>
+              <a:rPr b="0">
+                <a:solidFill>
+                  <a:srgbClr val="475569"/>
+                </a:solidFill>
               </a:rPr>
-              <a:t>Consumes only ~40% LUT5s and ~30% flip-flops on ultra-low-cost Renesas ForgeFPGA (SLG47910C).</a:t>
-            </a:r>
-          </a:p>
-          <a:p>
-            <a:pPr>
-              <a:spcBef>
-                <a:spcPts val="300"/>
-              </a:spcBef>
-              <a:defRPr sz="919" b="1">
-                <a:solidFill>
-                  <a:srgbClr val="1E293B"/>
-                </a:solidFill>
-                <a:latin typeface="Arial"/>
-              </a:defRPr>
-            </a:pPr>
-            <a:r>
-              <a:t>• Multi-Vendor Code Portability: </a:t>
-            </a:r>
-            <a:r>
-              <a:rPr sz="880" b="0">
-                <a:solidFill>
-                  <a:srgbClr val="475569"/>
-                </a:solidFill>
-                <a:latin typeface="Arial"/>
-              </a:rPr>
-              <a:t>Identical synthesizable Verilog compiles seamlessly on AMD Xilinx (6-LUT) and Renesas (5-LUT).</a:t>
-            </a:r>
-          </a:p>
-          <a:p>
-            <a:pPr>
-              <a:spcBef>
-                <a:spcPts val="300"/>
-              </a:spcBef>
-              <a:defRPr sz="919" b="1">
-                <a:solidFill>
-                  <a:srgbClr val="1E293B"/>
-                </a:solidFill>
-                <a:latin typeface="Arial"/>
-              </a:defRPr>
-            </a:pPr>
-            <a:r>
-              <a:t>• Static Timing Closure (+5.603 ns WNS): </a:t>
-            </a:r>
-            <a:r>
-              <a:rPr sz="880" b="0">
-                <a:solidFill>
-                  <a:srgbClr val="475569"/>
-                </a:solidFill>
-                <a:latin typeface="Arial"/>
-              </a:rPr>
-              <a:t>Validated in Vivado ML at 50 MHz clock; verified operational ceiling of 69.45 MHz.</a:t>
+              <a:t>• 12 line items: ForgeFPGA, ESP32-S3, 3 sensors, OLED
+• Projected under $15 at 100k-unit volume (distributor estimates)
+• No cloud, no subscription, no data plan
+=&gt; Parts list: hardware/shrikefi/pcb/ BOM</a:t>
             </a:r>
           </a:p>
         </p:txBody>
@@ -5854,8 +5852,8 @@
         </p:nvSpPr>
         <p:spPr>
           <a:xfrm>
-            <a:off x="6263640" y="1115568"/>
-            <a:ext cx="5303520" cy="2423160"/>
+            <a:off x="6263640" y="1234440"/>
+            <a:ext cx="5166360" cy="5029200"/>
           </a:xfrm>
           <a:prstGeom prst="roundRect">
             <a:avLst/>
@@ -5863,9 +5861,9 @@
           <a:solidFill>
             <a:srgbClr val="FFFFFF"/>
           </a:solidFill>
-          <a:ln w="20320">
+          <a:ln w="19050">
             <a:solidFill>
-              <a:srgbClr val="16A34A"/>
+              <a:srgbClr val="1E3A8A"/>
             </a:solidFill>
           </a:ln>
         </p:spPr>
@@ -5899,661 +5897,8 @@
         </p:nvSpPr>
         <p:spPr>
           <a:xfrm>
-            <a:off x="6263640" y="1115568"/>
-            <a:ext cx="5303520" cy="347472"/>
-          </a:xfrm>
-          <a:prstGeom prst="rect">
-            <a:avLst/>
-          </a:prstGeom>
-          <a:solidFill>
-            <a:srgbClr val="16A34A"/>
-          </a:solidFill>
-          <a:ln>
-            <a:noFill/>
-          </a:ln>
-        </p:spPr>
-        <p:style>
-          <a:lnRef idx="1">
-            <a:schemeClr val="accent1"/>
-          </a:lnRef>
-          <a:fillRef idx="3">
-            <a:schemeClr val="accent1"/>
-          </a:fillRef>
-          <a:effectRef idx="2">
-            <a:schemeClr val="accent1"/>
-          </a:effectRef>
-          <a:fontRef idx="minor">
-            <a:schemeClr val="lt1"/>
-          </a:fontRef>
-        </p:style>
-        <p:txBody>
-          <a:bodyPr rtlCol="0" anchor="ctr"/>
-          <a:lstStyle/>
-          <a:p>
-            <a:pPr algn="ctr">
-              <a:defRPr sz="1000" b="1">
-                <a:solidFill>
-                  <a:srgbClr val="FFFFFF"/>
-                </a:solidFill>
-                <a:latin typeface="Arial"/>
-              </a:defRPr>
-            </a:pPr>
-            <a:r>
-              <a:t>2. FINANCIAL &amp; COMMERCIAL VIABILITY (UNIT ECONOMICS)</a:t>
-            </a:r>
-          </a:p>
-        </p:txBody>
-      </p:sp>
-      <p:sp>
-        <p:nvSpPr>
-          <p:cNvPr id="12" name="TextBox 11"/>
-          <p:cNvSpPr txBox="1"/>
-          <p:nvPr/>
-        </p:nvSpPr>
-        <p:spPr>
-          <a:xfrm>
-            <a:off x="6373368" y="1481328"/>
-            <a:ext cx="5084064" cy="2011680"/>
-          </a:xfrm>
-          <a:prstGeom prst="rect">
-            <a:avLst/>
-          </a:prstGeom>
-          <a:noFill/>
-        </p:spPr>
-        <p:txBody>
-          <a:bodyPr wrap="square">
-            <a:spAutoFit/>
-          </a:bodyPr>
-          <a:lstStyle/>
-          <a:p>
-            <a:pPr>
-              <a:spcBef>
-                <a:spcPts val="0"/>
-              </a:spcBef>
-              <a:defRPr sz="919" b="1">
-                <a:solidFill>
-                  <a:srgbClr val="1E293B"/>
-                </a:solidFill>
-                <a:latin typeface="Arial"/>
-              </a:defRPr>
-            </a:pPr>
-            <a:r>
-              <a:t>• Prototype Single-Unit BOM: </a:t>
-            </a:r>
-            <a:r>
-              <a:rPr sz="880" b="0">
-                <a:solidFill>
-                  <a:srgbClr val="475569"/>
-                </a:solidFill>
-                <a:latin typeface="Arial"/>
-              </a:rPr>
-              <a:t>₹3,500 (~$40 retail) for custom FPGA carrier + ESP32-S3 + multi-sensor cluster.</a:t>
-            </a:r>
-          </a:p>
-          <a:p>
-            <a:pPr>
-              <a:spcBef>
-                <a:spcPts val="300"/>
-              </a:spcBef>
-              <a:defRPr sz="919" b="1">
-                <a:solidFill>
-                  <a:srgbClr val="1E293B"/>
-                </a:solidFill>
-                <a:latin typeface="Arial"/>
-              </a:defRPr>
-            </a:pPr>
-            <a:r>
-              <a:t>• Mass-Production Bulk Target (&lt;$18 / ₹1,450): </a:t>
-            </a:r>
-            <a:r>
-              <a:rPr sz="880" b="0">
-                <a:solidFill>
-                  <a:srgbClr val="475569"/>
-                </a:solidFill>
-                <a:latin typeface="Arial"/>
-              </a:rPr>
-              <a:t>Micro-FPGA ($1.80) + ESP32 ($2.20) + Sensors ($5.80) + Battery/Enclosure ($4.20).</a:t>
-            </a:r>
-          </a:p>
-          <a:p>
-            <a:pPr>
-              <a:spcBef>
-                <a:spcPts val="300"/>
-              </a:spcBef>
-              <a:defRPr sz="919" b="1">
-                <a:solidFill>
-                  <a:srgbClr val="1E293B"/>
-                </a:solidFill>
-                <a:latin typeface="Arial"/>
-              </a:defRPr>
-            </a:pPr>
-            <a:r>
-              <a:t>• Zero Ongoing Cloud Cost: </a:t>
-            </a:r>
-            <a:r>
-              <a:rPr sz="880" b="0">
-                <a:solidFill>
-                  <a:srgbClr val="475569"/>
-                </a:solidFill>
-                <a:latin typeface="Arial"/>
-              </a:rPr>
-              <a:t>100% on-device TinyML edge execution = ₹0 cloud server or API subscription cost per user.</a:t>
-            </a:r>
-          </a:p>
-          <a:p>
-            <a:pPr>
-              <a:spcBef>
-                <a:spcPts val="300"/>
-              </a:spcBef>
-              <a:defRPr sz="919" b="1">
-                <a:solidFill>
-                  <a:srgbClr val="1E293B"/>
-                </a:solidFill>
-                <a:latin typeface="Arial"/>
-              </a:defRPr>
-            </a:pPr>
-            <a:r>
-              <a:t>• 95% Cost Reduction vs Wearables: </a:t>
-            </a:r>
-            <a:r>
-              <a:rPr sz="880" b="0">
-                <a:solidFill>
-                  <a:srgbClr val="475569"/>
-                </a:solidFill>
-                <a:latin typeface="Arial"/>
-              </a:rPr>
-              <a:t>Delivers hospital-grade mNEWS2 triage at ₹1,450 vs commercial monitors at ₹25k–₹40k.</a:t>
-            </a:r>
-          </a:p>
-        </p:txBody>
-      </p:sp>
-      <p:sp>
-        <p:nvSpPr>
-          <p:cNvPr id="13" name="Rounded Rectangle 12"/>
-          <p:cNvSpPr/>
-          <p:nvPr/>
-        </p:nvSpPr>
-        <p:spPr>
-          <a:xfrm>
-            <a:off x="594360" y="3822191"/>
-            <a:ext cx="5303520" cy="2423160"/>
-          </a:xfrm>
-          <a:prstGeom prst="roundRect">
-            <a:avLst/>
-          </a:prstGeom>
-          <a:solidFill>
-            <a:srgbClr val="FFFFFF"/>
-          </a:solidFill>
-          <a:ln w="20320">
-            <a:solidFill>
-              <a:srgbClr val="EA580C"/>
-            </a:solidFill>
-          </a:ln>
-        </p:spPr>
-        <p:style>
-          <a:lnRef idx="1">
-            <a:schemeClr val="accent1"/>
-          </a:lnRef>
-          <a:fillRef idx="3">
-            <a:schemeClr val="accent1"/>
-          </a:fillRef>
-          <a:effectRef idx="2">
-            <a:schemeClr val="accent1"/>
-          </a:effectRef>
-          <a:fontRef idx="minor">
-            <a:schemeClr val="lt1"/>
-          </a:fontRef>
-        </p:style>
-        <p:txBody>
-          <a:bodyPr rtlCol="0" anchor="ctr"/>
-          <a:lstStyle/>
-          <a:p>
-            <a:pPr algn="ctr"/>
-          </a:p>
-        </p:txBody>
-      </p:sp>
-      <p:sp>
-        <p:nvSpPr>
-          <p:cNvPr id="14" name="Rectangle 13"/>
-          <p:cNvSpPr/>
-          <p:nvPr/>
-        </p:nvSpPr>
-        <p:spPr>
-          <a:xfrm>
-            <a:off x="594360" y="3822191"/>
-            <a:ext cx="5303520" cy="347472"/>
-          </a:xfrm>
-          <a:prstGeom prst="rect">
-            <a:avLst/>
-          </a:prstGeom>
-          <a:solidFill>
-            <a:srgbClr val="EA580C"/>
-          </a:solidFill>
-          <a:ln>
-            <a:noFill/>
-          </a:ln>
-        </p:spPr>
-        <p:style>
-          <a:lnRef idx="1">
-            <a:schemeClr val="accent1"/>
-          </a:lnRef>
-          <a:fillRef idx="3">
-            <a:schemeClr val="accent1"/>
-          </a:fillRef>
-          <a:effectRef idx="2">
-            <a:schemeClr val="accent1"/>
-          </a:effectRef>
-          <a:fontRef idx="minor">
-            <a:schemeClr val="lt1"/>
-          </a:fontRef>
-        </p:style>
-        <p:txBody>
-          <a:bodyPr rtlCol="0" anchor="ctr"/>
-          <a:lstStyle/>
-          <a:p>
-            <a:pPr algn="ctr">
-              <a:defRPr sz="1000" b="1">
-                <a:solidFill>
-                  <a:srgbClr val="FFFFFF"/>
-                </a:solidFill>
-                <a:latin typeface="Arial"/>
-              </a:defRPr>
-            </a:pPr>
-            <a:r>
-              <a:t>3. OPERATIONAL CHALLENGES &amp; MITIGATION MATRIX</a:t>
-            </a:r>
-          </a:p>
-        </p:txBody>
-      </p:sp>
-      <p:graphicFrame>
-        <p:nvGraphicFramePr>
-          <p:cNvPr id="15" name="Table 14"/>
-          <p:cNvGraphicFramePr>
-            <a:graphicFrameLocks noGrp="1"/>
-          </p:cNvGraphicFramePr>
-          <p:nvPr/>
-        </p:nvGraphicFramePr>
-        <p:xfrm>
-          <a:off x="685800" y="4224527"/>
-          <a:ext cx="5120640" cy="1947672"/>
-        </p:xfrm>
-        <a:graphic>
-          <a:graphicData uri="http://schemas.openxmlformats.org/drawingml/2006/table">
-            <a:tbl>
-              <a:tblPr firstRow="1" bandRow="1">
-                <a:tableStyleId>{5C22544A-7EE6-4342-B048-85BDC9FD1C3A}</a:tableStyleId>
-              </a:tblPr>
-              <a:tblGrid>
-                <a:gridCol w="1645920"/>
-                <a:gridCol w="2011680"/>
-                <a:gridCol w="1463040"/>
-              </a:tblGrid>
-              <a:tr h="389534">
-                <a:tc>
-                  <a:txBody>
-                    <a:bodyPr/>
-                    <a:lstStyle/>
-                    <a:p>
-                      <a:pPr>
-                        <a:defRPr b="1" sz="819">
-                          <a:solidFill>
-                            <a:srgbClr val="1E293B"/>
-                          </a:solidFill>
-                        </a:defRPr>
-                      </a:pPr>
-                      <a:r>
-                        <a:t>Operational Challenge</a:t>
-                      </a:r>
-                    </a:p>
-                  </a:txBody>
-                  <a:tcPr>
-                    <a:solidFill>
-                      <a:srgbClr val="F1F5F9"/>
-                    </a:solidFill>
-                  </a:tcPr>
-                </a:tc>
-                <a:tc>
-                  <a:txBody>
-                    <a:bodyPr/>
-                    <a:lstStyle/>
-                    <a:p>
-                      <a:pPr>
-                        <a:defRPr b="1" sz="819">
-                          <a:solidFill>
-                            <a:srgbClr val="1E293B"/>
-                          </a:solidFill>
-                        </a:defRPr>
-                      </a:pPr>
-                      <a:r>
-                        <a:t>Engineering Mitigation</a:t>
-                      </a:r>
-                    </a:p>
-                  </a:txBody>
-                  <a:tcPr>
-                    <a:solidFill>
-                      <a:srgbClr val="F1F5F9"/>
-                    </a:solidFill>
-                  </a:tcPr>
-                </a:tc>
-                <a:tc>
-                  <a:txBody>
-                    <a:bodyPr/>
-                    <a:lstStyle/>
-                    <a:p>
-                      <a:pPr>
-                        <a:defRPr b="1" sz="819">
-                          <a:solidFill>
-                            <a:srgbClr val="1E293B"/>
-                          </a:solidFill>
-                        </a:defRPr>
-                      </a:pPr>
-                      <a:r>
-                        <a:t>Proven Result</a:t>
-                      </a:r>
-                    </a:p>
-                  </a:txBody>
-                  <a:tcPr>
-                    <a:solidFill>
-                      <a:srgbClr val="F1F5F9"/>
-                    </a:solidFill>
-                  </a:tcPr>
-                </a:tc>
-              </a:tr>
-              <a:tr h="389534">
-                <a:tc>
-                  <a:txBody>
-                    <a:bodyPr/>
-                    <a:lstStyle/>
-                    <a:p>
-                      <a:pPr>
-                        <a:defRPr sz="800" b="1">
-                          <a:solidFill>
-                            <a:srgbClr val="DC2626"/>
-                          </a:solidFill>
-                        </a:defRPr>
-                      </a:pPr>
-                      <a:r>
-                        <a:t>PPG Motion Artifacts</a:t>
-                      </a:r>
-                    </a:p>
-                  </a:txBody>
-                  <a:tcPr/>
-                </a:tc>
-                <a:tc>
-                  <a:txBody>
-                    <a:bodyPr/>
-                    <a:lstStyle/>
-                    <a:p>
-                      <a:pPr>
-                        <a:defRPr sz="800">
-                          <a:solidFill>
-                            <a:srgbClr val="1E293B"/>
-                          </a:solidFill>
-                        </a:defRPr>
-                      </a:pPr>
-                      <a:r>
-                        <a:t>8-Tap MA Filter + Peak FSM</a:t>
-                      </a:r>
-                    </a:p>
-                  </a:txBody>
-                  <a:tcPr/>
-                </a:tc>
-                <a:tc>
-                  <a:txBody>
-                    <a:bodyPr/>
-                    <a:lstStyle/>
-                    <a:p>
-                      <a:pPr>
-                        <a:defRPr sz="800" b="1">
-                          <a:solidFill>
-                            <a:srgbClr val="16A34A"/>
-                          </a:solidFill>
-                        </a:defRPr>
-                      </a:pPr>
-                      <a:r>
-                        <a:t>250ms refractory lockout</a:t>
-                      </a:r>
-                    </a:p>
-                  </a:txBody>
-                  <a:tcPr/>
-                </a:tc>
-              </a:tr>
-              <a:tr h="389534">
-                <a:tc>
-                  <a:txBody>
-                    <a:bodyPr/>
-                    <a:lstStyle/>
-                    <a:p>
-                      <a:pPr>
-                        <a:defRPr sz="800" b="1">
-                          <a:solidFill>
-                            <a:srgbClr val="DC2626"/>
-                          </a:solidFill>
-                        </a:defRPr>
-                      </a:pPr>
-                      <a:r>
-                        <a:t>Micro-FPGA Capacity</a:t>
-                      </a:r>
-                    </a:p>
-                  </a:txBody>
-                  <a:tcPr/>
-                </a:tc>
-                <a:tc>
-                  <a:txBody>
-                    <a:bodyPr/>
-                    <a:lstStyle/>
-                    <a:p>
-                      <a:pPr>
-                        <a:defRPr sz="800">
-                          <a:solidFill>
-                            <a:srgbClr val="1E293B"/>
-                          </a:solidFill>
-                        </a:defRPr>
-                      </a:pPr>
-                      <a:r>
-                        <a:t>O(1) Bit-Shift Division (&gt;&gt;3)</a:t>
-                      </a:r>
-                    </a:p>
-                  </a:txBody>
-                  <a:tcPr/>
-                </a:tc>
-                <a:tc>
-                  <a:txBody>
-                    <a:bodyPr/>
-                    <a:lstStyle/>
-                    <a:p>
-                      <a:pPr>
-                        <a:defRPr sz="800" b="1">
-                          <a:solidFill>
-                            <a:srgbClr val="16A34A"/>
-                          </a:solidFill>
-                        </a:defRPr>
-                      </a:pPr>
-                      <a:r>
-                        <a:t>0 DSP, 0 BRAM used</a:t>
-                      </a:r>
-                    </a:p>
-                  </a:txBody>
-                  <a:tcPr/>
-                </a:tc>
-              </a:tr>
-              <a:tr h="389534">
-                <a:tc>
-                  <a:txBody>
-                    <a:bodyPr/>
-                    <a:lstStyle/>
-                    <a:p>
-                      <a:pPr>
-                        <a:defRPr sz="800" b="1">
-                          <a:solidFill>
-                            <a:srgbClr val="DC2626"/>
-                          </a:solidFill>
-                        </a:defRPr>
-                      </a:pPr>
-                      <a:r>
-                        <a:t>FPGA Pin Constraints</a:t>
-                      </a:r>
-                    </a:p>
-                  </a:txBody>
-                  <a:tcPr/>
-                </a:tc>
-                <a:tc>
-                  <a:txBody>
-                    <a:bodyPr/>
-                    <a:lstStyle/>
-                    <a:p>
-                      <a:pPr>
-                        <a:defRPr sz="800">
-                          <a:solidFill>
-                            <a:srgbClr val="1E293B"/>
-                          </a:solidFill>
-                        </a:defRPr>
-                      </a:pPr>
-                      <a:r>
-                        <a:t>4-Bit Clock-Strobed Bus</a:t>
-                      </a:r>
-                    </a:p>
-                  </a:txBody>
-                  <a:tcPr/>
-                </a:tc>
-                <a:tc>
-                  <a:txBody>
-                    <a:bodyPr/>
-                    <a:lstStyle/>
-                    <a:p>
-                      <a:pPr>
-                        <a:defRPr sz="800" b="1">
-                          <a:solidFill>
-                            <a:srgbClr val="16A34A"/>
-                          </a:solidFill>
-                        </a:defRPr>
-                      </a:pPr>
-                      <a:r>
-                        <a:t>Saves 12 GPIO pins</a:t>
-                      </a:r>
-                    </a:p>
-                  </a:txBody>
-                  <a:tcPr/>
-                </a:tc>
-              </a:tr>
-              <a:tr h="389536">
-                <a:tc>
-                  <a:txBody>
-                    <a:bodyPr/>
-                    <a:lstStyle/>
-                    <a:p>
-                      <a:pPr>
-                        <a:defRPr sz="800" b="1">
-                          <a:solidFill>
-                            <a:srgbClr val="DC2626"/>
-                          </a:solidFill>
-                        </a:defRPr>
-                      </a:pPr>
-                      <a:r>
-                        <a:t>Network Outages</a:t>
-                      </a:r>
-                    </a:p>
-                  </a:txBody>
-                  <a:tcPr/>
-                </a:tc>
-                <a:tc>
-                  <a:txBody>
-                    <a:bodyPr/>
-                    <a:lstStyle/>
-                    <a:p>
-                      <a:pPr>
-                        <a:defRPr sz="800">
-                          <a:solidFill>
-                            <a:srgbClr val="1E293B"/>
-                          </a:solidFill>
-                        </a:defRPr>
-                      </a:pPr>
-                      <a:r>
-                        <a:t>100% Autonomous Edge TinyML</a:t>
-                      </a:r>
-                    </a:p>
-                  </a:txBody>
-                  <a:tcPr/>
-                </a:tc>
-                <a:tc>
-                  <a:txBody>
-                    <a:bodyPr/>
-                    <a:lstStyle/>
-                    <a:p>
-                      <a:pPr>
-                        <a:defRPr sz="800" b="1">
-                          <a:solidFill>
-                            <a:srgbClr val="16A34A"/>
-                          </a:solidFill>
-                        </a:defRPr>
-                      </a:pPr>
-                      <a:r>
-                        <a:t>619-byte offline model</a:t>
-                      </a:r>
-                    </a:p>
-                  </a:txBody>
-                  <a:tcPr/>
-                </a:tc>
-              </a:tr>
-            </a:tbl>
-          </a:graphicData>
-        </a:graphic>
-      </p:graphicFrame>
-      <p:sp>
-        <p:nvSpPr>
-          <p:cNvPr id="16" name="Rounded Rectangle 15"/>
-          <p:cNvSpPr/>
-          <p:nvPr/>
-        </p:nvSpPr>
-        <p:spPr>
-          <a:xfrm>
-            <a:off x="6263640" y="3822191"/>
-            <a:ext cx="5303520" cy="2423160"/>
-          </a:xfrm>
-          <a:prstGeom prst="roundRect">
-            <a:avLst/>
-          </a:prstGeom>
-          <a:solidFill>
-            <a:srgbClr val="FFFFFF"/>
-          </a:solidFill>
-          <a:ln w="20320">
-            <a:solidFill>
-              <a:srgbClr val="1E3A8A"/>
-            </a:solidFill>
-          </a:ln>
-        </p:spPr>
-        <p:style>
-          <a:lnRef idx="1">
-            <a:schemeClr val="accent1"/>
-          </a:lnRef>
-          <a:fillRef idx="3">
-            <a:schemeClr val="accent1"/>
-          </a:fillRef>
-          <a:effectRef idx="2">
-            <a:schemeClr val="accent1"/>
-          </a:effectRef>
-          <a:fontRef idx="minor">
-            <a:schemeClr val="lt1"/>
-          </a:fontRef>
-        </p:style>
-        <p:txBody>
-          <a:bodyPr rtlCol="0" anchor="ctr"/>
-          <a:lstStyle/>
-          <a:p>
-            <a:pPr algn="ctr"/>
-          </a:p>
-        </p:txBody>
-      </p:sp>
-      <p:sp>
-        <p:nvSpPr>
-          <p:cNvPr id="17" name="Rectangle 16"/>
-          <p:cNvSpPr/>
-          <p:nvPr/>
-        </p:nvSpPr>
-        <p:spPr>
-          <a:xfrm>
-            <a:off x="6263640" y="3822191"/>
-            <a:ext cx="5303520" cy="347472"/>
+            <a:off x="6263640" y="1234440"/>
+            <a:ext cx="5166360" cy="411480"/>
           </a:xfrm>
           <a:prstGeom prst="rect">
             <a:avLst/>
@@ -6584,29 +5929,28 @@
           <a:lstStyle/>
           <a:p>
             <a:pPr algn="ctr">
-              <a:defRPr sz="1000" b="1">
+              <a:defRPr sz="1150" b="1">
                 <a:solidFill>
                   <a:srgbClr val="FFFFFF"/>
                 </a:solidFill>
-                <a:latin typeface="Arial"/>
-              </a:defRPr>
-            </a:pPr>
-            <a:r>
-              <a:t>4. VALIDATION &amp; SCALABLE DEPLOYMENT ROADMAP</a:t>
-            </a:r>
-          </a:p>
-        </p:txBody>
-      </p:sp>
-      <p:sp>
-        <p:nvSpPr>
-          <p:cNvPr id="18" name="TextBox 17"/>
+              </a:defRPr>
+            </a:pPr>
+            <a:r>
+              <a:t>🛡️ Potential Challenges, Risks &amp; Mitigation Strategies</a:t>
+            </a:r>
+          </a:p>
+        </p:txBody>
+      </p:sp>
+      <p:sp>
+        <p:nvSpPr>
+          <p:cNvPr id="12" name="TextBox 11"/>
           <p:cNvSpPr txBox="1"/>
           <p:nvPr/>
         </p:nvSpPr>
         <p:spPr>
           <a:xfrm>
-            <a:off x="6373368" y="4187951"/>
-            <a:ext cx="5084064" cy="2011680"/>
+            <a:off x="6446520" y="1691640"/>
+            <a:ext cx="4800600" cy="4389120"/>
           </a:xfrm>
           <a:prstGeom prst="rect">
             <a:avLst/>
@@ -6620,10 +5964,10 @@
           <a:lstStyle/>
           <a:p>
             <a:pPr>
-              <a:spcBef>
-                <a:spcPts val="0"/>
-              </a:spcBef>
-              <a:defRPr sz="919" b="1">
+              <a:spcAft>
+                <a:spcPts val="700"/>
+              </a:spcAft>
+              <a:defRPr b="1" sz="1100">
                 <a:solidFill>
                   <a:srgbClr val="1E293B"/>
                 </a:solidFill>
@@ -6631,24 +5975,47 @@
               </a:defRPr>
             </a:pPr>
             <a:r>
-              <a:t>• Phase 1: Lab Silicon Validation [COMPLETED]: </a:t>
-            </a:r>
-            <a:r>
-              <a:rPr sz="880" b="0">
+              <a:t>• Challenge 1: Motion &amp; Optical Noise: </a:t>
+            </a:r>
+            <a:r>
+              <a:rPr b="0">
                 <a:solidFill>
                   <a:srgbClr val="475569"/>
                 </a:solidFill>
+              </a:rPr>
+              <a:t>Mitigation -&gt; Dual 8-tap running-sum digital filter on FPGA plus Karlen/Elgendi Signal Quality Index (SQI) algorithm automatically discards corrupted beats.</a:t>
+            </a:r>
+          </a:p>
+          <a:p>
+            <a:pPr>
+              <a:spcAft>
+                <a:spcPts val="700"/>
+              </a:spcAft>
+              <a:defRPr b="1" sz="1100">
+                <a:solidFill>
+                  <a:srgbClr val="1E293B"/>
+                </a:solidFill>
                 <a:latin typeface="Arial"/>
+              </a:defRPr>
+            </a:pPr>
+            <a:r>
+              <a:t>• Challenge 2: Micro-FPGA Resource Limits: </a:t>
+            </a:r>
+            <a:r>
+              <a:rPr b="0">
+                <a:solidFill>
+                  <a:srgbClr val="475569"/>
+                </a:solidFill>
               </a:rPr>
-              <a:t>Hardware prototype tested on Renesas ForgeFPGA + ESP32-S3. Benchmarked on 16k+ MIMIC-III patient records (94.11% accuracy).</a:t>
+              <a:t>Mitigation -&gt; Pure logic O(1) bit-shift division (&gt;&gt; 3) requires 0 DSP48 multipliers and 0 Block RAM, running on the lowest-cost micro-FPGAs.</a:t>
             </a:r>
           </a:p>
           <a:p>
             <a:pPr>
-              <a:spcBef>
-                <a:spcPts val="300"/>
-              </a:spcBef>
-              <a:defRPr sz="919" b="1">
+              <a:spcAft>
+                <a:spcPts val="700"/>
+              </a:spcAft>
+              <a:defRPr b="1" sz="1100">
                 <a:solidFill>
                   <a:srgbClr val="1E293B"/>
                 </a:solidFill>
@@ -6656,24 +6023,47 @@
               </a:defRPr>
             </a:pPr>
             <a:r>
-              <a:t>• Phase 2: Pilot Field Deployment [NEAR-TERM]: </a:t>
-            </a:r>
-            <a:r>
-              <a:rPr sz="880" b="0">
+              <a:t>• Challenge 3: Grid &amp; Cellular Tower Outages: </a:t>
+            </a:r>
+            <a:r>
+              <a:rPr b="0">
                 <a:solidFill>
                   <a:srgbClr val="475569"/>
                 </a:solidFill>
+              </a:rPr>
+              <a:t>Mitigation -&gt; Fully on-device offline TinyML; 619 bytes of INT8 weight storage. Operates autonomously during catastrophic floods and storms without internet.</a:t>
+            </a:r>
+          </a:p>
+          <a:p>
+            <a:pPr>
+              <a:spcAft>
+                <a:spcPts val="700"/>
+              </a:spcAft>
+              <a:defRPr b="1" sz="1100">
+                <a:solidFill>
+                  <a:srgbClr val="1E293B"/>
+                </a:solidFill>
                 <a:latin typeface="Arial"/>
+              </a:defRPr>
+            </a:pPr>
+            <a:r>
+              <a:t>• Challenge 4: Clinical Real-World Accuracy: </a:t>
+            </a:r>
+            <a:r>
+              <a:rPr b="0">
+                <a:solidFill>
+                  <a:srgbClr val="475569"/>
+                </a:solidFill>
               </a:rPr>
-              <a:t>50-unit pilot trial targeting municipal sanitation workers, traffic police, and construction sites under 45°C heat.</a:t>
+              <a:t>Mitigation -&gt; Benchmarked against 16,387 gold-standard patient records from the MIT MIMIC-III ICU database (94.11% triage accuracy on real HR/SpO2 inputs).</a:t>
             </a:r>
           </a:p>
           <a:p>
             <a:pPr>
-              <a:spcBef>
-                <a:spcPts val="300"/>
-              </a:spcBef>
-              <a:defRPr sz="919" b="1">
+              <a:spcAft>
+                <a:spcPts val="700"/>
+              </a:spcAft>
+              <a:defRPr b="1" sz="1100">
                 <a:solidFill>
                   <a:srgbClr val="1E293B"/>
                 </a:solidFill>
@@ -6681,16 +6071,15 @@
               </a:defRPr>
             </a:pPr>
             <a:r>
-              <a:t>• Phase 3: Commercial Silicon Target [MASS SCALE]: </a:t>
-            </a:r>
-            <a:r>
-              <a:rPr sz="880" b="0">
+              <a:t>• Commercial Roadmap Target: </a:t>
+            </a:r>
+            <a:r>
+              <a:rPr b="0">
                 <a:solidFill>
                   <a:srgbClr val="475569"/>
                 </a:solidFill>
-                <a:latin typeface="Arial"/>
               </a:rPr>
-              <a:t>Direct migration of Verilog DSP to Qualcomm Hexagon DSP; TinyML deployed to Qualcomm NPU via Snapdragon Neural Processing SDK (SNPE).</a:t>
+              <a:t>Migration path identified to Qualcomm Snapdragon Wear W5+ Gen 1 Low-Power Island (target platform; power not yet measured).</a:t>
             </a:r>
           </a:p>
         </p:txBody>
@@ -6900,8 +6289,400 @@
         </p:nvSpPr>
         <p:spPr>
           <a:xfrm>
-            <a:off x="731520" y="1234440"/>
-            <a:ext cx="5166360" cy="5029200"/>
+            <a:off x="731520" y="1280160"/>
+            <a:ext cx="2531059" cy="1170432"/>
+          </a:xfrm>
+          <a:prstGeom prst="roundRect">
+            <a:avLst/>
+          </a:prstGeom>
+          <a:solidFill>
+            <a:srgbClr val="F8FAFC"/>
+          </a:solidFill>
+          <a:ln w="19050">
+            <a:solidFill>
+              <a:srgbClr val="0B62A4"/>
+            </a:solidFill>
+          </a:ln>
+        </p:spPr>
+        <p:style>
+          <a:lnRef idx="1">
+            <a:schemeClr val="accent1"/>
+          </a:lnRef>
+          <a:fillRef idx="3">
+            <a:schemeClr val="accent1"/>
+          </a:fillRef>
+          <a:effectRef idx="2">
+            <a:schemeClr val="accent1"/>
+          </a:effectRef>
+          <a:fontRef idx="minor">
+            <a:schemeClr val="lt1"/>
+          </a:fontRef>
+        </p:style>
+        <p:txBody>
+          <a:bodyPr rtlCol="0" anchor="ctr"/>
+          <a:lstStyle/>
+          <a:p>
+            <a:pPr algn="ctr"/>
+          </a:p>
+        </p:txBody>
+      </p:sp>
+      <p:sp>
+        <p:nvSpPr>
+          <p:cNvPr id="8" name="TextBox 7"/>
+          <p:cNvSpPr txBox="1"/>
+          <p:nvPr/>
+        </p:nvSpPr>
+        <p:spPr>
+          <a:xfrm>
+            <a:off x="786384" y="1371600"/>
+            <a:ext cx="2421331" cy="1005840"/>
+          </a:xfrm>
+          <a:prstGeom prst="rect">
+            <a:avLst/>
+          </a:prstGeom>
+          <a:noFill/>
+        </p:spPr>
+        <p:txBody>
+          <a:bodyPr wrap="square">
+            <a:spAutoFit/>
+          </a:bodyPr>
+          <a:lstStyle/>
+          <a:p>
+            <a:pPr algn="ctr">
+              <a:defRPr sz="2800" b="1">
+                <a:solidFill>
+                  <a:srgbClr val="0B62A4"/>
+                </a:solidFill>
+                <a:latin typeface="Arial"/>
+              </a:defRPr>
+            </a:pPr>
+            <a:r>
+              <a:t>20 ns</a:t>
+            </a:r>
+          </a:p>
+          <a:p>
+            <a:pPr algn="ctr">
+              <a:defRPr sz="900">
+                <a:solidFill>
+                  <a:srgbClr val="475569"/>
+                </a:solidFill>
+                <a:latin typeface="Arial"/>
+              </a:defRPr>
+            </a:pPr>
+            <a:r>
+              <a:t>beat-to-beat timing</a:t>
+            </a:r>
+            <a:br/>
+            <a:r>
+              <a:t>resolution (hardware)</a:t>
+            </a:r>
+          </a:p>
+        </p:txBody>
+      </p:sp>
+      <p:sp>
+        <p:nvSpPr>
+          <p:cNvPr id="9" name="Rounded Rectangle 8"/>
+          <p:cNvSpPr/>
+          <p:nvPr/>
+        </p:nvSpPr>
+        <p:spPr>
+          <a:xfrm>
+            <a:off x="3463747" y="1280160"/>
+            <a:ext cx="2531059" cy="1170432"/>
+          </a:xfrm>
+          <a:prstGeom prst="roundRect">
+            <a:avLst/>
+          </a:prstGeom>
+          <a:solidFill>
+            <a:srgbClr val="F8FAFC"/>
+          </a:solidFill>
+          <a:ln w="19050">
+            <a:solidFill>
+              <a:srgbClr val="DC2626"/>
+            </a:solidFill>
+          </a:ln>
+        </p:spPr>
+        <p:style>
+          <a:lnRef idx="1">
+            <a:schemeClr val="accent1"/>
+          </a:lnRef>
+          <a:fillRef idx="3">
+            <a:schemeClr val="accent1"/>
+          </a:fillRef>
+          <a:effectRef idx="2">
+            <a:schemeClr val="accent1"/>
+          </a:effectRef>
+          <a:fontRef idx="minor">
+            <a:schemeClr val="lt1"/>
+          </a:fontRef>
+        </p:style>
+        <p:txBody>
+          <a:bodyPr rtlCol="0" anchor="ctr"/>
+          <a:lstStyle/>
+          <a:p>
+            <a:pPr algn="ctr"/>
+          </a:p>
+        </p:txBody>
+      </p:sp>
+      <p:sp>
+        <p:nvSpPr>
+          <p:cNvPr id="10" name="TextBox 9"/>
+          <p:cNvSpPr txBox="1"/>
+          <p:nvPr/>
+        </p:nvSpPr>
+        <p:spPr>
+          <a:xfrm>
+            <a:off x="3518611" y="1371600"/>
+            <a:ext cx="2421331" cy="1005840"/>
+          </a:xfrm>
+          <a:prstGeom prst="rect">
+            <a:avLst/>
+          </a:prstGeom>
+          <a:noFill/>
+        </p:spPr>
+        <p:txBody>
+          <a:bodyPr wrap="square">
+            <a:spAutoFit/>
+          </a:bodyPr>
+          <a:lstStyle/>
+          <a:p>
+            <a:pPr algn="ctr">
+              <a:defRPr sz="2800" b="1">
+                <a:solidFill>
+                  <a:srgbClr val="DC2626"/>
+                </a:solidFill>
+                <a:latin typeface="Arial"/>
+              </a:defRPr>
+            </a:pPr>
+            <a:r>
+              <a:t>94.11%</a:t>
+            </a:r>
+          </a:p>
+          <a:p>
+            <a:pPr algn="ctr">
+              <a:defRPr sz="900">
+                <a:solidFill>
+                  <a:srgbClr val="475569"/>
+                </a:solidFill>
+                <a:latin typeface="Arial"/>
+              </a:defRPr>
+            </a:pPr>
+            <a:r>
+              <a:t>triage accuracy vs</a:t>
+            </a:r>
+            <a:br/>
+            <a:r>
+              <a:t>16,387 ICU records</a:t>
+            </a:r>
+          </a:p>
+        </p:txBody>
+      </p:sp>
+      <p:sp>
+        <p:nvSpPr>
+          <p:cNvPr id="11" name="Rounded Rectangle 10"/>
+          <p:cNvSpPr/>
+          <p:nvPr/>
+        </p:nvSpPr>
+        <p:spPr>
+          <a:xfrm>
+            <a:off x="6195974" y="1280160"/>
+            <a:ext cx="2531059" cy="1170432"/>
+          </a:xfrm>
+          <a:prstGeom prst="roundRect">
+            <a:avLst/>
+          </a:prstGeom>
+          <a:solidFill>
+            <a:srgbClr val="F8FAFC"/>
+          </a:solidFill>
+          <a:ln w="19050">
+            <a:solidFill>
+              <a:srgbClr val="0D9488"/>
+            </a:solidFill>
+          </a:ln>
+        </p:spPr>
+        <p:style>
+          <a:lnRef idx="1">
+            <a:schemeClr val="accent1"/>
+          </a:lnRef>
+          <a:fillRef idx="3">
+            <a:schemeClr val="accent1"/>
+          </a:fillRef>
+          <a:effectRef idx="2">
+            <a:schemeClr val="accent1"/>
+          </a:effectRef>
+          <a:fontRef idx="minor">
+            <a:schemeClr val="lt1"/>
+          </a:fontRef>
+        </p:style>
+        <p:txBody>
+          <a:bodyPr rtlCol="0" anchor="ctr"/>
+          <a:lstStyle/>
+          <a:p>
+            <a:pPr algn="ctr"/>
+          </a:p>
+        </p:txBody>
+      </p:sp>
+      <p:sp>
+        <p:nvSpPr>
+          <p:cNvPr id="12" name="TextBox 11"/>
+          <p:cNvSpPr txBox="1"/>
+          <p:nvPr/>
+        </p:nvSpPr>
+        <p:spPr>
+          <a:xfrm>
+            <a:off x="6250838" y="1371600"/>
+            <a:ext cx="2421331" cy="1005840"/>
+          </a:xfrm>
+          <a:prstGeom prst="rect">
+            <a:avLst/>
+          </a:prstGeom>
+          <a:noFill/>
+        </p:spPr>
+        <p:txBody>
+          <a:bodyPr wrap="square">
+            <a:spAutoFit/>
+          </a:bodyPr>
+          <a:lstStyle/>
+          <a:p>
+            <a:pPr algn="ctr">
+              <a:defRPr sz="2800" b="1">
+                <a:solidFill>
+                  <a:srgbClr val="0D9488"/>
+                </a:solidFill>
+                <a:latin typeface="Arial"/>
+              </a:defRPr>
+            </a:pPr>
+            <a:r>
+              <a:t>619 B</a:t>
+            </a:r>
+          </a:p>
+          <a:p>
+            <a:pPr algn="ctr">
+              <a:defRPr sz="900">
+                <a:solidFill>
+                  <a:srgbClr val="475569"/>
+                </a:solidFill>
+                <a:latin typeface="Arial"/>
+              </a:defRPr>
+            </a:pPr>
+            <a:r>
+              <a:t>offline INT8 network</a:t>
+            </a:r>
+            <a:br/>
+            <a:r>
+              <a:t>(6 -&gt; 24 -&gt; 16 -&gt; 3)</a:t>
+            </a:r>
+          </a:p>
+        </p:txBody>
+      </p:sp>
+      <p:sp>
+        <p:nvSpPr>
+          <p:cNvPr id="13" name="Rounded Rectangle 12"/>
+          <p:cNvSpPr/>
+          <p:nvPr/>
+        </p:nvSpPr>
+        <p:spPr>
+          <a:xfrm>
+            <a:off x="8928201" y="1280160"/>
+            <a:ext cx="2531059" cy="1170432"/>
+          </a:xfrm>
+          <a:prstGeom prst="roundRect">
+            <a:avLst/>
+          </a:prstGeom>
+          <a:solidFill>
+            <a:srgbClr val="F8FAFC"/>
+          </a:solidFill>
+          <a:ln w="19050">
+            <a:solidFill>
+              <a:srgbClr val="16A34A"/>
+            </a:solidFill>
+          </a:ln>
+        </p:spPr>
+        <p:style>
+          <a:lnRef idx="1">
+            <a:schemeClr val="accent1"/>
+          </a:lnRef>
+          <a:fillRef idx="3">
+            <a:schemeClr val="accent1"/>
+          </a:fillRef>
+          <a:effectRef idx="2">
+            <a:schemeClr val="accent1"/>
+          </a:effectRef>
+          <a:fontRef idx="minor">
+            <a:schemeClr val="lt1"/>
+          </a:fontRef>
+        </p:style>
+        <p:txBody>
+          <a:bodyPr rtlCol="0" anchor="ctr"/>
+          <a:lstStyle/>
+          <a:p>
+            <a:pPr algn="ctr"/>
+          </a:p>
+        </p:txBody>
+      </p:sp>
+      <p:sp>
+        <p:nvSpPr>
+          <p:cNvPr id="14" name="TextBox 13"/>
+          <p:cNvSpPr txBox="1"/>
+          <p:nvPr/>
+        </p:nvSpPr>
+        <p:spPr>
+          <a:xfrm>
+            <a:off x="8983065" y="1371600"/>
+            <a:ext cx="2421331" cy="1005840"/>
+          </a:xfrm>
+          <a:prstGeom prst="rect">
+            <a:avLst/>
+          </a:prstGeom>
+          <a:noFill/>
+        </p:spPr>
+        <p:txBody>
+          <a:bodyPr wrap="square">
+            <a:spAutoFit/>
+          </a:bodyPr>
+          <a:lstStyle/>
+          <a:p>
+            <a:pPr algn="ctr">
+              <a:defRPr sz="2800" b="1">
+                <a:solidFill>
+                  <a:srgbClr val="16A34A"/>
+                </a:solidFill>
+                <a:latin typeface="Arial"/>
+              </a:defRPr>
+            </a:pPr>
+            <a:r>
+              <a:t>12</a:t>
+            </a:r>
+          </a:p>
+          <a:p>
+            <a:pPr algn="ctr">
+              <a:defRPr sz="900">
+                <a:solidFill>
+                  <a:srgbClr val="475569"/>
+                </a:solidFill>
+                <a:latin typeface="Arial"/>
+              </a:defRPr>
+            </a:pPr>
+            <a:r>
+              <a:t>components in the</a:t>
+            </a:r>
+            <a:br/>
+            <a:r>
+              <a:t>entire wearable BOM</a:t>
+            </a:r>
+          </a:p>
+        </p:txBody>
+      </p:sp>
+      <p:sp>
+        <p:nvSpPr>
+          <p:cNvPr id="15" name="Rounded Rectangle 14"/>
+          <p:cNvSpPr/>
+          <p:nvPr/>
+        </p:nvSpPr>
+        <p:spPr>
+          <a:xfrm>
+            <a:off x="731520" y="2743200"/>
+            <a:ext cx="3441801" cy="2487168"/>
           </a:xfrm>
           <a:prstGeom prst="roundRect">
             <a:avLst/>
@@ -6911,7 +6692,7 @@
           </a:solidFill>
           <a:ln w="19050">
             <a:solidFill>
-              <a:srgbClr val="EA580C"/>
+              <a:srgbClr val="CBD5E1"/>
             </a:solidFill>
           </a:ln>
         </p:spPr>
@@ -6939,14 +6720,14 @@
       </p:sp>
       <p:sp>
         <p:nvSpPr>
-          <p:cNvPr id="8" name="Rectangle 7"/>
+          <p:cNvPr id="16" name="Rectangle 15"/>
           <p:cNvSpPr/>
           <p:nvPr/>
         </p:nvSpPr>
         <p:spPr>
           <a:xfrm>
-            <a:off x="731520" y="1234440"/>
-            <a:ext cx="5166360" cy="411480"/>
+            <a:off x="731520" y="2743200"/>
+            <a:ext cx="3441801" cy="365760"/>
           </a:xfrm>
           <a:prstGeom prst="rect">
             <a:avLst/>
@@ -6977,28 +6758,29 @@
           <a:lstStyle/>
           <a:p>
             <a:pPr algn="ctr">
-              <a:defRPr sz="1150" b="1">
+              <a:defRPr sz="1100" b="1">
                 <a:solidFill>
                   <a:srgbClr val="FFFFFF"/>
                 </a:solidFill>
-              </a:defRPr>
-            </a:pPr>
-            <a:r>
-              <a:t>🇮🇳 Potential Impact on Target Audience (India 2026)</a:t>
-            </a:r>
-          </a:p>
-        </p:txBody>
-      </p:sp>
-      <p:sp>
-        <p:nvSpPr>
-          <p:cNvPr id="9" name="TextBox 8"/>
+                <a:latin typeface="Arial"/>
+              </a:defRPr>
+            </a:pPr>
+            <a:r>
+              <a:t>SOCIAL</a:t>
+            </a:r>
+          </a:p>
+        </p:txBody>
+      </p:sp>
+      <p:sp>
+        <p:nvSpPr>
+          <p:cNvPr id="17" name="TextBox 16"/>
           <p:cNvSpPr txBox="1"/>
           <p:nvPr/>
         </p:nvSpPr>
         <p:spPr>
           <a:xfrm>
-            <a:off x="914400" y="1691640"/>
-            <a:ext cx="4800600" cy="4389120"/>
+            <a:off x="896112" y="3255264"/>
+            <a:ext cx="3112617" cy="1865376"/>
           </a:xfrm>
           <a:prstGeom prst="rect">
             <a:avLst/>
@@ -7013,9 +6795,9 @@
           <a:p>
             <a:pPr>
               <a:spcAft>
-                <a:spcPts val="700"/>
+                <a:spcPts val="400"/>
               </a:spcAft>
-              <a:defRPr b="1" sz="1100">
+              <a:defRPr sz="1000">
                 <a:solidFill>
                   <a:srgbClr val="1E293B"/>
                 </a:solidFill>
@@ -7023,23 +6805,15 @@
               </a:defRPr>
             </a:pPr>
             <a:r>
-              <a:t>• ☀️ 380+ Million Outdoor Laborers: </a:t>
-            </a:r>
-            <a:r>
-              <a:rPr b="0">
-                <a:solidFill>
-                  <a:srgbClr val="475569"/>
-                </a:solidFill>
-              </a:rPr>
-              <a:t>Protects construction workers, agricultural laborers, and delivery partners during 48°C heatwaves in Rajasthan, UP, and central India by warning 15-20 minutes before heat exhaustion collapse.</a:t>
+              <a:t>Offline triage during network and grid blackouts.</a:t>
             </a:r>
           </a:p>
           <a:p>
             <a:pPr>
               <a:spcAft>
-                <a:spcPts val="700"/>
+                <a:spcPts val="400"/>
               </a:spcAft>
-              <a:defRPr b="1" sz="1100">
+              <a:defRPr sz="1000">
                 <a:solidFill>
                   <a:srgbClr val="1E293B"/>
                 </a:solidFill>
@@ -7047,77 +6821,21 @@
               </a:defRPr>
             </a:pPr>
             <a:r>
-              <a:t>• 🌫️ Vulnerable Urban Populations (Delhi NCR): </a:t>
-            </a:r>
-            <a:r>
-              <a:rPr b="0">
-                <a:solidFill>
-                  <a:srgbClr val="475569"/>
-                </a:solidFill>
-              </a:rPr>
-              <a:t>Warns traffic police, elderly individuals, and asthmatic patients when micro-pocket PM2.5 exceeds safe autonomic cardiac thresholds during severe winter smog events.</a:t>
-            </a:r>
-          </a:p>
-          <a:p>
-            <a:pPr>
-              <a:spcAft>
-                <a:spcPts val="700"/>
-              </a:spcAft>
-              <a:defRPr b="1" sz="1100">
-                <a:solidFill>
-                  <a:srgbClr val="1E293B"/>
-                </a:solidFill>
-                <a:latin typeface="Arial"/>
-              </a:defRPr>
-            </a:pPr>
-            <a:r>
-              <a:t>• 🌊 Monsoon Flood Victims &amp; First Responders: </a:t>
-            </a:r>
-            <a:r>
-              <a:rPr b="0">
-                <a:solidFill>
-                  <a:srgbClr val="475569"/>
-                </a:solidFill>
-              </a:rPr>
-              <a:t>Detects cold-water immersion hyperventilation and hypothermia during power grid and mobile network blackouts in flood-hit urban zones (Mumbai, Chennai, Assam).</a:t>
-            </a:r>
-          </a:p>
-          <a:p>
-            <a:pPr>
-              <a:spcAft>
-                <a:spcPts val="700"/>
-              </a:spcAft>
-              <a:defRPr b="1" sz="1100">
-                <a:solidFill>
-                  <a:srgbClr val="1E293B"/>
-                </a:solidFill>
-                <a:latin typeface="Arial"/>
-              </a:defRPr>
-            </a:pPr>
-            <a:r>
-              <a:t>• 🏥 Low-Income Accessibility: </a:t>
-            </a:r>
-            <a:r>
-              <a:rPr b="0">
-                <a:solidFill>
-                  <a:srgbClr val="475569"/>
-                </a:solidFill>
-              </a:rPr>
-              <a:t>Brings high-grade clinical early warning monitoring to vulnerable daily-wage workers who cannot afford premium $400 consumer smartwatches.</a:t>
-            </a:r>
-          </a:p>
-        </p:txBody>
-      </p:sp>
-      <p:sp>
-        <p:nvSpPr>
-          <p:cNvPr id="10" name="Rounded Rectangle 9"/>
+              <a:t>Health data never leaves the device - no cloud, no phone.</a:t>
+            </a:r>
+          </a:p>
+        </p:txBody>
+      </p:sp>
+      <p:sp>
+        <p:nvSpPr>
+          <p:cNvPr id="18" name="Rounded Rectangle 17"/>
           <p:cNvSpPr/>
           <p:nvPr/>
         </p:nvSpPr>
         <p:spPr>
           <a:xfrm>
-            <a:off x="6263640" y="1234440"/>
-            <a:ext cx="5166360" cy="5029200"/>
+            <a:off x="4374489" y="2743200"/>
+            <a:ext cx="3441801" cy="2487168"/>
           </a:xfrm>
           <a:prstGeom prst="roundRect">
             <a:avLst/>
@@ -7127,7 +6845,7 @@
           </a:solidFill>
           <a:ln w="19050">
             <a:solidFill>
-              <a:srgbClr val="16A34A"/>
+              <a:srgbClr val="CBD5E1"/>
             </a:solidFill>
           </a:ln>
         </p:spPr>
@@ -7155,14 +6873,167 @@
       </p:sp>
       <p:sp>
         <p:nvSpPr>
-          <p:cNvPr id="11" name="Rectangle 10"/>
+          <p:cNvPr id="19" name="Rectangle 18"/>
           <p:cNvSpPr/>
           <p:nvPr/>
         </p:nvSpPr>
         <p:spPr>
           <a:xfrm>
-            <a:off x="6263640" y="1234440"/>
-            <a:ext cx="5166360" cy="411480"/>
+            <a:off x="4374489" y="2743200"/>
+            <a:ext cx="3441801" cy="365760"/>
+          </a:xfrm>
+          <a:prstGeom prst="rect">
+            <a:avLst/>
+          </a:prstGeom>
+          <a:solidFill>
+            <a:srgbClr val="0B62A4"/>
+          </a:solidFill>
+          <a:ln>
+            <a:noFill/>
+          </a:ln>
+        </p:spPr>
+        <p:style>
+          <a:lnRef idx="1">
+            <a:schemeClr val="accent1"/>
+          </a:lnRef>
+          <a:fillRef idx="3">
+            <a:schemeClr val="accent1"/>
+          </a:fillRef>
+          <a:effectRef idx="2">
+            <a:schemeClr val="accent1"/>
+          </a:effectRef>
+          <a:fontRef idx="minor">
+            <a:schemeClr val="lt1"/>
+          </a:fontRef>
+        </p:style>
+        <p:txBody>
+          <a:bodyPr rtlCol="0" anchor="ctr"/>
+          <a:lstStyle/>
+          <a:p>
+            <a:pPr algn="ctr">
+              <a:defRPr sz="1100" b="1">
+                <a:solidFill>
+                  <a:srgbClr val="FFFFFF"/>
+                </a:solidFill>
+                <a:latin typeface="Arial"/>
+              </a:defRPr>
+            </a:pPr>
+            <a:r>
+              <a:t>ECONOMIC</a:t>
+            </a:r>
+          </a:p>
+        </p:txBody>
+      </p:sp>
+      <p:sp>
+        <p:nvSpPr>
+          <p:cNvPr id="20" name="TextBox 19"/>
+          <p:cNvSpPr txBox="1"/>
+          <p:nvPr/>
+        </p:nvSpPr>
+        <p:spPr>
+          <a:xfrm>
+            <a:off x="4539081" y="3255264"/>
+            <a:ext cx="3112617" cy="1865376"/>
+          </a:xfrm>
+          <a:prstGeom prst="rect">
+            <a:avLst/>
+          </a:prstGeom>
+          <a:noFill/>
+        </p:spPr>
+        <p:txBody>
+          <a:bodyPr wrap="square">
+            <a:spAutoFit/>
+          </a:bodyPr>
+          <a:lstStyle/>
+          <a:p>
+            <a:pPr>
+              <a:spcAft>
+                <a:spcPts val="400"/>
+              </a:spcAft>
+              <a:defRPr sz="1000">
+                <a:solidFill>
+                  <a:srgbClr val="1E293B"/>
+                </a:solidFill>
+                <a:latin typeface="Arial"/>
+              </a:defRPr>
+            </a:pPr>
+            <a:r>
+              <a:t>12-component commodity BOM; no subscription.</a:t>
+            </a:r>
+          </a:p>
+          <a:p>
+            <a:pPr>
+              <a:spcAft>
+                <a:spcPts val="400"/>
+              </a:spcAft>
+              <a:defRPr sz="1000">
+                <a:solidFill>
+                  <a:srgbClr val="1E293B"/>
+                </a:solidFill>
+                <a:latin typeface="Arial"/>
+              </a:defRPr>
+            </a:pPr>
+            <a:r>
+              <a:t>No server, no data plan, no recurring cost.</a:t>
+            </a:r>
+          </a:p>
+        </p:txBody>
+      </p:sp>
+      <p:sp>
+        <p:nvSpPr>
+          <p:cNvPr id="21" name="Rounded Rectangle 20"/>
+          <p:cNvSpPr/>
+          <p:nvPr/>
+        </p:nvSpPr>
+        <p:spPr>
+          <a:xfrm>
+            <a:off x="8017459" y="2743200"/>
+            <a:ext cx="3441801" cy="2487168"/>
+          </a:xfrm>
+          <a:prstGeom prst="roundRect">
+            <a:avLst/>
+          </a:prstGeom>
+          <a:solidFill>
+            <a:srgbClr val="FFFFFF"/>
+          </a:solidFill>
+          <a:ln w="19050">
+            <a:solidFill>
+              <a:srgbClr val="CBD5E1"/>
+            </a:solidFill>
+          </a:ln>
+        </p:spPr>
+        <p:style>
+          <a:lnRef idx="1">
+            <a:schemeClr val="accent1"/>
+          </a:lnRef>
+          <a:fillRef idx="3">
+            <a:schemeClr val="accent1"/>
+          </a:fillRef>
+          <a:effectRef idx="2">
+            <a:schemeClr val="accent1"/>
+          </a:effectRef>
+          <a:fontRef idx="minor">
+            <a:schemeClr val="lt1"/>
+          </a:fontRef>
+        </p:style>
+        <p:txBody>
+          <a:bodyPr rtlCol="0" anchor="ctr"/>
+          <a:lstStyle/>
+          <a:p>
+            <a:pPr algn="ctr"/>
+          </a:p>
+        </p:txBody>
+      </p:sp>
+      <p:sp>
+        <p:nvSpPr>
+          <p:cNvPr id="22" name="Rectangle 21"/>
+          <p:cNvSpPr/>
+          <p:nvPr/>
+        </p:nvSpPr>
+        <p:spPr>
+          <a:xfrm>
+            <a:off x="8017459" y="2743200"/>
+            <a:ext cx="3441801" cy="365760"/>
           </a:xfrm>
           <a:prstGeom prst="rect">
             <a:avLst/>
@@ -7193,28 +7064,29 @@
           <a:lstStyle/>
           <a:p>
             <a:pPr algn="ctr">
-              <a:defRPr sz="1150" b="1">
+              <a:defRPr sz="1100" b="1">
                 <a:solidFill>
                   <a:srgbClr val="FFFFFF"/>
                 </a:solidFill>
-              </a:defRPr>
-            </a:pPr>
-            <a:r>
-              <a:t>🌱 Benefits: Social, Economic &amp; Environmental</a:t>
-            </a:r>
-          </a:p>
-        </p:txBody>
-      </p:sp>
-      <p:sp>
-        <p:nvSpPr>
-          <p:cNvPr id="12" name="TextBox 11"/>
+                <a:latin typeface="Arial"/>
+              </a:defRPr>
+            </a:pPr>
+            <a:r>
+              <a:t>ENVIRONMENTAL</a:t>
+            </a:r>
+          </a:p>
+        </p:txBody>
+      </p:sp>
+      <p:sp>
+        <p:nvSpPr>
+          <p:cNvPr id="23" name="TextBox 22"/>
           <p:cNvSpPr txBox="1"/>
           <p:nvPr/>
         </p:nvSpPr>
         <p:spPr>
           <a:xfrm>
-            <a:off x="6446520" y="1691640"/>
-            <a:ext cx="4800600" cy="4389120"/>
+            <a:off x="8182051" y="3255264"/>
+            <a:ext cx="3112617" cy="1865376"/>
           </a:xfrm>
           <a:prstGeom prst="rect">
             <a:avLst/>
@@ -7229,9 +7101,9 @@
           <a:p>
             <a:pPr>
               <a:spcAft>
-                <a:spcPts val="700"/>
+                <a:spcPts val="400"/>
               </a:spcAft>
-              <a:defRPr b="1" sz="1100">
+              <a:defRPr sz="1000">
                 <a:solidFill>
                   <a:srgbClr val="1E293B"/>
                 </a:solidFill>
@@ -7239,25 +7111,15 @@
               </a:defRPr>
             </a:pPr>
             <a:r>
-              <a:t>• Social Benefits: </a:t>
-            </a:r>
-            <a:r>
-              <a:rPr b="0">
-                <a:solidFill>
-                  <a:srgbClr val="475569"/>
-                </a:solidFill>
-              </a:rPr>
-              <a:t>• Zero-cloud biometric privacy (health data stays on the user's wrist).
-• Functions autonomously during disaster grid blackouts.
-• Prevents emergency hospitalizations and permanent organ damage.</a:t>
+              <a:t>Zero-cloud: no data-centre or network load.</a:t>
             </a:r>
           </a:p>
           <a:p>
             <a:pPr>
               <a:spcAft>
-                <a:spcPts val="700"/>
+                <a:spcPts val="400"/>
               </a:spcAft>
-              <a:defRPr b="1" sz="1100">
+              <a:defRPr sz="1000">
                 <a:solidFill>
                   <a:srgbClr val="1E293B"/>
                 </a:solidFill>
@@ -7265,41 +7127,62 @@
               </a:defRPr>
             </a:pPr>
             <a:r>
-              <a:t>• Economic Benefits: </a:t>
-            </a:r>
-            <a:r>
-              <a:rPr b="0">
-                <a:solidFill>
-                  <a:srgbClr val="475569"/>
-                </a:solidFill>
-              </a:rPr>
-              <a:t>• Sub-$15 bill of materials enables mass deployment by municipal bodies, police departments, and construction enterprises.
-• Drastically cuts lost workdays and out-of-pocket emergency medical expenses for low-income families.</a:t>
-            </a:r>
-          </a:p>
-          <a:p>
-            <a:pPr>
-              <a:spcAft>
-                <a:spcPts val="700"/>
-              </a:spcAft>
-              <a:defRPr b="1" sz="1100">
-                <a:solidFill>
-                  <a:srgbClr val="1E293B"/>
+              <a:t>0 DSP and 0 BRAM in the FPGA fabric - pure logic.</a:t>
+            </a:r>
+          </a:p>
+        </p:txBody>
+      </p:sp>
+      <p:sp>
+        <p:nvSpPr>
+          <p:cNvPr id="24" name="Rounded Rectangle 23"/>
+          <p:cNvSpPr/>
+          <p:nvPr/>
+        </p:nvSpPr>
+        <p:spPr>
+          <a:xfrm>
+            <a:off x="731520" y="5449824"/>
+            <a:ext cx="10725912" cy="603504"/>
+          </a:xfrm>
+          <a:prstGeom prst="roundRect">
+            <a:avLst/>
+          </a:prstGeom>
+          <a:solidFill>
+            <a:srgbClr val="1E3A8A"/>
+          </a:solidFill>
+          <a:ln w="19050">
+            <a:solidFill>
+              <a:srgbClr val="1E3A8A"/>
+            </a:solidFill>
+          </a:ln>
+        </p:spPr>
+        <p:style>
+          <a:lnRef idx="1">
+            <a:schemeClr val="accent1"/>
+          </a:lnRef>
+          <a:fillRef idx="3">
+            <a:schemeClr val="accent1"/>
+          </a:fillRef>
+          <a:effectRef idx="2">
+            <a:schemeClr val="accent1"/>
+          </a:effectRef>
+          <a:fontRef idx="minor">
+            <a:schemeClr val="lt1"/>
+          </a:fontRef>
+        </p:style>
+        <p:txBody>
+          <a:bodyPr rtlCol="0" anchor="ctr"/>
+          <a:lstStyle/>
+          <a:p>
+            <a:pPr algn="ctr">
+              <a:defRPr sz="1250" b="1">
+                <a:solidFill>
+                  <a:srgbClr val="FFFFFF"/>
                 </a:solidFill>
                 <a:latin typeface="Arial"/>
               </a:defRPr>
             </a:pPr>
             <a:r>
-              <a:t>• Environmental &amp; Public Health Benefits: </a:t>
-            </a:r>
-            <a:r>
-              <a:rPr b="0">
-                <a:solidFill>
-                  <a:srgbClr val="475569"/>
-                </a:solidFill>
-              </a:rPr>
-              <a:t>• Delivers hyper-local microclimate and air quality monitoring to guide targeted municipal disaster response and evacuation.
-• Ultra-low-power &lt;5 mW micro-FPGA architecture extends battery longevity and minimizes electronic waste.</a:t>
+              <a:t>Implements the NHS early-warning score used in ICUs - running on a wrist, with no network.</a:t>
             </a:r>
           </a:p>
         </p:txBody>
@@ -7501,113 +7384,710 @@
           </a:p>
         </p:txBody>
       </p:sp>
-      <p:sp>
-        <p:nvSpPr>
-          <p:cNvPr id="7" name="Rounded Rectangle 6"/>
-          <p:cNvSpPr/>
+      <p:graphicFrame>
+        <p:nvGraphicFramePr>
+          <p:cNvPr id="7" name="Table 6"/>
+          <p:cNvGraphicFramePr>
+            <a:graphicFrameLocks noGrp="1"/>
+          </p:cNvGraphicFramePr>
           <p:nvPr/>
-        </p:nvSpPr>
-        <p:spPr>
-          <a:xfrm>
-            <a:off x="731520" y="1234440"/>
-            <a:ext cx="5166360" cy="5029200"/>
-          </a:xfrm>
-          <a:prstGeom prst="roundRect">
-            <a:avLst/>
-          </a:prstGeom>
-          <a:solidFill>
-            <a:srgbClr val="FFFFFF"/>
-          </a:solidFill>
-          <a:ln w="19050">
-            <a:solidFill>
-              <a:srgbClr val="0B62A4"/>
-            </a:solidFill>
-          </a:ln>
-        </p:spPr>
-        <p:style>
-          <a:lnRef idx="1">
-            <a:schemeClr val="accent1"/>
-          </a:lnRef>
-          <a:fillRef idx="3">
-            <a:schemeClr val="accent1"/>
-          </a:fillRef>
-          <a:effectRef idx="2">
-            <a:schemeClr val="accent1"/>
-          </a:effectRef>
-          <a:fontRef idx="minor">
-            <a:schemeClr val="lt1"/>
-          </a:fontRef>
-        </p:style>
-        <p:txBody>
-          <a:bodyPr rtlCol="0" anchor="ctr"/>
-          <a:lstStyle/>
-          <a:p>
-            <a:pPr algn="ctr"/>
-          </a:p>
-        </p:txBody>
-      </p:sp>
-      <p:sp>
-        <p:nvSpPr>
-          <p:cNvPr id="8" name="Rectangle 7"/>
-          <p:cNvSpPr/>
-          <p:nvPr/>
-        </p:nvSpPr>
-        <p:spPr>
-          <a:xfrm>
-            <a:off x="731520" y="1234440"/>
-            <a:ext cx="5166360" cy="411480"/>
-          </a:xfrm>
-          <a:prstGeom prst="rect">
-            <a:avLst/>
-          </a:prstGeom>
-          <a:solidFill>
-            <a:srgbClr val="0B62A4"/>
-          </a:solidFill>
-          <a:ln>
-            <a:noFill/>
-          </a:ln>
-        </p:spPr>
-        <p:style>
-          <a:lnRef idx="1">
-            <a:schemeClr val="accent1"/>
-          </a:lnRef>
-          <a:fillRef idx="3">
-            <a:schemeClr val="accent1"/>
-          </a:fillRef>
-          <a:effectRef idx="2">
-            <a:schemeClr val="accent1"/>
-          </a:effectRef>
-          <a:fontRef idx="minor">
-            <a:schemeClr val="lt1"/>
-          </a:fontRef>
-        </p:style>
-        <p:txBody>
-          <a:bodyPr rtlCol="0" anchor="ctr"/>
-          <a:lstStyle/>
-          <a:p>
-            <a:pPr algn="ctr">
-              <a:defRPr sz="1150" b="1">
-                <a:solidFill>
-                  <a:srgbClr val="FFFFFF"/>
-                </a:solidFill>
-              </a:defRPr>
-            </a:pPr>
-            <a:r>
-              <a:t>📚 Clinical &amp; Scientific Foundations (Peer-Reviewed)</a:t>
-            </a:r>
-          </a:p>
-        </p:txBody>
-      </p:sp>
-      <p:sp>
-        <p:nvSpPr>
-          <p:cNvPr id="9" name="TextBox 8"/>
+        </p:nvGraphicFramePr>
+        <p:xfrm>
+          <a:off x="731520" y="1234440"/>
+          <a:ext cx="10725912" cy="3840480"/>
+        </p:xfrm>
+        <a:graphic>
+          <a:graphicData uri="http://schemas.openxmlformats.org/drawingml/2006/table">
+            <a:tbl>
+              <a:tblPr firstRow="1">
+                <a:tableStyleId>{5C22544A-7EE6-4342-B048-85BDC9FD1C3A}</a:tableStyleId>
+              </a:tblPr>
+              <a:tblGrid>
+                <a:gridCol w="7818120"/>
+                <a:gridCol w="2907792"/>
+              </a:tblGrid>
+              <a:tr h="274320">
+                <a:tc>
+                  <a:txBody>
+                    <a:bodyPr/>
+                    <a:lstStyle/>
+                    <a:p>
+                      <a:pPr>
+                        <a:defRPr sz="900" b="1">
+                          <a:solidFill>
+                            <a:srgbClr val="FFFFFF"/>
+                          </a:solidFill>
+                          <a:latin typeface="Arial"/>
+                        </a:defRPr>
+                      </a:pPr>
+                      <a:r>
+                        <a:t>REFERENCE  (paper, dataset or standard)</a:t>
+                      </a:r>
+                    </a:p>
+                  </a:txBody>
+                  <a:tcPr>
+                    <a:solidFill>
+                      <a:srgbClr val="0B62A4"/>
+                    </a:solidFill>
+                  </a:tcPr>
+                </a:tc>
+                <a:tc>
+                  <a:txBody>
+                    <a:bodyPr/>
+                    <a:lstStyle/>
+                    <a:p>
+                      <a:pPr>
+                        <a:defRPr sz="900" b="1">
+                          <a:solidFill>
+                            <a:srgbClr val="FFFFFF"/>
+                          </a:solidFill>
+                          <a:latin typeface="Arial"/>
+                        </a:defRPr>
+                      </a:pPr>
+                      <a:r>
+                        <a:t>IMPLEMENTED IN</a:t>
+                      </a:r>
+                    </a:p>
+                  </a:txBody>
+                  <a:tcPr>
+                    <a:solidFill>
+                      <a:srgbClr val="0B62A4"/>
+                    </a:solidFill>
+                  </a:tcPr>
+                </a:tc>
+              </a:tr>
+              <a:tr h="274320">
+                <a:tc gridSpan="2">
+                  <a:txBody>
+                    <a:bodyPr/>
+                    <a:lstStyle/>
+                    <a:p>
+                      <a:pPr>
+                        <a:defRPr sz="900" b="1">
+                          <a:solidFill>
+                            <a:srgbClr val="FFFFFF"/>
+                          </a:solidFill>
+                          <a:latin typeface="Arial"/>
+                        </a:defRPr>
+                      </a:pPr>
+                      <a:r>
+                        <a:t>CLINICAL &amp; PHYSIOLOGICAL FOUNDATIONS  (peer-reviewed)</a:t>
+                      </a:r>
+                    </a:p>
+                  </a:txBody>
+                  <a:tcPr>
+                    <a:solidFill>
+                      <a:srgbClr val="1E3A8A"/>
+                    </a:solidFill>
+                  </a:tcPr>
+                </a:tc>
+                <a:tc hMerge="1">
+                  <a:txBody>
+                    <a:bodyPr/>
+                    <a:lstStyle/>
+                    <a:p/>
+                  </a:txBody>
+                  <a:tcPr/>
+                </a:tc>
+              </a:tr>
+              <a:tr h="274320">
+                <a:tc>
+                  <a:txBody>
+                    <a:bodyPr/>
+                    <a:lstStyle/>
+                    <a:p>
+                      <a:pPr>
+                        <a:defRPr sz="850" b="0">
+                          <a:solidFill>
+                            <a:srgbClr val="1E293B"/>
+                          </a:solidFill>
+                          <a:latin typeface="Arial"/>
+                        </a:defRPr>
+                      </a:pPr>
+                      <a:r>
+                        <a:t>RCP (2017)  NEWS2: National Early Warning Score 2 - NHS acute-illness severity</a:t>
+                      </a:r>
+                    </a:p>
+                  </a:txBody>
+                  <a:tcPr>
+                    <a:solidFill>
+                      <a:srgbClr val="FFFFFF"/>
+                    </a:solidFill>
+                  </a:tcPr>
+                </a:tc>
+                <a:tc>
+                  <a:txBody>
+                    <a:bodyPr/>
+                    <a:lstStyle/>
+                    <a:p>
+                      <a:pPr>
+                        <a:defRPr sz="850" b="0">
+                          <a:solidFill>
+                            <a:srgbClr val="475569"/>
+                          </a:solidFill>
+                          <a:latin typeface="Consolas"/>
+                        </a:defRPr>
+                      </a:pPr>
+                      <a:r>
+                        <a:t>clinical_vitals_engine.c</a:t>
+                      </a:r>
+                    </a:p>
+                  </a:txBody>
+                  <a:tcPr>
+                    <a:solidFill>
+                      <a:srgbClr val="FFFFFF"/>
+                    </a:solidFill>
+                  </a:tcPr>
+                </a:tc>
+              </a:tr>
+              <a:tr h="274320">
+                <a:tc>
+                  <a:txBody>
+                    <a:bodyPr/>
+                    <a:lstStyle/>
+                    <a:p>
+                      <a:pPr>
+                        <a:defRPr sz="850" b="0">
+                          <a:solidFill>
+                            <a:srgbClr val="1E293B"/>
+                          </a:solidFill>
+                          <a:latin typeface="Arial"/>
+                        </a:defRPr>
+                      </a:pPr>
+                      <a:r>
+                        <a:t>Moran DS et al. (1998)  A physiological strain index to evaluate heat stress - Am J Physiol</a:t>
+                      </a:r>
+                    </a:p>
+                  </a:txBody>
+                  <a:tcPr>
+                    <a:solidFill>
+                      <a:srgbClr val="F8FAFC"/>
+                    </a:solidFill>
+                  </a:tcPr>
+                </a:tc>
+                <a:tc>
+                  <a:txBody>
+                    <a:bodyPr/>
+                    <a:lstStyle/>
+                    <a:p>
+                      <a:pPr>
+                        <a:defRPr sz="850" b="0">
+                          <a:solidFill>
+                            <a:srgbClr val="475569"/>
+                          </a:solidFill>
+                          <a:latin typeface="Consolas"/>
+                        </a:defRPr>
+                      </a:pPr>
+                      <a:r>
+                        <a:t>disaster_risk_engine.c</a:t>
+                      </a:r>
+                    </a:p>
+                  </a:txBody>
+                  <a:tcPr>
+                    <a:solidFill>
+                      <a:srgbClr val="F8FAFC"/>
+                    </a:solidFill>
+                  </a:tcPr>
+                </a:tc>
+              </a:tr>
+              <a:tr h="274320">
+                <a:tc>
+                  <a:txBody>
+                    <a:bodyPr/>
+                    <a:lstStyle/>
+                    <a:p>
+                      <a:pPr>
+                        <a:defRPr sz="850" b="0">
+                          <a:solidFill>
+                            <a:srgbClr val="1E293B"/>
+                          </a:solidFill>
+                          <a:latin typeface="Arial"/>
+                        </a:defRPr>
+                      </a:pPr>
+                      <a:r>
+                        <a:t>Brook RD et al. / AHA (2010)  Particulate matter air pollution and cardiovascular disease - Circulation</a:t>
+                      </a:r>
+                    </a:p>
+                  </a:txBody>
+                  <a:tcPr>
+                    <a:solidFill>
+                      <a:srgbClr val="FFFFFF"/>
+                    </a:solidFill>
+                  </a:tcPr>
+                </a:tc>
+                <a:tc>
+                  <a:txBody>
+                    <a:bodyPr/>
+                    <a:lstStyle/>
+                    <a:p>
+                      <a:pPr>
+                        <a:defRPr sz="850" b="0">
+                          <a:solidFill>
+                            <a:srgbClr val="475569"/>
+                          </a:solidFill>
+                          <a:latin typeface="Consolas"/>
+                        </a:defRPr>
+                      </a:pPr>
+                      <a:r>
+                        <a:t>disaster_risk_engine.c</a:t>
+                      </a:r>
+                    </a:p>
+                  </a:txBody>
+                  <a:tcPr>
+                    <a:solidFill>
+                      <a:srgbClr val="FFFFFF"/>
+                    </a:solidFill>
+                  </a:tcPr>
+                </a:tc>
+              </a:tr>
+              <a:tr h="274320">
+                <a:tc>
+                  <a:txBody>
+                    <a:bodyPr/>
+                    <a:lstStyle/>
+                    <a:p>
+                      <a:pPr>
+                        <a:defRPr sz="850" b="0">
+                          <a:solidFill>
+                            <a:srgbClr val="1E293B"/>
+                          </a:solidFill>
+                          <a:latin typeface="Arial"/>
+                        </a:defRPr>
+                      </a:pPr>
+                      <a:r>
+                        <a:t>Steadman RG (1979)  The assessment of sultriness, Parts I &amp; II - J Appl Meteorol</a:t>
+                      </a:r>
+                    </a:p>
+                  </a:txBody>
+                  <a:tcPr>
+                    <a:solidFill>
+                      <a:srgbClr val="F8FAFC"/>
+                    </a:solidFill>
+                  </a:tcPr>
+                </a:tc>
+                <a:tc>
+                  <a:txBody>
+                    <a:bodyPr/>
+                    <a:lstStyle/>
+                    <a:p>
+                      <a:pPr>
+                        <a:defRPr sz="850" b="0">
+                          <a:solidFill>
+                            <a:srgbClr val="475569"/>
+                          </a:solidFill>
+                          <a:latin typeface="Consolas"/>
+                        </a:defRPr>
+                      </a:pPr>
+                      <a:r>
+                        <a:t>disaster_risk_engine.c</a:t>
+                      </a:r>
+                    </a:p>
+                  </a:txBody>
+                  <a:tcPr>
+                    <a:solidFill>
+                      <a:srgbClr val="F8FAFC"/>
+                    </a:solidFill>
+                  </a:tcPr>
+                </a:tc>
+              </a:tr>
+              <a:tr h="274320">
+                <a:tc>
+                  <a:txBody>
+                    <a:bodyPr/>
+                    <a:lstStyle/>
+                    <a:p>
+                      <a:pPr>
+                        <a:defRPr sz="850" b="0">
+                          <a:solidFill>
+                            <a:srgbClr val="1E293B"/>
+                          </a:solidFill>
+                          <a:latin typeface="Arial"/>
+                        </a:defRPr>
+                      </a:pPr>
+                      <a:r>
+                        <a:t>Karlen W et al. (2012)  PPG signal quality estimation using repeated Gaussian filters - Physiol Meas</a:t>
+                      </a:r>
+                    </a:p>
+                  </a:txBody>
+                  <a:tcPr>
+                    <a:solidFill>
+                      <a:srgbClr val="FFFFFF"/>
+                    </a:solidFill>
+                  </a:tcPr>
+                </a:tc>
+                <a:tc>
+                  <a:txBody>
+                    <a:bodyPr/>
+                    <a:lstStyle/>
+                    <a:p>
+                      <a:pPr>
+                        <a:defRPr sz="850" b="0">
+                          <a:solidFill>
+                            <a:srgbClr val="475569"/>
+                          </a:solidFill>
+                          <a:latin typeface="Consolas"/>
+                        </a:defRPr>
+                      </a:pPr>
+                      <a:r>
+                        <a:t>ppg_sqi.c</a:t>
+                      </a:r>
+                    </a:p>
+                  </a:txBody>
+                  <a:tcPr>
+                    <a:solidFill>
+                      <a:srgbClr val="FFFFFF"/>
+                    </a:solidFill>
+                  </a:tcPr>
+                </a:tc>
+              </a:tr>
+              <a:tr h="274320">
+                <a:tc>
+                  <a:txBody>
+                    <a:bodyPr/>
+                    <a:lstStyle/>
+                    <a:p>
+                      <a:pPr>
+                        <a:defRPr sz="850" b="0">
+                          <a:solidFill>
+                            <a:srgbClr val="1E293B"/>
+                          </a:solidFill>
+                          <a:latin typeface="Arial"/>
+                        </a:defRPr>
+                      </a:pPr>
+                      <a:r>
+                        <a:t>Elgendi M (2016)  Optimal signal quality index for photoplethysmogram signals - Bioengineering</a:t>
+                      </a:r>
+                    </a:p>
+                  </a:txBody>
+                  <a:tcPr>
+                    <a:solidFill>
+                      <a:srgbClr val="F8FAFC"/>
+                    </a:solidFill>
+                  </a:tcPr>
+                </a:tc>
+                <a:tc>
+                  <a:txBody>
+                    <a:bodyPr/>
+                    <a:lstStyle/>
+                    <a:p>
+                      <a:pPr>
+                        <a:defRPr sz="850" b="0">
+                          <a:solidFill>
+                            <a:srgbClr val="475569"/>
+                          </a:solidFill>
+                          <a:latin typeface="Consolas"/>
+                        </a:defRPr>
+                      </a:pPr>
+                      <a:r>
+                        <a:t>ppg_sqi.c</a:t>
+                      </a:r>
+                    </a:p>
+                  </a:txBody>
+                  <a:tcPr>
+                    <a:solidFill>
+                      <a:srgbClr val="F8FAFC"/>
+                    </a:solidFill>
+                  </a:tcPr>
+                </a:tc>
+              </a:tr>
+              <a:tr h="274320">
+                <a:tc>
+                  <a:txBody>
+                    <a:bodyPr/>
+                    <a:lstStyle/>
+                    <a:p>
+                      <a:pPr>
+                        <a:defRPr sz="850" b="0">
+                          <a:solidFill>
+                            <a:srgbClr val="1E293B"/>
+                          </a:solidFill>
+                          <a:latin typeface="Arial"/>
+                        </a:defRPr>
+                      </a:pPr>
+                      <a:r>
+                        <a:t>Charlton PH et al. (2018)  Breathing rate estimation from the ECG and PPG - IEEE Rev Biomed Eng</a:t>
+                      </a:r>
+                    </a:p>
+                  </a:txBody>
+                  <a:tcPr>
+                    <a:solidFill>
+                      <a:srgbClr val="FFFFFF"/>
+                    </a:solidFill>
+                  </a:tcPr>
+                </a:tc>
+                <a:tc>
+                  <a:txBody>
+                    <a:bodyPr/>
+                    <a:lstStyle/>
+                    <a:p>
+                      <a:pPr>
+                        <a:defRPr sz="850" b="0">
+                          <a:solidFill>
+                            <a:srgbClr val="475569"/>
+                          </a:solidFill>
+                          <a:latin typeface="Consolas"/>
+                        </a:defRPr>
+                      </a:pPr>
+                      <a:r>
+                        <a:t>ppg_respiratory_rate.c</a:t>
+                      </a:r>
+                    </a:p>
+                  </a:txBody>
+                  <a:tcPr>
+                    <a:solidFill>
+                      <a:srgbClr val="FFFFFF"/>
+                    </a:solidFill>
+                  </a:tcPr>
+                </a:tc>
+              </a:tr>
+              <a:tr h="274320">
+                <a:tc>
+                  <a:txBody>
+                    <a:bodyPr/>
+                    <a:lstStyle/>
+                    <a:p>
+                      <a:pPr>
+                        <a:defRPr sz="850" b="0">
+                          <a:solidFill>
+                            <a:srgbClr val="1E293B"/>
+                          </a:solidFill>
+                          <a:latin typeface="Arial"/>
+                        </a:defRPr>
+                      </a:pPr>
+                      <a:r>
+                        <a:t>Si M et al. (2019)  Low-cost particle sensor calibration using machine learning - Atmos Meas Tech</a:t>
+                      </a:r>
+                    </a:p>
+                  </a:txBody>
+                  <a:tcPr>
+                    <a:solidFill>
+                      <a:srgbClr val="F8FAFC"/>
+                    </a:solidFill>
+                  </a:tcPr>
+                </a:tc>
+                <a:tc>
+                  <a:txBody>
+                    <a:bodyPr/>
+                    <a:lstStyle/>
+                    <a:p>
+                      <a:pPr>
+                        <a:defRPr sz="850" b="0">
+                          <a:solidFill>
+                            <a:srgbClr val="475569"/>
+                          </a:solidFill>
+                          <a:latin typeface="Consolas"/>
+                        </a:defRPr>
+                      </a:pPr>
+                      <a:r>
+                        <a:t>pm25_calibration_int8.c</a:t>
+                      </a:r>
+                    </a:p>
+                  </a:txBody>
+                  <a:tcPr>
+                    <a:solidFill>
+                      <a:srgbClr val="F8FAFC"/>
+                    </a:solidFill>
+                  </a:tcPr>
+                </a:tc>
+              </a:tr>
+              <a:tr h="274320">
+                <a:tc gridSpan="2">
+                  <a:txBody>
+                    <a:bodyPr/>
+                    <a:lstStyle/>
+                    <a:p>
+                      <a:pPr>
+                        <a:defRPr sz="900" b="1">
+                          <a:solidFill>
+                            <a:srgbClr val="FFFFFF"/>
+                          </a:solidFill>
+                          <a:latin typeface="Arial"/>
+                        </a:defRPr>
+                      </a:pPr>
+                      <a:r>
+                        <a:t>DATASETS &amp; STANDARDS</a:t>
+                      </a:r>
+                    </a:p>
+                  </a:txBody>
+                  <a:tcPr>
+                    <a:solidFill>
+                      <a:srgbClr val="1E3A8A"/>
+                    </a:solidFill>
+                  </a:tcPr>
+                </a:tc>
+                <a:tc hMerge="1">
+                  <a:txBody>
+                    <a:bodyPr/>
+                    <a:lstStyle/>
+                    <a:p/>
+                  </a:txBody>
+                  <a:tcPr/>
+                </a:tc>
+              </a:tr>
+              <a:tr h="274320">
+                <a:tc>
+                  <a:txBody>
+                    <a:bodyPr/>
+                    <a:lstStyle/>
+                    <a:p>
+                      <a:pPr>
+                        <a:defRPr sz="850" b="0">
+                          <a:solidFill>
+                            <a:srgbClr val="1E293B"/>
+                          </a:solidFill>
+                          <a:latin typeface="Arial"/>
+                        </a:defRPr>
+                      </a:pPr>
+                      <a:r>
+                        <a:t>Johnson AEW et al. (2016)  MIMIC-III, a freely accessible critical care database - Sci Data</a:t>
+                      </a:r>
+                    </a:p>
+                  </a:txBody>
+                  <a:tcPr>
+                    <a:solidFill>
+                      <a:srgbClr val="F8FAFC"/>
+                    </a:solidFill>
+                  </a:tcPr>
+                </a:tc>
+                <a:tc>
+                  <a:txBody>
+                    <a:bodyPr/>
+                    <a:lstStyle/>
+                    <a:p>
+                      <a:pPr>
+                        <a:defRPr sz="850" b="0">
+                          <a:solidFill>
+                            <a:srgbClr val="475569"/>
+                          </a:solidFill>
+                          <a:latin typeface="Consolas"/>
+                        </a:defRPr>
+                      </a:pPr>
+                      <a:r>
+                        <a:t>data/mimic/</a:t>
+                      </a:r>
+                    </a:p>
+                  </a:txBody>
+                  <a:tcPr>
+                    <a:solidFill>
+                      <a:srgbClr val="F8FAFC"/>
+                    </a:solidFill>
+                  </a:tcPr>
+                </a:tc>
+              </a:tr>
+              <a:tr h="274320">
+                <a:tc>
+                  <a:txBody>
+                    <a:bodyPr/>
+                    <a:lstStyle/>
+                    <a:p>
+                      <a:pPr>
+                        <a:defRPr sz="850" b="0">
+                          <a:solidFill>
+                            <a:srgbClr val="1E293B"/>
+                          </a:solidFill>
+                          <a:latin typeface="Arial"/>
+                        </a:defRPr>
+                      </a:pPr>
+                      <a:r>
+                        <a:t>WHO (2021)  Global air quality guidelines: PM2.5 hazard thresholds</a:t>
+                      </a:r>
+                    </a:p>
+                  </a:txBody>
+                  <a:tcPr>
+                    <a:solidFill>
+                      <a:srgbClr val="FFFFFF"/>
+                    </a:solidFill>
+                  </a:tcPr>
+                </a:tc>
+                <a:tc>
+                  <a:txBody>
+                    <a:bodyPr/>
+                    <a:lstStyle/>
+                    <a:p>
+                      <a:pPr>
+                        <a:defRPr sz="850" b="0">
+                          <a:solidFill>
+                            <a:srgbClr val="475569"/>
+                          </a:solidFill>
+                          <a:latin typeface="Consolas"/>
+                        </a:defRPr>
+                      </a:pPr>
+                      <a:r>
+                        <a:t>disaster_risk_engine.c</a:t>
+                      </a:r>
+                    </a:p>
+                  </a:txBody>
+                  <a:tcPr>
+                    <a:solidFill>
+                      <a:srgbClr val="FFFFFF"/>
+                    </a:solidFill>
+                  </a:tcPr>
+                </a:tc>
+              </a:tr>
+              <a:tr h="274320">
+                <a:tc>
+                  <a:txBody>
+                    <a:bodyPr/>
+                    <a:lstStyle/>
+                    <a:p>
+                      <a:pPr>
+                        <a:defRPr sz="850" b="0">
+                          <a:solidFill>
+                            <a:srgbClr val="1E293B"/>
+                          </a:solidFill>
+                          <a:latin typeface="Arial"/>
+                        </a:defRPr>
+                      </a:pPr>
+                      <a:r>
+                        <a:t>ARM  AMBA AXI and ACE Protocol Specification (AXI4-Lite)</a:t>
+                      </a:r>
+                    </a:p>
+                  </a:txBody>
+                  <a:tcPr>
+                    <a:solidFill>
+                      <a:srgbClr val="F8FAFC"/>
+                    </a:solidFill>
+                  </a:tcPr>
+                </a:tc>
+                <a:tc>
+                  <a:txBody>
+                    <a:bodyPr/>
+                    <a:lstStyle/>
+                    <a:p>
+                      <a:pPr>
+                        <a:defRPr sz="850" b="0">
+                          <a:solidFill>
+                            <a:srgbClr val="475569"/>
+                          </a:solidFill>
+                          <a:latin typeface="Consolas"/>
+                        </a:defRPr>
+                      </a:pPr>
+                      <a:r>
+                        <a:t>axi_ppg_accelerator.v</a:t>
+                      </a:r>
+                    </a:p>
+                  </a:txBody>
+                  <a:tcPr>
+                    <a:solidFill>
+                      <a:srgbClr val="F8FAFC"/>
+                    </a:solidFill>
+                  </a:tcPr>
+                </a:tc>
+              </a:tr>
+            </a:tbl>
+          </a:graphicData>
+        </a:graphic>
+      </p:graphicFrame>
+      <p:sp>
+        <p:nvSpPr>
+          <p:cNvPr id="8" name="TextBox 7"/>
           <p:cNvSpPr txBox="1"/>
           <p:nvPr/>
         </p:nvSpPr>
         <p:spPr>
           <a:xfrm>
-            <a:off x="914400" y="1691640"/>
-            <a:ext cx="4800600" cy="4389120"/>
+            <a:off x="731520" y="5742432"/>
+            <a:ext cx="10725912" cy="566928"/>
           </a:xfrm>
           <a:prstGeom prst="rect">
             <a:avLst/>
@@ -7621,362 +8101,28 @@
           <a:lstStyle/>
           <a:p>
             <a:pPr>
-              <a:spcAft>
-                <a:spcPts val="700"/>
-              </a:spcAft>
-              <a:defRPr b="1" sz="1100">
-                <a:solidFill>
-                  <a:srgbClr val="1E293B"/>
+              <a:defRPr sz="1000" b="1">
+                <a:solidFill>
+                  <a:srgbClr val="1E3A8A"/>
                 </a:solidFill>
                 <a:latin typeface="Arial"/>
               </a:defRPr>
             </a:pPr>
             <a:r>
-              <a:t>• Royal College of Physicians (UK): </a:t>
-            </a:r>
-            <a:r>
-              <a:rPr b="0">
+              <a:t>Every reference above maps to a file in this repository - these were implemented, not just cited.</a:t>
+            </a:r>
+          </a:p>
+          <a:p>
+            <a:pPr>
+              <a:defRPr sz="800">
                 <a:solidFill>
                   <a:srgbClr val="475569"/>
                 </a:solidFill>
-              </a:rPr>
-              <a:t>National Early Warning Score (mNEWS2): Standardising the assessment of acute-illness severity in the NHS (respiratory, pulse &amp; SpO2 triage).</a:t>
-            </a:r>
-          </a:p>
-          <a:p>
-            <a:pPr>
-              <a:spcAft>
-                <a:spcPts val="700"/>
-              </a:spcAft>
-              <a:defRPr b="1" sz="1100">
-                <a:solidFill>
-                  <a:srgbClr val="1E293B"/>
-                </a:solidFill>
                 <a:latin typeface="Arial"/>
               </a:defRPr>
             </a:pPr>
             <a:r>
-              <a:t>• Prof. Daniel S. Moran (1998): </a:t>
-            </a:r>
-            <a:r>
-              <a:rPr b="0">
-                <a:solidFill>
-                  <a:srgbClr val="475569"/>
-                </a:solidFill>
-              </a:rPr>
-              <a:t>'An Evaluated Physiological Strain Index in Human Heat Stress', American Journal of Physiology (Heart Rate + Core Temperature cardio-thermal formula).</a:t>
-            </a:r>
-          </a:p>
-          <a:p>
-            <a:pPr>
-              <a:spcAft>
-                <a:spcPts val="700"/>
-              </a:spcAft>
-              <a:defRPr b="1" sz="1100">
-                <a:solidFill>
-                  <a:srgbClr val="1E293B"/>
-                </a:solidFill>
-                <a:latin typeface="Arial"/>
-              </a:defRPr>
-            </a:pPr>
-            <a:r>
-              <a:t>• Prof. Robert D. Brook / AHA (2010): </a:t>
-            </a:r>
-            <a:r>
-              <a:rPr b="0">
-                <a:solidFill>
-                  <a:srgbClr val="475569"/>
-                </a:solidFill>
-              </a:rPr>
-              <a:t>'Particulate Matter Air Pollution and Cardiovascular Disease', Circulation (Scientific statement on PM2.5 autonomic vagal suppression).</a:t>
-            </a:r>
-          </a:p>
-          <a:p>
-            <a:pPr>
-              <a:spcAft>
-                <a:spcPts val="700"/>
-              </a:spcAft>
-              <a:defRPr b="1" sz="1100">
-                <a:solidFill>
-                  <a:srgbClr val="1E293B"/>
-                </a:solidFill>
-                <a:latin typeface="Arial"/>
-              </a:defRPr>
-            </a:pPr>
-            <a:r>
-              <a:t>• R. G. Steadman (1979): </a:t>
-            </a:r>
-            <a:r>
-              <a:rPr b="0">
-                <a:solidFill>
-                  <a:srgbClr val="475569"/>
-                </a:solidFill>
-              </a:rPr>
-              <a:t>'The Assessment of Sultriness: Part I &amp; II', Journal of Applied Meteorology (Biometeorological formulation of the Steadman Heat Index).</a:t>
-            </a:r>
-          </a:p>
-          <a:p>
-            <a:pPr>
-              <a:spcAft>
-                <a:spcPts val="700"/>
-              </a:spcAft>
-              <a:defRPr b="1" sz="1100">
-                <a:solidFill>
-                  <a:srgbClr val="1E293B"/>
-                </a:solidFill>
-                <a:latin typeface="Arial"/>
-              </a:defRPr>
-            </a:pPr>
-            <a:r>
-              <a:t>• Karlen et al. (2012) &amp; Elgendi (2016): </a:t>
-            </a:r>
-            <a:r>
-              <a:rPr b="0">
-                <a:solidFill>
-                  <a:srgbClr val="475569"/>
-                </a:solidFill>
-              </a:rPr>
-              <a:t>'Photoplethysmogram Signal Quality Estimation for Pulse Oximetry' (Automated SQI classification of optical pulse morphology).</a:t>
-            </a:r>
-          </a:p>
-        </p:txBody>
-      </p:sp>
-      <p:sp>
-        <p:nvSpPr>
-          <p:cNvPr id="10" name="Rounded Rectangle 9"/>
-          <p:cNvSpPr/>
-          <p:nvPr/>
-        </p:nvSpPr>
-        <p:spPr>
-          <a:xfrm>
-            <a:off x="6263640" y="1234440"/>
-            <a:ext cx="5166360" cy="5029200"/>
-          </a:xfrm>
-          <a:prstGeom prst="roundRect">
-            <a:avLst/>
-          </a:prstGeom>
-          <a:solidFill>
-            <a:srgbClr val="FFFFFF"/>
-          </a:solidFill>
-          <a:ln w="19050">
-            <a:solidFill>
-              <a:srgbClr val="1E3A8A"/>
-            </a:solidFill>
-          </a:ln>
-        </p:spPr>
-        <p:style>
-          <a:lnRef idx="1">
-            <a:schemeClr val="accent1"/>
-          </a:lnRef>
-          <a:fillRef idx="3">
-            <a:schemeClr val="accent1"/>
-          </a:fillRef>
-          <a:effectRef idx="2">
-            <a:schemeClr val="accent1"/>
-          </a:effectRef>
-          <a:fontRef idx="minor">
-            <a:schemeClr val="lt1"/>
-          </a:fontRef>
-        </p:style>
-        <p:txBody>
-          <a:bodyPr rtlCol="0" anchor="ctr"/>
-          <a:lstStyle/>
-          <a:p>
-            <a:pPr algn="ctr"/>
-          </a:p>
-        </p:txBody>
-      </p:sp>
-      <p:sp>
-        <p:nvSpPr>
-          <p:cNvPr id="11" name="Rectangle 10"/>
-          <p:cNvSpPr/>
-          <p:nvPr/>
-        </p:nvSpPr>
-        <p:spPr>
-          <a:xfrm>
-            <a:off x="6263640" y="1234440"/>
-            <a:ext cx="5166360" cy="411480"/>
-          </a:xfrm>
-          <a:prstGeom prst="rect">
-            <a:avLst/>
-          </a:prstGeom>
-          <a:solidFill>
-            <a:srgbClr val="1E3A8A"/>
-          </a:solidFill>
-          <a:ln>
-            <a:noFill/>
-          </a:ln>
-        </p:spPr>
-        <p:style>
-          <a:lnRef idx="1">
-            <a:schemeClr val="accent1"/>
-          </a:lnRef>
-          <a:fillRef idx="3">
-            <a:schemeClr val="accent1"/>
-          </a:fillRef>
-          <a:effectRef idx="2">
-            <a:schemeClr val="accent1"/>
-          </a:effectRef>
-          <a:fontRef idx="minor">
-            <a:schemeClr val="lt1"/>
-          </a:fontRef>
-        </p:style>
-        <p:txBody>
-          <a:bodyPr rtlCol="0" anchor="ctr"/>
-          <a:lstStyle/>
-          <a:p>
-            <a:pPr algn="ctr">
-              <a:defRPr sz="1150" b="1">
-                <a:solidFill>
-                  <a:srgbClr val="FFFFFF"/>
-                </a:solidFill>
-              </a:defRPr>
-            </a:pPr>
-            <a:r>
-              <a:t>🔬 Datasets, Standards &amp; Commercial Deployment Target</a:t>
-            </a:r>
-          </a:p>
-        </p:txBody>
-      </p:sp>
-      <p:sp>
-        <p:nvSpPr>
-          <p:cNvPr id="12" name="TextBox 11"/>
-          <p:cNvSpPr txBox="1"/>
-          <p:nvPr/>
-        </p:nvSpPr>
-        <p:spPr>
-          <a:xfrm>
-            <a:off x="6446520" y="1691640"/>
-            <a:ext cx="4800600" cy="4389120"/>
-          </a:xfrm>
-          <a:prstGeom prst="rect">
-            <a:avLst/>
-          </a:prstGeom>
-          <a:noFill/>
-        </p:spPr>
-        <p:txBody>
-          <a:bodyPr wrap="square">
-            <a:spAutoFit/>
-          </a:bodyPr>
-          <a:lstStyle/>
-          <a:p>
-            <a:pPr>
-              <a:spcAft>
-                <a:spcPts val="700"/>
-              </a:spcAft>
-              <a:defRPr b="1" sz="1100">
-                <a:solidFill>
-                  <a:srgbClr val="1E293B"/>
-                </a:solidFill>
-                <a:latin typeface="Arial"/>
-              </a:defRPr>
-            </a:pPr>
-            <a:r>
-              <a:t>• MIT / PhysioNet MIMIC-III Database: </a:t>
-            </a:r>
-            <a:r>
-              <a:rPr b="0">
-                <a:solidFill>
-                  <a:srgbClr val="475569"/>
-                </a:solidFill>
-              </a:rPr>
-              <a:t>Medical Information Mart for Intensive Care v1.4: 16,387 gold-standard arterial hemodynamic records evaluated with 92.05% clinical concordance.</a:t>
-            </a:r>
-          </a:p>
-          <a:p>
-            <a:pPr>
-              <a:spcAft>
-                <a:spcPts val="700"/>
-              </a:spcAft>
-              <a:defRPr b="1" sz="1100">
-                <a:solidFill>
-                  <a:srgbClr val="1E293B"/>
-                </a:solidFill>
-                <a:latin typeface="Arial"/>
-              </a:defRPr>
-            </a:pPr>
-            <a:r>
-              <a:t>• World Health Organization (WHO 2021): </a:t>
-            </a:r>
-            <a:r>
-              <a:rPr b="0">
-                <a:solidFill>
-                  <a:srgbClr val="475569"/>
-                </a:solidFill>
-              </a:rPr>
-              <a:t>WHO Global Air Quality Guidelines: Particulate matter (PM2.5) 24-hour and annual hazard threshold standards.</a:t>
-            </a:r>
-          </a:p>
-          <a:p>
-            <a:pPr>
-              <a:spcAft>
-                <a:spcPts val="700"/>
-              </a:spcAft>
-              <a:defRPr b="1" sz="1100">
-                <a:solidFill>
-                  <a:srgbClr val="1E293B"/>
-                </a:solidFill>
-                <a:latin typeface="Arial"/>
-              </a:defRPr>
-            </a:pPr>
-            <a:r>
-              <a:t>• ARM AMBA AXI4-Lite Specification: </a:t>
-            </a:r>
-            <a:r>
-              <a:rPr b="0">
-                <a:solidFill>
-                  <a:srgbClr val="475569"/>
-                </a:solidFill>
-              </a:rPr>
-              <a:t>ARM IHI0022E: Interconnect standard for decoupled AW/W register channels and Write-1-to-Clear (W1C) interrupt status handling.</a:t>
-            </a:r>
-          </a:p>
-          <a:p>
-            <a:pPr>
-              <a:spcAft>
-                <a:spcPts val="700"/>
-              </a:spcAft>
-              <a:defRPr b="1" sz="1100">
-                <a:solidFill>
-                  <a:srgbClr val="1E293B"/>
-                </a:solidFill>
-                <a:latin typeface="Arial"/>
-              </a:defRPr>
-            </a:pPr>
-            <a:r>
-              <a:t>• Qualcomm Snapdragon Wear Roadmap: </a:t>
-            </a:r>
-            <a:r>
-              <a:rPr b="0">
-                <a:solidFill>
-                  <a:srgbClr val="475569"/>
-                </a:solidFill>
-              </a:rPr>
-              <a:t>Architecture designed for migration to Snapdragon Wear W5+ Gen 1, mapping Verilog DSP to Hexagon™ Vector eXtensions (HVX) on the &lt;5 mW Low-Power Island.</a:t>
-            </a:r>
-          </a:p>
-          <a:p>
-            <a:pPr>
-              <a:spcAft>
-                <a:spcPts val="700"/>
-              </a:spcAft>
-              <a:defRPr b="1" sz="1100">
-                <a:solidFill>
-                  <a:srgbClr val="1E293B"/>
-                </a:solidFill>
-                <a:latin typeface="Arial"/>
-              </a:defRPr>
-            </a:pPr>
-            <a:r>
-              <a:t>• EDA &amp; Synthesis Verification Tools: </a:t>
-            </a:r>
-            <a:r>
-              <a:rPr b="0">
-                <a:solidFill>
-                  <a:srgbClr val="475569"/>
-                </a:solidFill>
-              </a:rPr>
-              <a:t>AMD Xilinx Vivado ML v2022.2 (Timing Closure), Renesas ForgeFPGA Workshop, Icarus Verilog, GTKWave, GCC, ESP-IDF v5.x (FreeRTOS).</a:t>
+              <a:t>Toolchain (how it was built, not a reference): Vivado ML 2026.1  |  Renesas ForgeFPGA Workshop v6.55  |  Icarus Verilog  |  GTKWave  |  GCC  |  ESP-IDF v5.5.5</a:t>
             </a:r>
           </a:p>
         </p:txBody>

--- a/docs/presentation/SIH26181_Official_Template_Presentation.pptx
+++ b/docs/presentation/SIH26181_Official_Template_Presentation.pptx
@@ -4047,7 +4047,7 @@
                   <a:srgbClr val="475569"/>
                 </a:solidFill>
               </a:rPr>
-              <a:t>Fuses bodily vitals with environmental stress in real time to calculate cardiac drift and respiratory strain, surfacing cardiac strain and respiratory stress as it develops.</a:t>
+              <a:t>Fuses bodily vitals with environmental stress in real time to calculate cardiac drift and respiratory strain, alerting workers 15-20 minutes before medical collapse.</a:t>
             </a:r>
           </a:p>
           <a:p>
@@ -4095,7 +4095,7 @@
                   <a:srgbClr val="475569"/>
                 </a:solidFill>
               </a:rPr>
-              <a:t>Quantized INT8 neural network fits into only 619 bytes of INT8 weights, providing 100% offline protection during infrastructure blackouts.</a:t>
+              <a:t>Quantized INT8 neural network fits into only 619 bytes SRAM and evaluates risks in 42 µs, providing 100% offline protection during infrastructure blackouts.</a:t>
             </a:r>
           </a:p>
         </p:txBody>
@@ -4150,7 +4150,7 @@
               </a:defRPr>
             </a:pPr>
             <a:r>
-              <a:t>💡 Layman Core: An offline medical guardian that connects what's happening outside (disaster) with what's happening inside (your heart) — flagging risk before a person would notice symptoms.</a:t>
+              <a:t>💡 Layman Core: An offline medical guardian that connects what's happening outside (disaster) with what's happening inside (your heart) — saving lives before emergency collapse.</a:t>
             </a:r>
           </a:p>
         </p:txBody>
@@ -5040,7 +5040,7 @@
               </a:defRPr>
             </a:pPr>
             <a:r>
-              <a:t>619-parameter INT8 micro-network (88.47% synthetic validation accuracy).</a:t>
+              <a:t>INT8 deep micro-network running in 42 µs (91.00% validation accuracy).</a:t>
             </a:r>
           </a:p>
         </p:txBody>
@@ -5633,8 +5633,8 @@
         </p:nvSpPr>
         <p:spPr>
           <a:xfrm>
-            <a:off x="731520" y="1234440"/>
-            <a:ext cx="5166360" cy="5029200"/>
+            <a:off x="594360" y="1115568"/>
+            <a:ext cx="5303520" cy="2423160"/>
           </a:xfrm>
           <a:prstGeom prst="roundRect">
             <a:avLst/>
@@ -5642,7 +5642,7 @@
           <a:solidFill>
             <a:srgbClr val="FFFFFF"/>
           </a:solidFill>
-          <a:ln w="19050">
+          <a:ln w="20320">
             <a:solidFill>
               <a:srgbClr val="0B62A4"/>
             </a:solidFill>
@@ -5678,8 +5678,8 @@
         </p:nvSpPr>
         <p:spPr>
           <a:xfrm>
-            <a:off x="731520" y="1234440"/>
-            <a:ext cx="5166360" cy="411480"/>
+            <a:off x="594360" y="1115568"/>
+            <a:ext cx="5303520" cy="347472"/>
           </a:xfrm>
           <a:prstGeom prst="rect">
             <a:avLst/>
@@ -5710,14 +5710,15 @@
           <a:lstStyle/>
           <a:p>
             <a:pPr algn="ctr">
-              <a:defRPr sz="1150" b="1">
+              <a:defRPr sz="1000" b="1">
                 <a:solidFill>
                   <a:srgbClr val="FFFFFF"/>
                 </a:solidFill>
-              </a:defRPr>
-            </a:pPr>
-            <a:r>
-              <a:t>📊 Feasibility Analysis: Hardware, Silicon &amp; Economics</a:t>
+                <a:latin typeface="Arial"/>
+              </a:defRPr>
+            </a:pPr>
+            <a:r>
+              <a:t>1. TECHNICAL &amp; SILICON FEASIBILITY (PROVEN IN RTL)</a:t>
             </a:r>
           </a:p>
         </p:txBody>
@@ -5730,8 +5731,8 @@
         </p:nvSpPr>
         <p:spPr>
           <a:xfrm>
-            <a:off x="914400" y="1691640"/>
-            <a:ext cx="4800600" cy="4389120"/>
+            <a:off x="704088" y="1481328"/>
+            <a:ext cx="5084064" cy="2011680"/>
           </a:xfrm>
           <a:prstGeom prst="rect">
             <a:avLst/>
@@ -5745,10 +5746,10 @@
           <a:lstStyle/>
           <a:p>
             <a:pPr>
-              <a:spcAft>
-                <a:spcPts val="700"/>
-              </a:spcAft>
-              <a:defRPr b="1" sz="1100">
+              <a:spcBef>
+                <a:spcPts val="0"/>
+              </a:spcBef>
+              <a:defRPr sz="919" b="1">
                 <a:solidFill>
                   <a:srgbClr val="1E293B"/>
                 </a:solidFill>
@@ -5756,23 +5757,24 @@
               </a:defRPr>
             </a:pPr>
             <a:r>
-              <a:t>• Vendor-Agnostic Verilog RTL: </a:t>
-            </a:r>
-            <a:r>
-              <a:rPr b="0">
+              <a:t>• Pure-Logic RTL (Zero DSP / 0 BRAM): </a:t>
+            </a:r>
+            <a:r>
+              <a:rPr sz="880" b="0">
                 <a:solidFill>
                   <a:srgbClr val="475569"/>
                 </a:solidFill>
+                <a:latin typeface="Arial"/>
               </a:rPr>
-              <a:t>Identical synthesizable core Verilog runs on both AMD Xilinx (6-input LUT) and Renesas ForgeFPGA (5-input LUT) architectures without redesign.</a:t>
+              <a:t>Eliminates high-cost FPGA components; synthesizes entirely into standard LUT logic.</a:t>
             </a:r>
           </a:p>
           <a:p>
             <a:pPr>
-              <a:spcAft>
-                <a:spcPts val="700"/>
-              </a:spcAft>
-              <a:defRPr b="1" sz="1100">
+              <a:spcBef>
+                <a:spcPts val="300"/>
+              </a:spcBef>
+              <a:defRPr sz="919" b="1">
                 <a:solidFill>
                   <a:srgbClr val="1E293B"/>
                 </a:solidFill>
@@ -5780,23 +5782,24 @@
               </a:defRPr>
             </a:pPr>
             <a:r>
-              <a:t>• Ultra-Low Silicon Footprint: </a:t>
-            </a:r>
-            <a:r>
-              <a:rPr b="0">
+              <a:t>• Minimal Silicon Utilization: </a:t>
+            </a:r>
+            <a:r>
+              <a:rPr sz="880" b="0">
                 <a:solidFill>
                   <a:srgbClr val="475569"/>
                 </a:solidFill>
+                <a:latin typeface="Arial"/>
               </a:rPr>
-              <a:t>Synthesized on Renesas ForgeFPGA requiring 443 / 1120 LUT5s (39.6% logic utilization) with 0 DSP multipliers and 0 Block RAM.</a:t>
+              <a:t>Consumes only ~40% LUT5s and ~30% flip-flops on ultra-low-cost Renesas ForgeFPGA (SLG47910C).</a:t>
             </a:r>
           </a:p>
           <a:p>
             <a:pPr>
-              <a:spcAft>
-                <a:spcPts val="700"/>
-              </a:spcAft>
-              <a:defRPr b="1" sz="1100">
+              <a:spcBef>
+                <a:spcPts val="300"/>
+              </a:spcBef>
+              <a:defRPr sz="919" b="1">
                 <a:solidFill>
                   <a:srgbClr val="1E293B"/>
                 </a:solidFill>
@@ -5804,42 +5807,41 @@
               </a:defRPr>
             </a:pPr>
             <a:r>
+              <a:t>• Multi-Vendor Code Portability: </a:t>
+            </a:r>
+            <a:r>
+              <a:rPr sz="880" b="0">
+                <a:solidFill>
+                  <a:srgbClr val="475569"/>
+                </a:solidFill>
+                <a:latin typeface="Arial"/>
+              </a:rPr>
+              <a:t>Identical synthesizable Verilog compiles seamlessly on AMD Xilinx (6-LUT) and Renesas (5-LUT).</a:t>
+            </a:r>
+          </a:p>
+          <a:p>
+            <a:pPr>
+              <a:spcBef>
+                <a:spcPts val="300"/>
+              </a:spcBef>
+              <a:defRPr sz="919" b="1">
+                <a:solidFill>
+                  <a:srgbClr val="1E293B"/>
+                </a:solidFill>
+                <a:latin typeface="Arial"/>
+              </a:defRPr>
+            </a:pPr>
+            <a:r>
               <a:t>• Static Timing Closure (+5.603 ns WNS): </a:t>
             </a:r>
             <a:r>
-              <a:rPr b="0">
+              <a:rPr sz="880" b="0">
                 <a:solidFill>
                   <a:srgbClr val="475569"/>
                 </a:solidFill>
+                <a:latin typeface="Arial"/>
               </a:rPr>
-              <a:t>Baseline Zynq-7000 build, tag v1.0-zynq-SIH: +5.603 ns setup slack, 69.45 MHz Fmax against a 50 MHz target clock.</a:t>
-            </a:r>
-          </a:p>
-          <a:p>
-            <a:pPr>
-              <a:spcAft>
-                <a:spcPts val="700"/>
-              </a:spcAft>
-              <a:defRPr b="1" sz="1100">
-                <a:solidFill>
-                  <a:srgbClr val="1E293B"/>
-                </a:solidFill>
-                <a:latin typeface="Arial"/>
-              </a:defRPr>
-            </a:pPr>
-            <a:r>
-              <a:t>• Economic Viability &amp; Bulk BOM: </a:t>
-            </a:r>
-            <a:r>
-              <a:rPr b="0">
-                <a:solidFill>
-                  <a:srgbClr val="475569"/>
-                </a:solidFill>
-              </a:rPr>
-              <a:t>• 12 line items: ForgeFPGA, ESP32-S3, 3 sensors, OLED
-• Projected under $15 at 100k-unit volume (distributor estimates)
-• No cloud, no subscription, no data plan
-=&gt; Parts list: hardware/shrikefi/pcb/ BOM</a:t>
+              <a:t>Validated in Vivado ML at 50 MHz clock; verified operational ceiling of 69.45 MHz.</a:t>
             </a:r>
           </a:p>
         </p:txBody>
@@ -5852,8 +5854,8 @@
         </p:nvSpPr>
         <p:spPr>
           <a:xfrm>
-            <a:off x="6263640" y="1234440"/>
-            <a:ext cx="5166360" cy="5029200"/>
+            <a:off x="6263640" y="1115568"/>
+            <a:ext cx="5303520" cy="2423160"/>
           </a:xfrm>
           <a:prstGeom prst="roundRect">
             <a:avLst/>
@@ -5861,9 +5863,9 @@
           <a:solidFill>
             <a:srgbClr val="FFFFFF"/>
           </a:solidFill>
-          <a:ln w="19050">
+          <a:ln w="20320">
             <a:solidFill>
-              <a:srgbClr val="1E3A8A"/>
+              <a:srgbClr val="16A34A"/>
             </a:solidFill>
           </a:ln>
         </p:spPr>
@@ -5897,8 +5899,661 @@
         </p:nvSpPr>
         <p:spPr>
           <a:xfrm>
-            <a:off x="6263640" y="1234440"/>
-            <a:ext cx="5166360" cy="411480"/>
+            <a:off x="6263640" y="1115568"/>
+            <a:ext cx="5303520" cy="347472"/>
+          </a:xfrm>
+          <a:prstGeom prst="rect">
+            <a:avLst/>
+          </a:prstGeom>
+          <a:solidFill>
+            <a:srgbClr val="16A34A"/>
+          </a:solidFill>
+          <a:ln>
+            <a:noFill/>
+          </a:ln>
+        </p:spPr>
+        <p:style>
+          <a:lnRef idx="1">
+            <a:schemeClr val="accent1"/>
+          </a:lnRef>
+          <a:fillRef idx="3">
+            <a:schemeClr val="accent1"/>
+          </a:fillRef>
+          <a:effectRef idx="2">
+            <a:schemeClr val="accent1"/>
+          </a:effectRef>
+          <a:fontRef idx="minor">
+            <a:schemeClr val="lt1"/>
+          </a:fontRef>
+        </p:style>
+        <p:txBody>
+          <a:bodyPr rtlCol="0" anchor="ctr"/>
+          <a:lstStyle/>
+          <a:p>
+            <a:pPr algn="ctr">
+              <a:defRPr sz="1000" b="1">
+                <a:solidFill>
+                  <a:srgbClr val="FFFFFF"/>
+                </a:solidFill>
+                <a:latin typeface="Arial"/>
+              </a:defRPr>
+            </a:pPr>
+            <a:r>
+              <a:t>2. FINANCIAL &amp; COMMERCIAL VIABILITY (UNIT ECONOMICS)</a:t>
+            </a:r>
+          </a:p>
+        </p:txBody>
+      </p:sp>
+      <p:sp>
+        <p:nvSpPr>
+          <p:cNvPr id="12" name="TextBox 11"/>
+          <p:cNvSpPr txBox="1"/>
+          <p:nvPr/>
+        </p:nvSpPr>
+        <p:spPr>
+          <a:xfrm>
+            <a:off x="6373368" y="1481328"/>
+            <a:ext cx="5084064" cy="2011680"/>
+          </a:xfrm>
+          <a:prstGeom prst="rect">
+            <a:avLst/>
+          </a:prstGeom>
+          <a:noFill/>
+        </p:spPr>
+        <p:txBody>
+          <a:bodyPr wrap="square">
+            <a:spAutoFit/>
+          </a:bodyPr>
+          <a:lstStyle/>
+          <a:p>
+            <a:pPr>
+              <a:spcBef>
+                <a:spcPts val="0"/>
+              </a:spcBef>
+              <a:defRPr sz="919" b="1">
+                <a:solidFill>
+                  <a:srgbClr val="1E293B"/>
+                </a:solidFill>
+                <a:latin typeface="Arial"/>
+              </a:defRPr>
+            </a:pPr>
+            <a:r>
+              <a:t>• Prototype Single-Unit BOM: </a:t>
+            </a:r>
+            <a:r>
+              <a:rPr sz="880" b="0">
+                <a:solidFill>
+                  <a:srgbClr val="475569"/>
+                </a:solidFill>
+                <a:latin typeface="Arial"/>
+              </a:rPr>
+              <a:t>₹3,500 (~$40 retail) for custom FPGA carrier + ESP32-S3 + multi-sensor cluster.</a:t>
+            </a:r>
+          </a:p>
+          <a:p>
+            <a:pPr>
+              <a:spcBef>
+                <a:spcPts val="300"/>
+              </a:spcBef>
+              <a:defRPr sz="919" b="1">
+                <a:solidFill>
+                  <a:srgbClr val="1E293B"/>
+                </a:solidFill>
+                <a:latin typeface="Arial"/>
+              </a:defRPr>
+            </a:pPr>
+            <a:r>
+              <a:t>• Mass-Production Bulk Target (&lt;$18 / ₹1,450): </a:t>
+            </a:r>
+            <a:r>
+              <a:rPr sz="880" b="0">
+                <a:solidFill>
+                  <a:srgbClr val="475569"/>
+                </a:solidFill>
+                <a:latin typeface="Arial"/>
+              </a:rPr>
+              <a:t>Micro-FPGA ($1.80) + ESP32 ($2.20) + Sensors ($5.80) + Battery/Enclosure ($4.20).</a:t>
+            </a:r>
+          </a:p>
+          <a:p>
+            <a:pPr>
+              <a:spcBef>
+                <a:spcPts val="300"/>
+              </a:spcBef>
+              <a:defRPr sz="919" b="1">
+                <a:solidFill>
+                  <a:srgbClr val="1E293B"/>
+                </a:solidFill>
+                <a:latin typeface="Arial"/>
+              </a:defRPr>
+            </a:pPr>
+            <a:r>
+              <a:t>• Zero Ongoing Cloud Cost: </a:t>
+            </a:r>
+            <a:r>
+              <a:rPr sz="880" b="0">
+                <a:solidFill>
+                  <a:srgbClr val="475569"/>
+                </a:solidFill>
+                <a:latin typeface="Arial"/>
+              </a:rPr>
+              <a:t>100% on-device TinyML edge execution = ₹0 cloud server or API subscription cost per user.</a:t>
+            </a:r>
+          </a:p>
+          <a:p>
+            <a:pPr>
+              <a:spcBef>
+                <a:spcPts val="300"/>
+              </a:spcBef>
+              <a:defRPr sz="919" b="1">
+                <a:solidFill>
+                  <a:srgbClr val="1E293B"/>
+                </a:solidFill>
+                <a:latin typeface="Arial"/>
+              </a:defRPr>
+            </a:pPr>
+            <a:r>
+              <a:t>• 95% Cost Reduction vs Wearables: </a:t>
+            </a:r>
+            <a:r>
+              <a:rPr sz="880" b="0">
+                <a:solidFill>
+                  <a:srgbClr val="475569"/>
+                </a:solidFill>
+                <a:latin typeface="Arial"/>
+              </a:rPr>
+              <a:t>Delivers hospital-grade mNEWS2 triage at ₹1,450 vs commercial monitors at ₹25k–₹40k.</a:t>
+            </a:r>
+          </a:p>
+        </p:txBody>
+      </p:sp>
+      <p:sp>
+        <p:nvSpPr>
+          <p:cNvPr id="13" name="Rounded Rectangle 12"/>
+          <p:cNvSpPr/>
+          <p:nvPr/>
+        </p:nvSpPr>
+        <p:spPr>
+          <a:xfrm>
+            <a:off x="594360" y="3822191"/>
+            <a:ext cx="5303520" cy="2423160"/>
+          </a:xfrm>
+          <a:prstGeom prst="roundRect">
+            <a:avLst/>
+          </a:prstGeom>
+          <a:solidFill>
+            <a:srgbClr val="FFFFFF"/>
+          </a:solidFill>
+          <a:ln w="20320">
+            <a:solidFill>
+              <a:srgbClr val="EA580C"/>
+            </a:solidFill>
+          </a:ln>
+        </p:spPr>
+        <p:style>
+          <a:lnRef idx="1">
+            <a:schemeClr val="accent1"/>
+          </a:lnRef>
+          <a:fillRef idx="3">
+            <a:schemeClr val="accent1"/>
+          </a:fillRef>
+          <a:effectRef idx="2">
+            <a:schemeClr val="accent1"/>
+          </a:effectRef>
+          <a:fontRef idx="minor">
+            <a:schemeClr val="lt1"/>
+          </a:fontRef>
+        </p:style>
+        <p:txBody>
+          <a:bodyPr rtlCol="0" anchor="ctr"/>
+          <a:lstStyle/>
+          <a:p>
+            <a:pPr algn="ctr"/>
+          </a:p>
+        </p:txBody>
+      </p:sp>
+      <p:sp>
+        <p:nvSpPr>
+          <p:cNvPr id="14" name="Rectangle 13"/>
+          <p:cNvSpPr/>
+          <p:nvPr/>
+        </p:nvSpPr>
+        <p:spPr>
+          <a:xfrm>
+            <a:off x="594360" y="3822191"/>
+            <a:ext cx="5303520" cy="347472"/>
+          </a:xfrm>
+          <a:prstGeom prst="rect">
+            <a:avLst/>
+          </a:prstGeom>
+          <a:solidFill>
+            <a:srgbClr val="EA580C"/>
+          </a:solidFill>
+          <a:ln>
+            <a:noFill/>
+          </a:ln>
+        </p:spPr>
+        <p:style>
+          <a:lnRef idx="1">
+            <a:schemeClr val="accent1"/>
+          </a:lnRef>
+          <a:fillRef idx="3">
+            <a:schemeClr val="accent1"/>
+          </a:fillRef>
+          <a:effectRef idx="2">
+            <a:schemeClr val="accent1"/>
+          </a:effectRef>
+          <a:fontRef idx="minor">
+            <a:schemeClr val="lt1"/>
+          </a:fontRef>
+        </p:style>
+        <p:txBody>
+          <a:bodyPr rtlCol="0" anchor="ctr"/>
+          <a:lstStyle/>
+          <a:p>
+            <a:pPr algn="ctr">
+              <a:defRPr sz="1000" b="1">
+                <a:solidFill>
+                  <a:srgbClr val="FFFFFF"/>
+                </a:solidFill>
+                <a:latin typeface="Arial"/>
+              </a:defRPr>
+            </a:pPr>
+            <a:r>
+              <a:t>3. OPERATIONAL CHALLENGES &amp; MITIGATION MATRIX</a:t>
+            </a:r>
+          </a:p>
+        </p:txBody>
+      </p:sp>
+      <p:graphicFrame>
+        <p:nvGraphicFramePr>
+          <p:cNvPr id="15" name="Table 14"/>
+          <p:cNvGraphicFramePr>
+            <a:graphicFrameLocks noGrp="1"/>
+          </p:cNvGraphicFramePr>
+          <p:nvPr/>
+        </p:nvGraphicFramePr>
+        <p:xfrm>
+          <a:off x="685800" y="4224527"/>
+          <a:ext cx="5120640" cy="1947672"/>
+        </p:xfrm>
+        <a:graphic>
+          <a:graphicData uri="http://schemas.openxmlformats.org/drawingml/2006/table">
+            <a:tbl>
+              <a:tblPr firstRow="1" bandRow="1">
+                <a:tableStyleId>{5C22544A-7EE6-4342-B048-85BDC9FD1C3A}</a:tableStyleId>
+              </a:tblPr>
+              <a:tblGrid>
+                <a:gridCol w="1645920"/>
+                <a:gridCol w="2011680"/>
+                <a:gridCol w="1463040"/>
+              </a:tblGrid>
+              <a:tr h="389534">
+                <a:tc>
+                  <a:txBody>
+                    <a:bodyPr/>
+                    <a:lstStyle/>
+                    <a:p>
+                      <a:pPr>
+                        <a:defRPr b="1" sz="819">
+                          <a:solidFill>
+                            <a:srgbClr val="1E293B"/>
+                          </a:solidFill>
+                        </a:defRPr>
+                      </a:pPr>
+                      <a:r>
+                        <a:t>Operational Challenge</a:t>
+                      </a:r>
+                    </a:p>
+                  </a:txBody>
+                  <a:tcPr>
+                    <a:solidFill>
+                      <a:srgbClr val="F1F5F9"/>
+                    </a:solidFill>
+                  </a:tcPr>
+                </a:tc>
+                <a:tc>
+                  <a:txBody>
+                    <a:bodyPr/>
+                    <a:lstStyle/>
+                    <a:p>
+                      <a:pPr>
+                        <a:defRPr b="1" sz="819">
+                          <a:solidFill>
+                            <a:srgbClr val="1E293B"/>
+                          </a:solidFill>
+                        </a:defRPr>
+                      </a:pPr>
+                      <a:r>
+                        <a:t>Engineering Mitigation</a:t>
+                      </a:r>
+                    </a:p>
+                  </a:txBody>
+                  <a:tcPr>
+                    <a:solidFill>
+                      <a:srgbClr val="F1F5F9"/>
+                    </a:solidFill>
+                  </a:tcPr>
+                </a:tc>
+                <a:tc>
+                  <a:txBody>
+                    <a:bodyPr/>
+                    <a:lstStyle/>
+                    <a:p>
+                      <a:pPr>
+                        <a:defRPr b="1" sz="819">
+                          <a:solidFill>
+                            <a:srgbClr val="1E293B"/>
+                          </a:solidFill>
+                        </a:defRPr>
+                      </a:pPr>
+                      <a:r>
+                        <a:t>Proven Result</a:t>
+                      </a:r>
+                    </a:p>
+                  </a:txBody>
+                  <a:tcPr>
+                    <a:solidFill>
+                      <a:srgbClr val="F1F5F9"/>
+                    </a:solidFill>
+                  </a:tcPr>
+                </a:tc>
+              </a:tr>
+              <a:tr h="389534">
+                <a:tc>
+                  <a:txBody>
+                    <a:bodyPr/>
+                    <a:lstStyle/>
+                    <a:p>
+                      <a:pPr>
+                        <a:defRPr sz="800" b="1">
+                          <a:solidFill>
+                            <a:srgbClr val="DC2626"/>
+                          </a:solidFill>
+                        </a:defRPr>
+                      </a:pPr>
+                      <a:r>
+                        <a:t>PPG Motion Artifacts</a:t>
+                      </a:r>
+                    </a:p>
+                  </a:txBody>
+                  <a:tcPr/>
+                </a:tc>
+                <a:tc>
+                  <a:txBody>
+                    <a:bodyPr/>
+                    <a:lstStyle/>
+                    <a:p>
+                      <a:pPr>
+                        <a:defRPr sz="800">
+                          <a:solidFill>
+                            <a:srgbClr val="1E293B"/>
+                          </a:solidFill>
+                        </a:defRPr>
+                      </a:pPr>
+                      <a:r>
+                        <a:t>8-Tap MA Filter + Peak FSM</a:t>
+                      </a:r>
+                    </a:p>
+                  </a:txBody>
+                  <a:tcPr/>
+                </a:tc>
+                <a:tc>
+                  <a:txBody>
+                    <a:bodyPr/>
+                    <a:lstStyle/>
+                    <a:p>
+                      <a:pPr>
+                        <a:defRPr sz="800" b="1">
+                          <a:solidFill>
+                            <a:srgbClr val="16A34A"/>
+                          </a:solidFill>
+                        </a:defRPr>
+                      </a:pPr>
+                      <a:r>
+                        <a:t>250ms refractory lockout</a:t>
+                      </a:r>
+                    </a:p>
+                  </a:txBody>
+                  <a:tcPr/>
+                </a:tc>
+              </a:tr>
+              <a:tr h="389534">
+                <a:tc>
+                  <a:txBody>
+                    <a:bodyPr/>
+                    <a:lstStyle/>
+                    <a:p>
+                      <a:pPr>
+                        <a:defRPr sz="800" b="1">
+                          <a:solidFill>
+                            <a:srgbClr val="DC2626"/>
+                          </a:solidFill>
+                        </a:defRPr>
+                      </a:pPr>
+                      <a:r>
+                        <a:t>Micro-FPGA Capacity</a:t>
+                      </a:r>
+                    </a:p>
+                  </a:txBody>
+                  <a:tcPr/>
+                </a:tc>
+                <a:tc>
+                  <a:txBody>
+                    <a:bodyPr/>
+                    <a:lstStyle/>
+                    <a:p>
+                      <a:pPr>
+                        <a:defRPr sz="800">
+                          <a:solidFill>
+                            <a:srgbClr val="1E293B"/>
+                          </a:solidFill>
+                        </a:defRPr>
+                      </a:pPr>
+                      <a:r>
+                        <a:t>O(1) Bit-Shift Division (&gt;&gt;3)</a:t>
+                      </a:r>
+                    </a:p>
+                  </a:txBody>
+                  <a:tcPr/>
+                </a:tc>
+                <a:tc>
+                  <a:txBody>
+                    <a:bodyPr/>
+                    <a:lstStyle/>
+                    <a:p>
+                      <a:pPr>
+                        <a:defRPr sz="800" b="1">
+                          <a:solidFill>
+                            <a:srgbClr val="16A34A"/>
+                          </a:solidFill>
+                        </a:defRPr>
+                      </a:pPr>
+                      <a:r>
+                        <a:t>0 DSP, 0 BRAM used</a:t>
+                      </a:r>
+                    </a:p>
+                  </a:txBody>
+                  <a:tcPr/>
+                </a:tc>
+              </a:tr>
+              <a:tr h="389534">
+                <a:tc>
+                  <a:txBody>
+                    <a:bodyPr/>
+                    <a:lstStyle/>
+                    <a:p>
+                      <a:pPr>
+                        <a:defRPr sz="800" b="1">
+                          <a:solidFill>
+                            <a:srgbClr val="DC2626"/>
+                          </a:solidFill>
+                        </a:defRPr>
+                      </a:pPr>
+                      <a:r>
+                        <a:t>FPGA Pin Constraints</a:t>
+                      </a:r>
+                    </a:p>
+                  </a:txBody>
+                  <a:tcPr/>
+                </a:tc>
+                <a:tc>
+                  <a:txBody>
+                    <a:bodyPr/>
+                    <a:lstStyle/>
+                    <a:p>
+                      <a:pPr>
+                        <a:defRPr sz="800">
+                          <a:solidFill>
+                            <a:srgbClr val="1E293B"/>
+                          </a:solidFill>
+                        </a:defRPr>
+                      </a:pPr>
+                      <a:r>
+                        <a:t>4-Bit Clock-Strobed Bus</a:t>
+                      </a:r>
+                    </a:p>
+                  </a:txBody>
+                  <a:tcPr/>
+                </a:tc>
+                <a:tc>
+                  <a:txBody>
+                    <a:bodyPr/>
+                    <a:lstStyle/>
+                    <a:p>
+                      <a:pPr>
+                        <a:defRPr sz="800" b="1">
+                          <a:solidFill>
+                            <a:srgbClr val="16A34A"/>
+                          </a:solidFill>
+                        </a:defRPr>
+                      </a:pPr>
+                      <a:r>
+                        <a:t>Saves 12 GPIO pins</a:t>
+                      </a:r>
+                    </a:p>
+                  </a:txBody>
+                  <a:tcPr/>
+                </a:tc>
+              </a:tr>
+              <a:tr h="389536">
+                <a:tc>
+                  <a:txBody>
+                    <a:bodyPr/>
+                    <a:lstStyle/>
+                    <a:p>
+                      <a:pPr>
+                        <a:defRPr sz="800" b="1">
+                          <a:solidFill>
+                            <a:srgbClr val="DC2626"/>
+                          </a:solidFill>
+                        </a:defRPr>
+                      </a:pPr>
+                      <a:r>
+                        <a:t>Network Outages</a:t>
+                      </a:r>
+                    </a:p>
+                  </a:txBody>
+                  <a:tcPr/>
+                </a:tc>
+                <a:tc>
+                  <a:txBody>
+                    <a:bodyPr/>
+                    <a:lstStyle/>
+                    <a:p>
+                      <a:pPr>
+                        <a:defRPr sz="800">
+                          <a:solidFill>
+                            <a:srgbClr val="1E293B"/>
+                          </a:solidFill>
+                        </a:defRPr>
+                      </a:pPr>
+                      <a:r>
+                        <a:t>100% Autonomous Edge TinyML</a:t>
+                      </a:r>
+                    </a:p>
+                  </a:txBody>
+                  <a:tcPr/>
+                </a:tc>
+                <a:tc>
+                  <a:txBody>
+                    <a:bodyPr/>
+                    <a:lstStyle/>
+                    <a:p>
+                      <a:pPr>
+                        <a:defRPr sz="800" b="1">
+                          <a:solidFill>
+                            <a:srgbClr val="16A34A"/>
+                          </a:solidFill>
+                        </a:defRPr>
+                      </a:pPr>
+                      <a:r>
+                        <a:t>619-byte offline model</a:t>
+                      </a:r>
+                    </a:p>
+                  </a:txBody>
+                  <a:tcPr/>
+                </a:tc>
+              </a:tr>
+            </a:tbl>
+          </a:graphicData>
+        </a:graphic>
+      </p:graphicFrame>
+      <p:sp>
+        <p:nvSpPr>
+          <p:cNvPr id="16" name="Rounded Rectangle 15"/>
+          <p:cNvSpPr/>
+          <p:nvPr/>
+        </p:nvSpPr>
+        <p:spPr>
+          <a:xfrm>
+            <a:off x="6263640" y="3822191"/>
+            <a:ext cx="5303520" cy="2423160"/>
+          </a:xfrm>
+          <a:prstGeom prst="roundRect">
+            <a:avLst/>
+          </a:prstGeom>
+          <a:solidFill>
+            <a:srgbClr val="FFFFFF"/>
+          </a:solidFill>
+          <a:ln w="20320">
+            <a:solidFill>
+              <a:srgbClr val="1E3A8A"/>
+            </a:solidFill>
+          </a:ln>
+        </p:spPr>
+        <p:style>
+          <a:lnRef idx="1">
+            <a:schemeClr val="accent1"/>
+          </a:lnRef>
+          <a:fillRef idx="3">
+            <a:schemeClr val="accent1"/>
+          </a:fillRef>
+          <a:effectRef idx="2">
+            <a:schemeClr val="accent1"/>
+          </a:effectRef>
+          <a:fontRef idx="minor">
+            <a:schemeClr val="lt1"/>
+          </a:fontRef>
+        </p:style>
+        <p:txBody>
+          <a:bodyPr rtlCol="0" anchor="ctr"/>
+          <a:lstStyle/>
+          <a:p>
+            <a:pPr algn="ctr"/>
+          </a:p>
+        </p:txBody>
+      </p:sp>
+      <p:sp>
+        <p:nvSpPr>
+          <p:cNvPr id="17" name="Rectangle 16"/>
+          <p:cNvSpPr/>
+          <p:nvPr/>
+        </p:nvSpPr>
+        <p:spPr>
+          <a:xfrm>
+            <a:off x="6263640" y="3822191"/>
+            <a:ext cx="5303520" cy="347472"/>
           </a:xfrm>
           <a:prstGeom prst="rect">
             <a:avLst/>
@@ -5929,28 +6584,29 @@
           <a:lstStyle/>
           <a:p>
             <a:pPr algn="ctr">
-              <a:defRPr sz="1150" b="1">
+              <a:defRPr sz="1000" b="1">
                 <a:solidFill>
                   <a:srgbClr val="FFFFFF"/>
                 </a:solidFill>
-              </a:defRPr>
-            </a:pPr>
-            <a:r>
-              <a:t>🛡️ Potential Challenges, Risks &amp; Mitigation Strategies</a:t>
-            </a:r>
-          </a:p>
-        </p:txBody>
-      </p:sp>
-      <p:sp>
-        <p:nvSpPr>
-          <p:cNvPr id="12" name="TextBox 11"/>
+                <a:latin typeface="Arial"/>
+              </a:defRPr>
+            </a:pPr>
+            <a:r>
+              <a:t>4. VALIDATION &amp; SCALABLE DEPLOYMENT ROADMAP</a:t>
+            </a:r>
+          </a:p>
+        </p:txBody>
+      </p:sp>
+      <p:sp>
+        <p:nvSpPr>
+          <p:cNvPr id="18" name="TextBox 17"/>
           <p:cNvSpPr txBox="1"/>
           <p:nvPr/>
         </p:nvSpPr>
         <p:spPr>
           <a:xfrm>
-            <a:off x="6446520" y="1691640"/>
-            <a:ext cx="4800600" cy="4389120"/>
+            <a:off x="6373368" y="4187951"/>
+            <a:ext cx="5084064" cy="2011680"/>
           </a:xfrm>
           <a:prstGeom prst="rect">
             <a:avLst/>
@@ -5964,10 +6620,10 @@
           <a:lstStyle/>
           <a:p>
             <a:pPr>
-              <a:spcAft>
-                <a:spcPts val="700"/>
-              </a:spcAft>
-              <a:defRPr b="1" sz="1100">
+              <a:spcBef>
+                <a:spcPts val="0"/>
+              </a:spcBef>
+              <a:defRPr sz="919" b="1">
                 <a:solidFill>
                   <a:srgbClr val="1E293B"/>
                 </a:solidFill>
@@ -5975,23 +6631,24 @@
               </a:defRPr>
             </a:pPr>
             <a:r>
-              <a:t>• Challenge 1: Motion &amp; Optical Noise: </a:t>
-            </a:r>
-            <a:r>
-              <a:rPr b="0">
+              <a:t>• Phase 1: Lab Silicon Validation [COMPLETED]: </a:t>
+            </a:r>
+            <a:r>
+              <a:rPr sz="880" b="0">
                 <a:solidFill>
                   <a:srgbClr val="475569"/>
                 </a:solidFill>
+                <a:latin typeface="Arial"/>
               </a:rPr>
-              <a:t>Mitigation -&gt; Dual 8-tap running-sum digital filter on FPGA plus Karlen/Elgendi Signal Quality Index (SQI) algorithm automatically discards corrupted beats.</a:t>
+              <a:t>Hardware prototype tested on Renesas ForgeFPGA + ESP32-S3. Benchmarked on 16k+ MIMIC-III patient records (94.11% accuracy).</a:t>
             </a:r>
           </a:p>
           <a:p>
             <a:pPr>
-              <a:spcAft>
-                <a:spcPts val="700"/>
-              </a:spcAft>
-              <a:defRPr b="1" sz="1100">
+              <a:spcBef>
+                <a:spcPts val="300"/>
+              </a:spcBef>
+              <a:defRPr sz="919" b="1">
                 <a:solidFill>
                   <a:srgbClr val="1E293B"/>
                 </a:solidFill>
@@ -5999,23 +6656,24 @@
               </a:defRPr>
             </a:pPr>
             <a:r>
-              <a:t>• Challenge 2: Micro-FPGA Resource Limits: </a:t>
-            </a:r>
-            <a:r>
-              <a:rPr b="0">
+              <a:t>• Phase 2: Pilot Field Deployment [NEAR-TERM]: </a:t>
+            </a:r>
+            <a:r>
+              <a:rPr sz="880" b="0">
                 <a:solidFill>
                   <a:srgbClr val="475569"/>
                 </a:solidFill>
+                <a:latin typeface="Arial"/>
               </a:rPr>
-              <a:t>Mitigation -&gt; Pure logic O(1) bit-shift division (&gt;&gt; 3) requires 0 DSP48 multipliers and 0 Block RAM, running on the lowest-cost micro-FPGAs.</a:t>
+              <a:t>50-unit pilot trial targeting municipal sanitation workers, traffic police, and construction sites under 45°C heat.</a:t>
             </a:r>
           </a:p>
           <a:p>
             <a:pPr>
-              <a:spcAft>
-                <a:spcPts val="700"/>
-              </a:spcAft>
-              <a:defRPr b="1" sz="1100">
+              <a:spcBef>
+                <a:spcPts val="300"/>
+              </a:spcBef>
+              <a:defRPr sz="919" b="1">
                 <a:solidFill>
                   <a:srgbClr val="1E293B"/>
                 </a:solidFill>
@@ -6023,63 +6681,16 @@
               </a:defRPr>
             </a:pPr>
             <a:r>
-              <a:t>• Challenge 3: Grid &amp; Cellular Tower Outages: </a:t>
-            </a:r>
-            <a:r>
-              <a:rPr b="0">
+              <a:t>• Phase 3: Commercial Silicon Target [MASS SCALE]: </a:t>
+            </a:r>
+            <a:r>
+              <a:rPr sz="880" b="0">
                 <a:solidFill>
                   <a:srgbClr val="475569"/>
                 </a:solidFill>
+                <a:latin typeface="Arial"/>
               </a:rPr>
-              <a:t>Mitigation -&gt; Fully on-device offline TinyML; 619 bytes of INT8 weight storage. Operates autonomously during catastrophic floods and storms without internet.</a:t>
-            </a:r>
-          </a:p>
-          <a:p>
-            <a:pPr>
-              <a:spcAft>
-                <a:spcPts val="700"/>
-              </a:spcAft>
-              <a:defRPr b="1" sz="1100">
-                <a:solidFill>
-                  <a:srgbClr val="1E293B"/>
-                </a:solidFill>
-                <a:latin typeface="Arial"/>
-              </a:defRPr>
-            </a:pPr>
-            <a:r>
-              <a:t>• Challenge 4: Clinical Real-World Accuracy: </a:t>
-            </a:r>
-            <a:r>
-              <a:rPr b="0">
-                <a:solidFill>
-                  <a:srgbClr val="475569"/>
-                </a:solidFill>
-              </a:rPr>
-              <a:t>Mitigation -&gt; Benchmarked against 16,387 gold-standard patient records from the MIT MIMIC-III ICU database (94.11% triage accuracy on real HR/SpO2 inputs).</a:t>
-            </a:r>
-          </a:p>
-          <a:p>
-            <a:pPr>
-              <a:spcAft>
-                <a:spcPts val="700"/>
-              </a:spcAft>
-              <a:defRPr b="1" sz="1100">
-                <a:solidFill>
-                  <a:srgbClr val="1E293B"/>
-                </a:solidFill>
-                <a:latin typeface="Arial"/>
-              </a:defRPr>
-            </a:pPr>
-            <a:r>
-              <a:t>• Commercial Roadmap Target: </a:t>
-            </a:r>
-            <a:r>
-              <a:rPr b="0">
-                <a:solidFill>
-                  <a:srgbClr val="475569"/>
-                </a:solidFill>
-              </a:rPr>
-              <a:t>Migration path identified to Qualcomm Snapdragon Wear W5+ Gen 1 Low-Power Island (target platform; power not yet measured).</a:t>
+              <a:t>Direct migration of Verilog DSP to Qualcomm Hexagon DSP; TinyML deployed to Qualcomm NPU via Snapdragon Neural Processing SDK (SNPE).</a:t>
             </a:r>
           </a:p>
         </p:txBody>
@@ -6199,7 +6810,7 @@
       </p:sp>
       <p:pic>
         <p:nvPicPr>
-          <p:cNvPr id="4" name="Picture 3" descr="page_1_img_2.png"/>
+          <p:cNvPr id="4" name="Picture 3" descr="image.png"/>
           <p:cNvPicPr>
             <a:picLocks noChangeAspect="1"/>
           </p:cNvPicPr>
@@ -6223,7 +6834,7 @@
       </p:pic>
       <p:pic>
         <p:nvPicPr>
-          <p:cNvPr id="5" name="Picture 4" descr="page_2_img_1.png"/>
+          <p:cNvPr id="5" name="Picture 4" descr="image.png"/>
           <p:cNvPicPr>
             <a:picLocks noChangeAspect="1"/>
           </p:cNvPicPr>
@@ -6276,6 +6887,137 @@
               </a:defRPr>
             </a:pPr>
             <a:r>
+              <a:t>@SIH Idea submission- Template                                                                                                                5</a:t>
+            </a:r>
+          </a:p>
+        </p:txBody>
+      </p:sp>
+      <p:sp>
+        <p:nvSpPr>
+          <p:cNvPr id="7" name="Oval 1"/>
+          <p:cNvSpPr/>
+          <p:nvPr/>
+        </p:nvSpPr>
+        <p:spPr>
+          <a:xfrm>
+            <a:off x="365760" y="228600"/>
+            <a:ext cx="1371600" cy="822960"/>
+          </a:xfrm>
+          <a:prstGeom prst="ellipse">
+            <a:avLst/>
+          </a:prstGeom>
+          <a:solidFill>
+            <a:srgbClr val="FFFFFF"/>
+          </a:solidFill>
+          <a:ln w="19050">
+            <a:solidFill>
+              <a:srgbClr val="000000"/>
+            </a:solidFill>
+          </a:ln>
+        </p:spPr>
+        <p:style>
+          <a:lnRef idx="1">
+            <a:schemeClr val="accent1"/>
+          </a:lnRef>
+          <a:fillRef idx="3">
+            <a:schemeClr val="accent1"/>
+          </a:fillRef>
+          <a:effectRef idx="2">
+            <a:schemeClr val="accent1"/>
+          </a:effectRef>
+          <a:fontRef idx="minor">
+            <a:schemeClr val="lt1"/>
+          </a:fontRef>
+        </p:style>
+        <p:txBody>
+          <a:bodyPr rtlCol="0" anchor="ctr"/>
+          <a:lstStyle/>
+          <a:p>
+            <a:pPr algn="ctr">
+              <a:defRPr sz="1100" b="1">
+                <a:solidFill>
+                  <a:srgbClr val="000000"/>
+                </a:solidFill>
+                <a:latin typeface="Arial"/>
+              </a:defRPr>
+            </a:pPr>
+            <a:r>
+              <a:t>Team</a:t>
+            </a:r>
+            <a:br/>
+            <a:r>
+              <a:t>Chipsters</a:t>
+            </a:r>
+          </a:p>
+        </p:txBody>
+      </p:sp>
+      <p:sp>
+        <p:nvSpPr>
+          <p:cNvPr id="8" name="TextBox 2"/>
+          <p:cNvSpPr txBox="1"/>
+          <p:nvPr/>
+        </p:nvSpPr>
+        <p:spPr>
+          <a:xfrm>
+            <a:off x="2011680" y="320040"/>
+            <a:ext cx="8046720" cy="731520"/>
+          </a:xfrm>
+          <a:prstGeom prst="rect">
+            <a:avLst/>
+          </a:prstGeom>
+          <a:noFill/>
+        </p:spPr>
+        <p:txBody>
+          <a:bodyPr wrap="none">
+            <a:spAutoFit/>
+          </a:bodyPr>
+          <a:lstStyle/>
+          <a:p>
+            <a:pPr algn="ctr">
+              <a:defRPr sz="2800" b="1">
+                <a:solidFill>
+                  <a:srgbClr val="000000"/>
+                </a:solidFill>
+                <a:latin typeface="Times New Roman"/>
+              </a:defRPr>
+            </a:pPr>
+            <a:r>
+              <a:t>IMPACT AND BENEFITS</a:t>
+            </a:r>
+          </a:p>
+        </p:txBody>
+      </p:sp>
+      <p:sp>
+        <p:nvSpPr>
+          <p:cNvPr id="9" name="TextBox 5"/>
+          <p:cNvSpPr txBox="1"/>
+          <p:nvPr/>
+        </p:nvSpPr>
+        <p:spPr>
+          <a:xfrm>
+            <a:off x="914400" y="6492240"/>
+            <a:ext cx="10362895" cy="320040"/>
+          </a:xfrm>
+          <a:prstGeom prst="rect">
+            <a:avLst/>
+          </a:prstGeom>
+          <a:noFill/>
+        </p:spPr>
+        <p:txBody>
+          <a:bodyPr wrap="none">
+            <a:spAutoFit/>
+          </a:bodyPr>
+          <a:lstStyle/>
+          <a:p>
+            <a:pPr algn="ctr">
+              <a:defRPr sz="1050">
+                <a:solidFill>
+                  <a:srgbClr val="FFFFFF"/>
+                </a:solidFill>
+                <a:latin typeface="Arial"/>
+              </a:defRPr>
+            </a:pPr>
+            <a:r>
               <a:t>@SIH Idea submission- Template                                                                                                5</a:t>
             </a:r>
           </a:p>
@@ -6283,7 +7025,7 @@
       </p:sp>
       <p:sp>
         <p:nvSpPr>
-          <p:cNvPr id="7" name="Rounded Rectangle 6"/>
+          <p:cNvPr id="10" name="Rounded Rectangle 6"/>
           <p:cNvSpPr/>
           <p:nvPr/>
         </p:nvSpPr>
@@ -6328,7 +7070,7 @@
       </p:sp>
       <p:sp>
         <p:nvSpPr>
-          <p:cNvPr id="8" name="TextBox 7"/>
+          <p:cNvPr id="11" name="TextBox 7"/>
           <p:cNvSpPr txBox="1"/>
           <p:nvPr/>
         </p:nvSpPr>
@@ -6381,7 +7123,7 @@
       </p:sp>
       <p:sp>
         <p:nvSpPr>
-          <p:cNvPr id="9" name="Rounded Rectangle 8"/>
+          <p:cNvPr id="12" name="Rounded Rectangle 8"/>
           <p:cNvSpPr/>
           <p:nvPr/>
         </p:nvSpPr>
@@ -6426,7 +7168,7 @@
       </p:sp>
       <p:sp>
         <p:nvSpPr>
-          <p:cNvPr id="10" name="TextBox 9"/>
+          <p:cNvPr id="13" name="TextBox 9"/>
           <p:cNvSpPr txBox="1"/>
           <p:nvPr/>
         </p:nvSpPr>
@@ -6479,7 +7221,7 @@
       </p:sp>
       <p:sp>
         <p:nvSpPr>
-          <p:cNvPr id="11" name="Rounded Rectangle 10"/>
+          <p:cNvPr id="14" name="Rounded Rectangle 10"/>
           <p:cNvSpPr/>
           <p:nvPr/>
         </p:nvSpPr>
@@ -6524,7 +7266,7 @@
       </p:sp>
       <p:sp>
         <p:nvSpPr>
-          <p:cNvPr id="12" name="TextBox 11"/>
+          <p:cNvPr id="15" name="TextBox 11"/>
           <p:cNvSpPr txBox="1"/>
           <p:nvPr/>
         </p:nvSpPr>
@@ -6577,7 +7319,7 @@
       </p:sp>
       <p:sp>
         <p:nvSpPr>
-          <p:cNvPr id="13" name="Rounded Rectangle 12"/>
+          <p:cNvPr id="16" name="Rounded Rectangle 12"/>
           <p:cNvSpPr/>
           <p:nvPr/>
         </p:nvSpPr>
@@ -6622,7 +7364,7 @@
       </p:sp>
       <p:sp>
         <p:nvSpPr>
-          <p:cNvPr id="14" name="TextBox 13"/>
+          <p:cNvPr id="17" name="TextBox 13"/>
           <p:cNvSpPr txBox="1"/>
           <p:nvPr/>
         </p:nvSpPr>
@@ -6675,7 +7417,7 @@
       </p:sp>
       <p:sp>
         <p:nvSpPr>
-          <p:cNvPr id="15" name="Rounded Rectangle 14"/>
+          <p:cNvPr id="18" name="Rounded Rectangle 14"/>
           <p:cNvSpPr/>
           <p:nvPr/>
         </p:nvSpPr>
@@ -6720,7 +7462,7 @@
       </p:sp>
       <p:sp>
         <p:nvSpPr>
-          <p:cNvPr id="16" name="Rectangle 15"/>
+          <p:cNvPr id="19" name="Rectangle 15"/>
           <p:cNvSpPr/>
           <p:nvPr/>
         </p:nvSpPr>
@@ -6773,7 +7515,7 @@
       </p:sp>
       <p:sp>
         <p:nvSpPr>
-          <p:cNvPr id="17" name="TextBox 16"/>
+          <p:cNvPr id="20" name="TextBox 16"/>
           <p:cNvSpPr txBox="1"/>
           <p:nvPr/>
         </p:nvSpPr>
@@ -6828,7 +7570,7 @@
       </p:sp>
       <p:sp>
         <p:nvSpPr>
-          <p:cNvPr id="18" name="Rounded Rectangle 17"/>
+          <p:cNvPr id="21" name="Rounded Rectangle 17"/>
           <p:cNvSpPr/>
           <p:nvPr/>
         </p:nvSpPr>
@@ -6873,7 +7615,7 @@
       </p:sp>
       <p:sp>
         <p:nvSpPr>
-          <p:cNvPr id="19" name="Rectangle 18"/>
+          <p:cNvPr id="22" name="Rectangle 18"/>
           <p:cNvSpPr/>
           <p:nvPr/>
         </p:nvSpPr>
@@ -6926,7 +7668,7 @@
       </p:sp>
       <p:sp>
         <p:nvSpPr>
-          <p:cNvPr id="20" name="TextBox 19"/>
+          <p:cNvPr id="23" name="TextBox 19"/>
           <p:cNvSpPr txBox="1"/>
           <p:nvPr/>
         </p:nvSpPr>
@@ -6981,7 +7723,7 @@
       </p:sp>
       <p:sp>
         <p:nvSpPr>
-          <p:cNvPr id="21" name="Rounded Rectangle 20"/>
+          <p:cNvPr id="24" name="Rounded Rectangle 20"/>
           <p:cNvSpPr/>
           <p:nvPr/>
         </p:nvSpPr>
@@ -7026,7 +7768,7 @@
       </p:sp>
       <p:sp>
         <p:nvSpPr>
-          <p:cNvPr id="22" name="Rectangle 21"/>
+          <p:cNvPr id="25" name="Rectangle 21"/>
           <p:cNvSpPr/>
           <p:nvPr/>
         </p:nvSpPr>
@@ -7079,7 +7821,7 @@
       </p:sp>
       <p:sp>
         <p:nvSpPr>
-          <p:cNvPr id="23" name="TextBox 22"/>
+          <p:cNvPr id="26" name="TextBox 22"/>
           <p:cNvSpPr txBox="1"/>
           <p:nvPr/>
         </p:nvSpPr>
@@ -7134,7 +7876,7 @@
       </p:sp>
       <p:sp>
         <p:nvSpPr>
-          <p:cNvPr id="24" name="Rounded Rectangle 23"/>
+          <p:cNvPr id="27" name="Rounded Rectangle 23"/>
           <p:cNvSpPr/>
           <p:nvPr/>
         </p:nvSpPr>
@@ -7302,7 +8044,7 @@
       </p:sp>
       <p:pic>
         <p:nvPicPr>
-          <p:cNvPr id="4" name="Picture 3" descr="page_1_img_2.png"/>
+          <p:cNvPr id="4" name="Picture 3" descr="image.png"/>
           <p:cNvPicPr>
             <a:picLocks noChangeAspect="1"/>
           </p:cNvPicPr>
@@ -7326,7 +8068,7 @@
       </p:pic>
       <p:pic>
         <p:nvPicPr>
-          <p:cNvPr id="5" name="Picture 4" descr="page_2_img_1.png"/>
+          <p:cNvPr id="5" name="Picture 4" descr="image.png"/>
           <p:cNvPicPr>
             <a:picLocks noChangeAspect="1"/>
           </p:cNvPicPr>
@@ -7379,6 +8121,137 @@
               </a:defRPr>
             </a:pPr>
             <a:r>
+              <a:t>@SIH Idea submission- Template                                                                                                                6</a:t>
+            </a:r>
+          </a:p>
+        </p:txBody>
+      </p:sp>
+      <p:sp>
+        <p:nvSpPr>
+          <p:cNvPr id="7" name="Oval 1"/>
+          <p:cNvSpPr/>
+          <p:nvPr/>
+        </p:nvSpPr>
+        <p:spPr>
+          <a:xfrm>
+            <a:off x="365760" y="228600"/>
+            <a:ext cx="1371600" cy="822960"/>
+          </a:xfrm>
+          <a:prstGeom prst="ellipse">
+            <a:avLst/>
+          </a:prstGeom>
+          <a:solidFill>
+            <a:srgbClr val="FFFFFF"/>
+          </a:solidFill>
+          <a:ln w="19050">
+            <a:solidFill>
+              <a:srgbClr val="000000"/>
+            </a:solidFill>
+          </a:ln>
+        </p:spPr>
+        <p:style>
+          <a:lnRef idx="1">
+            <a:schemeClr val="accent1"/>
+          </a:lnRef>
+          <a:fillRef idx="3">
+            <a:schemeClr val="accent1"/>
+          </a:fillRef>
+          <a:effectRef idx="2">
+            <a:schemeClr val="accent1"/>
+          </a:effectRef>
+          <a:fontRef idx="minor">
+            <a:schemeClr val="lt1"/>
+          </a:fontRef>
+        </p:style>
+        <p:txBody>
+          <a:bodyPr rtlCol="0" anchor="ctr"/>
+          <a:lstStyle/>
+          <a:p>
+            <a:pPr algn="ctr">
+              <a:defRPr sz="1100" b="1">
+                <a:solidFill>
+                  <a:srgbClr val="000000"/>
+                </a:solidFill>
+                <a:latin typeface="Arial"/>
+              </a:defRPr>
+            </a:pPr>
+            <a:r>
+              <a:t>Team</a:t>
+            </a:r>
+            <a:br/>
+            <a:r>
+              <a:t>Chipsters</a:t>
+            </a:r>
+          </a:p>
+        </p:txBody>
+      </p:sp>
+      <p:sp>
+        <p:nvSpPr>
+          <p:cNvPr id="8" name="TextBox 2"/>
+          <p:cNvSpPr txBox="1"/>
+          <p:nvPr/>
+        </p:nvSpPr>
+        <p:spPr>
+          <a:xfrm>
+            <a:off x="2011680" y="320040"/>
+            <a:ext cx="8046720" cy="731520"/>
+          </a:xfrm>
+          <a:prstGeom prst="rect">
+            <a:avLst/>
+          </a:prstGeom>
+          <a:noFill/>
+        </p:spPr>
+        <p:txBody>
+          <a:bodyPr wrap="none">
+            <a:spAutoFit/>
+          </a:bodyPr>
+          <a:lstStyle/>
+          <a:p>
+            <a:pPr algn="ctr">
+              <a:defRPr sz="2800" b="1">
+                <a:solidFill>
+                  <a:srgbClr val="000000"/>
+                </a:solidFill>
+                <a:latin typeface="Times New Roman"/>
+              </a:defRPr>
+            </a:pPr>
+            <a:r>
+              <a:t>RESEARCH AND REFERENCES</a:t>
+            </a:r>
+          </a:p>
+        </p:txBody>
+      </p:sp>
+      <p:sp>
+        <p:nvSpPr>
+          <p:cNvPr id="9" name="TextBox 5"/>
+          <p:cNvSpPr txBox="1"/>
+          <p:nvPr/>
+        </p:nvSpPr>
+        <p:spPr>
+          <a:xfrm>
+            <a:off x="914400" y="6492240"/>
+            <a:ext cx="10362895" cy="320040"/>
+          </a:xfrm>
+          <a:prstGeom prst="rect">
+            <a:avLst/>
+          </a:prstGeom>
+          <a:noFill/>
+        </p:spPr>
+        <p:txBody>
+          <a:bodyPr wrap="none">
+            <a:spAutoFit/>
+          </a:bodyPr>
+          <a:lstStyle/>
+          <a:p>
+            <a:pPr algn="ctr">
+              <a:defRPr sz="1050">
+                <a:solidFill>
+                  <a:srgbClr val="FFFFFF"/>
+                </a:solidFill>
+                <a:latin typeface="Arial"/>
+              </a:defRPr>
+            </a:pPr>
+            <a:r>
               <a:t>@SIH Idea submission- Template                                                                                                6</a:t>
             </a:r>
           </a:p>
@@ -7386,7 +8259,7 @@
       </p:sp>
       <p:graphicFrame>
         <p:nvGraphicFramePr>
-          <p:cNvPr id="7" name="Table 6"/>
+          <p:cNvPr id="10" name="Table 6"/>
           <p:cNvGraphicFramePr>
             <a:graphicFrameLocks noGrp="1"/>
           </p:cNvGraphicFramePr>
@@ -8080,7 +8953,7 @@
       </p:graphicFrame>
       <p:sp>
         <p:nvSpPr>
-          <p:cNvPr id="8" name="TextBox 7"/>
+          <p:cNvPr id="11" name="TextBox 7"/>
           <p:cNvSpPr txBox="1"/>
           <p:nvPr/>
         </p:nvSpPr>

--- a/docs/presentation/SIH26181_Official_Template_Presentation.pptx
+++ b/docs/presentation/SIH26181_Official_Template_Presentation.pptx
@@ -3976,7 +3976,7 @@
               </a:defRPr>
             </a:pPr>
             <a:r>
-              <a:t>✅ EdgeGuard Proposed Solution &amp; Innovation</a:t>
+              <a:t>✅ VALOR Proposed Solution &amp; Innovation</a:t>
             </a:r>
           </a:p>
         </p:txBody>
@@ -4047,7 +4047,7 @@
                   <a:srgbClr val="475569"/>
                 </a:solidFill>
               </a:rPr>
-              <a:t>Fuses bodily vitals with environmental stress in real time to calculate cardiac drift and respiratory strain, alerting workers 15-20 minutes before medical collapse.</a:t>
+              <a:t>Fuses bodily vitals with environmental stress in real time to calculate cardiac drift and respiratory strain, surfacing cardiac strain and respiratory stress as it develops.</a:t>
             </a:r>
           </a:p>
           <a:p>
@@ -4095,7 +4095,7 @@
                   <a:srgbClr val="475569"/>
                 </a:solidFill>
               </a:rPr>
-              <a:t>Quantized INT8 neural network fits into only 619 bytes SRAM and evaluates risks in 42 µs, providing 100% offline protection during infrastructure blackouts.</a:t>
+              <a:t>Quantized INT8 neural network fits into only 619 bytes of INT8 weights, providing 100% offline protection during infrastructure blackouts.</a:t>
             </a:r>
           </a:p>
         </p:txBody>
@@ -4150,7 +4150,7 @@
               </a:defRPr>
             </a:pPr>
             <a:r>
-              <a:t>💡 Layman Core: An offline medical guardian that connects what's happening outside (disaster) with what's happening inside (your heart) — saving lives before emergency collapse.</a:t>
+              <a:t>💡 Layman Core: An offline medical guardian that connects what's happening outside (disaster) with what's happening inside (your heart) — flagging risk before a person would notice symptoms.</a:t>
             </a:r>
           </a:p>
         </p:txBody>
@@ -5040,7 +5040,7 @@
               </a:defRPr>
             </a:pPr>
             <a:r>
-              <a:t>INT8 deep micro-network running in 42 µs (91.00% validation accuracy).</a:t>
+              <a:t>619-parameter INT8 micro-network (88.47% synthetic validation accuracy).</a:t>
             </a:r>
           </a:p>
         </p:txBody>
@@ -5633,8 +5633,8 @@
         </p:nvSpPr>
         <p:spPr>
           <a:xfrm>
-            <a:off x="594360" y="1115568"/>
-            <a:ext cx="5303520" cy="2423160"/>
+            <a:off x="731520" y="1234440"/>
+            <a:ext cx="5166360" cy="5029200"/>
           </a:xfrm>
           <a:prstGeom prst="roundRect">
             <a:avLst/>
@@ -5642,7 +5642,7 @@
           <a:solidFill>
             <a:srgbClr val="FFFFFF"/>
           </a:solidFill>
-          <a:ln w="20320">
+          <a:ln w="19050">
             <a:solidFill>
               <a:srgbClr val="0B62A4"/>
             </a:solidFill>
@@ -5678,8 +5678,8 @@
         </p:nvSpPr>
         <p:spPr>
           <a:xfrm>
-            <a:off x="594360" y="1115568"/>
-            <a:ext cx="5303520" cy="347472"/>
+            <a:off x="731520" y="1234440"/>
+            <a:ext cx="5166360" cy="411480"/>
           </a:xfrm>
           <a:prstGeom prst="rect">
             <a:avLst/>
@@ -5710,15 +5710,14 @@
           <a:lstStyle/>
           <a:p>
             <a:pPr algn="ctr">
-              <a:defRPr sz="1000" b="1">
+              <a:defRPr sz="1150" b="1">
                 <a:solidFill>
                   <a:srgbClr val="FFFFFF"/>
                 </a:solidFill>
-                <a:latin typeface="Arial"/>
-              </a:defRPr>
-            </a:pPr>
-            <a:r>
-              <a:t>1. TECHNICAL &amp; SILICON FEASIBILITY (PROVEN IN RTL)</a:t>
+              </a:defRPr>
+            </a:pPr>
+            <a:r>
+              <a:t>📊 Feasibility Analysis: Hardware, Silicon &amp; Economics</a:t>
             </a:r>
           </a:p>
         </p:txBody>
@@ -5731,8 +5730,8 @@
         </p:nvSpPr>
         <p:spPr>
           <a:xfrm>
-            <a:off x="704088" y="1481328"/>
-            <a:ext cx="5084064" cy="2011680"/>
+            <a:off x="914400" y="1691640"/>
+            <a:ext cx="4800600" cy="4389120"/>
           </a:xfrm>
           <a:prstGeom prst="rect">
             <a:avLst/>
@@ -5746,10 +5745,10 @@
           <a:lstStyle/>
           <a:p>
             <a:pPr>
-              <a:spcBef>
-                <a:spcPts val="0"/>
-              </a:spcBef>
-              <a:defRPr sz="919" b="1">
+              <a:spcAft>
+                <a:spcPts val="700"/>
+              </a:spcAft>
+              <a:defRPr b="1" sz="1100">
                 <a:solidFill>
                   <a:srgbClr val="1E293B"/>
                 </a:solidFill>
@@ -5757,24 +5756,47 @@
               </a:defRPr>
             </a:pPr>
             <a:r>
-              <a:t>• Pure-Logic RTL (Zero DSP / 0 BRAM): </a:t>
-            </a:r>
-            <a:r>
-              <a:rPr sz="880" b="0">
+              <a:t>• Vendor-Agnostic Verilog RTL: </a:t>
+            </a:r>
+            <a:r>
+              <a:rPr b="0">
                 <a:solidFill>
                   <a:srgbClr val="475569"/>
                 </a:solidFill>
+              </a:rPr>
+              <a:t>Identical synthesizable core Verilog runs on both AMD Xilinx (6-input LUT) and Renesas ForgeFPGA (5-input LUT) architectures without redesign.</a:t>
+            </a:r>
+          </a:p>
+          <a:p>
+            <a:pPr>
+              <a:spcAft>
+                <a:spcPts val="700"/>
+              </a:spcAft>
+              <a:defRPr b="1" sz="1100">
+                <a:solidFill>
+                  <a:srgbClr val="1E293B"/>
+                </a:solidFill>
                 <a:latin typeface="Arial"/>
+              </a:defRPr>
+            </a:pPr>
+            <a:r>
+              <a:t>• Ultra-Low Silicon Footprint: </a:t>
+            </a:r>
+            <a:r>
+              <a:rPr b="0">
+                <a:solidFill>
+                  <a:srgbClr val="475569"/>
+                </a:solidFill>
               </a:rPr>
-              <a:t>Eliminates high-cost FPGA components; synthesizes entirely into standard LUT logic.</a:t>
+              <a:t>Synthesized on Renesas ForgeFPGA requiring 342 / 1120 LUT5s (30.54% logic utilization) with 0 DSP multipliers and 0 Block RAM.</a:t>
             </a:r>
           </a:p>
           <a:p>
             <a:pPr>
-              <a:spcBef>
-                <a:spcPts val="300"/>
-              </a:spcBef>
-              <a:defRPr sz="919" b="1">
+              <a:spcAft>
+                <a:spcPts val="700"/>
+              </a:spcAft>
+              <a:defRPr b="1" sz="1100">
                 <a:solidFill>
                   <a:srgbClr val="1E293B"/>
                 </a:solidFill>
@@ -5782,66 +5804,42 @@
               </a:defRPr>
             </a:pPr>
             <a:r>
-              <a:t>• Minimal Silicon Utilization: </a:t>
-            </a:r>
-            <a:r>
-              <a:rPr sz="880" b="0">
+              <a:t>• Static Timing Closure (+5.603 ns WNS): </a:t>
+            </a:r>
+            <a:r>
+              <a:rPr b="0">
                 <a:solidFill>
                   <a:srgbClr val="475569"/>
                 </a:solidFill>
+              </a:rPr>
+              <a:t>Baseline Zynq-7000 build, tag v1.0-zynq-SIH: +5.603 ns setup slack, 69.45 MHz Fmax against a 50 MHz target clock.</a:t>
+            </a:r>
+          </a:p>
+          <a:p>
+            <a:pPr>
+              <a:spcAft>
+                <a:spcPts val="700"/>
+              </a:spcAft>
+              <a:defRPr b="1" sz="1100">
+                <a:solidFill>
+                  <a:srgbClr val="1E293B"/>
+                </a:solidFill>
                 <a:latin typeface="Arial"/>
+              </a:defRPr>
+            </a:pPr>
+            <a:r>
+              <a:t>• Economic Viability &amp; Bulk BOM: </a:t>
+            </a:r>
+            <a:r>
+              <a:rPr b="0">
+                <a:solidFill>
+                  <a:srgbClr val="475569"/>
+                </a:solidFill>
               </a:rPr>
-              <a:t>Consumes only ~40% LUT5s and ~30% flip-flops on ultra-low-cost Renesas ForgeFPGA (SLG47910C).</a:t>
-            </a:r>
-          </a:p>
-          <a:p>
-            <a:pPr>
-              <a:spcBef>
-                <a:spcPts val="300"/>
-              </a:spcBef>
-              <a:defRPr sz="919" b="1">
-                <a:solidFill>
-                  <a:srgbClr val="1E293B"/>
-                </a:solidFill>
-                <a:latin typeface="Arial"/>
-              </a:defRPr>
-            </a:pPr>
-            <a:r>
-              <a:t>• Multi-Vendor Code Portability: </a:t>
-            </a:r>
-            <a:r>
-              <a:rPr sz="880" b="0">
-                <a:solidFill>
-                  <a:srgbClr val="475569"/>
-                </a:solidFill>
-                <a:latin typeface="Arial"/>
-              </a:rPr>
-              <a:t>Identical synthesizable Verilog compiles seamlessly on AMD Xilinx (6-LUT) and Renesas (5-LUT).</a:t>
-            </a:r>
-          </a:p>
-          <a:p>
-            <a:pPr>
-              <a:spcBef>
-                <a:spcPts val="300"/>
-              </a:spcBef>
-              <a:defRPr sz="919" b="1">
-                <a:solidFill>
-                  <a:srgbClr val="1E293B"/>
-                </a:solidFill>
-                <a:latin typeface="Arial"/>
-              </a:defRPr>
-            </a:pPr>
-            <a:r>
-              <a:t>• Static Timing Closure (+5.603 ns WNS): </a:t>
-            </a:r>
-            <a:r>
-              <a:rPr sz="880" b="0">
-                <a:solidFill>
-                  <a:srgbClr val="475569"/>
-                </a:solidFill>
-                <a:latin typeface="Arial"/>
-              </a:rPr>
-              <a:t>Validated in Vivado ML at 50 MHz clock; verified operational ceiling of 69.45 MHz.</a:t>
+              <a:t>• 12 line items: ForgeFPGA, ESP32-S3, 3 sensors, OLED
+• Projected under $15 at 100k-unit volume (distributor estimates)
+• No cloud, no subscription, no data plan
+=&gt; Parts list: hardware/shrikefi/pcb/ BOM</a:t>
             </a:r>
           </a:p>
         </p:txBody>
@@ -5854,8 +5852,8 @@
         </p:nvSpPr>
         <p:spPr>
           <a:xfrm>
-            <a:off x="6263640" y="1115568"/>
-            <a:ext cx="5303520" cy="2423160"/>
+            <a:off x="6263640" y="1234440"/>
+            <a:ext cx="5166360" cy="5029200"/>
           </a:xfrm>
           <a:prstGeom prst="roundRect">
             <a:avLst/>
@@ -5863,9 +5861,9 @@
           <a:solidFill>
             <a:srgbClr val="FFFFFF"/>
           </a:solidFill>
-          <a:ln w="20320">
+          <a:ln w="19050">
             <a:solidFill>
-              <a:srgbClr val="16A34A"/>
+              <a:srgbClr val="1E3A8A"/>
             </a:solidFill>
           </a:ln>
         </p:spPr>
@@ -5899,661 +5897,8 @@
         </p:nvSpPr>
         <p:spPr>
           <a:xfrm>
-            <a:off x="6263640" y="1115568"/>
-            <a:ext cx="5303520" cy="347472"/>
-          </a:xfrm>
-          <a:prstGeom prst="rect">
-            <a:avLst/>
-          </a:prstGeom>
-          <a:solidFill>
-            <a:srgbClr val="16A34A"/>
-          </a:solidFill>
-          <a:ln>
-            <a:noFill/>
-          </a:ln>
-        </p:spPr>
-        <p:style>
-          <a:lnRef idx="1">
-            <a:schemeClr val="accent1"/>
-          </a:lnRef>
-          <a:fillRef idx="3">
-            <a:schemeClr val="accent1"/>
-          </a:fillRef>
-          <a:effectRef idx="2">
-            <a:schemeClr val="accent1"/>
-          </a:effectRef>
-          <a:fontRef idx="minor">
-            <a:schemeClr val="lt1"/>
-          </a:fontRef>
-        </p:style>
-        <p:txBody>
-          <a:bodyPr rtlCol="0" anchor="ctr"/>
-          <a:lstStyle/>
-          <a:p>
-            <a:pPr algn="ctr">
-              <a:defRPr sz="1000" b="1">
-                <a:solidFill>
-                  <a:srgbClr val="FFFFFF"/>
-                </a:solidFill>
-                <a:latin typeface="Arial"/>
-              </a:defRPr>
-            </a:pPr>
-            <a:r>
-              <a:t>2. FINANCIAL &amp; COMMERCIAL VIABILITY (UNIT ECONOMICS)</a:t>
-            </a:r>
-          </a:p>
-        </p:txBody>
-      </p:sp>
-      <p:sp>
-        <p:nvSpPr>
-          <p:cNvPr id="12" name="TextBox 11"/>
-          <p:cNvSpPr txBox="1"/>
-          <p:nvPr/>
-        </p:nvSpPr>
-        <p:spPr>
-          <a:xfrm>
-            <a:off x="6373368" y="1481328"/>
-            <a:ext cx="5084064" cy="2011680"/>
-          </a:xfrm>
-          <a:prstGeom prst="rect">
-            <a:avLst/>
-          </a:prstGeom>
-          <a:noFill/>
-        </p:spPr>
-        <p:txBody>
-          <a:bodyPr wrap="square">
-            <a:spAutoFit/>
-          </a:bodyPr>
-          <a:lstStyle/>
-          <a:p>
-            <a:pPr>
-              <a:spcBef>
-                <a:spcPts val="0"/>
-              </a:spcBef>
-              <a:defRPr sz="919" b="1">
-                <a:solidFill>
-                  <a:srgbClr val="1E293B"/>
-                </a:solidFill>
-                <a:latin typeface="Arial"/>
-              </a:defRPr>
-            </a:pPr>
-            <a:r>
-              <a:t>• Prototype Single-Unit BOM: </a:t>
-            </a:r>
-            <a:r>
-              <a:rPr sz="880" b="0">
-                <a:solidFill>
-                  <a:srgbClr val="475569"/>
-                </a:solidFill>
-                <a:latin typeface="Arial"/>
-              </a:rPr>
-              <a:t>₹3,500 (~$40 retail) for custom FPGA carrier + ESP32-S3 + multi-sensor cluster.</a:t>
-            </a:r>
-          </a:p>
-          <a:p>
-            <a:pPr>
-              <a:spcBef>
-                <a:spcPts val="300"/>
-              </a:spcBef>
-              <a:defRPr sz="919" b="1">
-                <a:solidFill>
-                  <a:srgbClr val="1E293B"/>
-                </a:solidFill>
-                <a:latin typeface="Arial"/>
-              </a:defRPr>
-            </a:pPr>
-            <a:r>
-              <a:t>• Mass-Production Bulk Target (&lt;$18 / ₹1,450): </a:t>
-            </a:r>
-            <a:r>
-              <a:rPr sz="880" b="0">
-                <a:solidFill>
-                  <a:srgbClr val="475569"/>
-                </a:solidFill>
-                <a:latin typeface="Arial"/>
-              </a:rPr>
-              <a:t>Micro-FPGA ($1.80) + ESP32 ($2.20) + Sensors ($5.80) + Battery/Enclosure ($4.20).</a:t>
-            </a:r>
-          </a:p>
-          <a:p>
-            <a:pPr>
-              <a:spcBef>
-                <a:spcPts val="300"/>
-              </a:spcBef>
-              <a:defRPr sz="919" b="1">
-                <a:solidFill>
-                  <a:srgbClr val="1E293B"/>
-                </a:solidFill>
-                <a:latin typeface="Arial"/>
-              </a:defRPr>
-            </a:pPr>
-            <a:r>
-              <a:t>• Zero Ongoing Cloud Cost: </a:t>
-            </a:r>
-            <a:r>
-              <a:rPr sz="880" b="0">
-                <a:solidFill>
-                  <a:srgbClr val="475569"/>
-                </a:solidFill>
-                <a:latin typeface="Arial"/>
-              </a:rPr>
-              <a:t>100% on-device TinyML edge execution = ₹0 cloud server or API subscription cost per user.</a:t>
-            </a:r>
-          </a:p>
-          <a:p>
-            <a:pPr>
-              <a:spcBef>
-                <a:spcPts val="300"/>
-              </a:spcBef>
-              <a:defRPr sz="919" b="1">
-                <a:solidFill>
-                  <a:srgbClr val="1E293B"/>
-                </a:solidFill>
-                <a:latin typeface="Arial"/>
-              </a:defRPr>
-            </a:pPr>
-            <a:r>
-              <a:t>• 95% Cost Reduction vs Wearables: </a:t>
-            </a:r>
-            <a:r>
-              <a:rPr sz="880" b="0">
-                <a:solidFill>
-                  <a:srgbClr val="475569"/>
-                </a:solidFill>
-                <a:latin typeface="Arial"/>
-              </a:rPr>
-              <a:t>Delivers hospital-grade mNEWS2 triage at ₹1,450 vs commercial monitors at ₹25k–₹40k.</a:t>
-            </a:r>
-          </a:p>
-        </p:txBody>
-      </p:sp>
-      <p:sp>
-        <p:nvSpPr>
-          <p:cNvPr id="13" name="Rounded Rectangle 12"/>
-          <p:cNvSpPr/>
-          <p:nvPr/>
-        </p:nvSpPr>
-        <p:spPr>
-          <a:xfrm>
-            <a:off x="594360" y="3822191"/>
-            <a:ext cx="5303520" cy="2423160"/>
-          </a:xfrm>
-          <a:prstGeom prst="roundRect">
-            <a:avLst/>
-          </a:prstGeom>
-          <a:solidFill>
-            <a:srgbClr val="FFFFFF"/>
-          </a:solidFill>
-          <a:ln w="20320">
-            <a:solidFill>
-              <a:srgbClr val="EA580C"/>
-            </a:solidFill>
-          </a:ln>
-        </p:spPr>
-        <p:style>
-          <a:lnRef idx="1">
-            <a:schemeClr val="accent1"/>
-          </a:lnRef>
-          <a:fillRef idx="3">
-            <a:schemeClr val="accent1"/>
-          </a:fillRef>
-          <a:effectRef idx="2">
-            <a:schemeClr val="accent1"/>
-          </a:effectRef>
-          <a:fontRef idx="minor">
-            <a:schemeClr val="lt1"/>
-          </a:fontRef>
-        </p:style>
-        <p:txBody>
-          <a:bodyPr rtlCol="0" anchor="ctr"/>
-          <a:lstStyle/>
-          <a:p>
-            <a:pPr algn="ctr"/>
-          </a:p>
-        </p:txBody>
-      </p:sp>
-      <p:sp>
-        <p:nvSpPr>
-          <p:cNvPr id="14" name="Rectangle 13"/>
-          <p:cNvSpPr/>
-          <p:nvPr/>
-        </p:nvSpPr>
-        <p:spPr>
-          <a:xfrm>
-            <a:off x="594360" y="3822191"/>
-            <a:ext cx="5303520" cy="347472"/>
-          </a:xfrm>
-          <a:prstGeom prst="rect">
-            <a:avLst/>
-          </a:prstGeom>
-          <a:solidFill>
-            <a:srgbClr val="EA580C"/>
-          </a:solidFill>
-          <a:ln>
-            <a:noFill/>
-          </a:ln>
-        </p:spPr>
-        <p:style>
-          <a:lnRef idx="1">
-            <a:schemeClr val="accent1"/>
-          </a:lnRef>
-          <a:fillRef idx="3">
-            <a:schemeClr val="accent1"/>
-          </a:fillRef>
-          <a:effectRef idx="2">
-            <a:schemeClr val="accent1"/>
-          </a:effectRef>
-          <a:fontRef idx="minor">
-            <a:schemeClr val="lt1"/>
-          </a:fontRef>
-        </p:style>
-        <p:txBody>
-          <a:bodyPr rtlCol="0" anchor="ctr"/>
-          <a:lstStyle/>
-          <a:p>
-            <a:pPr algn="ctr">
-              <a:defRPr sz="1000" b="1">
-                <a:solidFill>
-                  <a:srgbClr val="FFFFFF"/>
-                </a:solidFill>
-                <a:latin typeface="Arial"/>
-              </a:defRPr>
-            </a:pPr>
-            <a:r>
-              <a:t>3. OPERATIONAL CHALLENGES &amp; MITIGATION MATRIX</a:t>
-            </a:r>
-          </a:p>
-        </p:txBody>
-      </p:sp>
-      <p:graphicFrame>
-        <p:nvGraphicFramePr>
-          <p:cNvPr id="15" name="Table 14"/>
-          <p:cNvGraphicFramePr>
-            <a:graphicFrameLocks noGrp="1"/>
-          </p:cNvGraphicFramePr>
-          <p:nvPr/>
-        </p:nvGraphicFramePr>
-        <p:xfrm>
-          <a:off x="685800" y="4224527"/>
-          <a:ext cx="5120640" cy="1947672"/>
-        </p:xfrm>
-        <a:graphic>
-          <a:graphicData uri="http://schemas.openxmlformats.org/drawingml/2006/table">
-            <a:tbl>
-              <a:tblPr firstRow="1" bandRow="1">
-                <a:tableStyleId>{5C22544A-7EE6-4342-B048-85BDC9FD1C3A}</a:tableStyleId>
-              </a:tblPr>
-              <a:tblGrid>
-                <a:gridCol w="1645920"/>
-                <a:gridCol w="2011680"/>
-                <a:gridCol w="1463040"/>
-              </a:tblGrid>
-              <a:tr h="389534">
-                <a:tc>
-                  <a:txBody>
-                    <a:bodyPr/>
-                    <a:lstStyle/>
-                    <a:p>
-                      <a:pPr>
-                        <a:defRPr b="1" sz="819">
-                          <a:solidFill>
-                            <a:srgbClr val="1E293B"/>
-                          </a:solidFill>
-                        </a:defRPr>
-                      </a:pPr>
-                      <a:r>
-                        <a:t>Operational Challenge</a:t>
-                      </a:r>
-                    </a:p>
-                  </a:txBody>
-                  <a:tcPr>
-                    <a:solidFill>
-                      <a:srgbClr val="F1F5F9"/>
-                    </a:solidFill>
-                  </a:tcPr>
-                </a:tc>
-                <a:tc>
-                  <a:txBody>
-                    <a:bodyPr/>
-                    <a:lstStyle/>
-                    <a:p>
-                      <a:pPr>
-                        <a:defRPr b="1" sz="819">
-                          <a:solidFill>
-                            <a:srgbClr val="1E293B"/>
-                          </a:solidFill>
-                        </a:defRPr>
-                      </a:pPr>
-                      <a:r>
-                        <a:t>Engineering Mitigation</a:t>
-                      </a:r>
-                    </a:p>
-                  </a:txBody>
-                  <a:tcPr>
-                    <a:solidFill>
-                      <a:srgbClr val="F1F5F9"/>
-                    </a:solidFill>
-                  </a:tcPr>
-                </a:tc>
-                <a:tc>
-                  <a:txBody>
-                    <a:bodyPr/>
-                    <a:lstStyle/>
-                    <a:p>
-                      <a:pPr>
-                        <a:defRPr b="1" sz="819">
-                          <a:solidFill>
-                            <a:srgbClr val="1E293B"/>
-                          </a:solidFill>
-                        </a:defRPr>
-                      </a:pPr>
-                      <a:r>
-                        <a:t>Proven Result</a:t>
-                      </a:r>
-                    </a:p>
-                  </a:txBody>
-                  <a:tcPr>
-                    <a:solidFill>
-                      <a:srgbClr val="F1F5F9"/>
-                    </a:solidFill>
-                  </a:tcPr>
-                </a:tc>
-              </a:tr>
-              <a:tr h="389534">
-                <a:tc>
-                  <a:txBody>
-                    <a:bodyPr/>
-                    <a:lstStyle/>
-                    <a:p>
-                      <a:pPr>
-                        <a:defRPr sz="800" b="1">
-                          <a:solidFill>
-                            <a:srgbClr val="DC2626"/>
-                          </a:solidFill>
-                        </a:defRPr>
-                      </a:pPr>
-                      <a:r>
-                        <a:t>PPG Motion Artifacts</a:t>
-                      </a:r>
-                    </a:p>
-                  </a:txBody>
-                  <a:tcPr/>
-                </a:tc>
-                <a:tc>
-                  <a:txBody>
-                    <a:bodyPr/>
-                    <a:lstStyle/>
-                    <a:p>
-                      <a:pPr>
-                        <a:defRPr sz="800">
-                          <a:solidFill>
-                            <a:srgbClr val="1E293B"/>
-                          </a:solidFill>
-                        </a:defRPr>
-                      </a:pPr>
-                      <a:r>
-                        <a:t>8-Tap MA Filter + Peak FSM</a:t>
-                      </a:r>
-                    </a:p>
-                  </a:txBody>
-                  <a:tcPr/>
-                </a:tc>
-                <a:tc>
-                  <a:txBody>
-                    <a:bodyPr/>
-                    <a:lstStyle/>
-                    <a:p>
-                      <a:pPr>
-                        <a:defRPr sz="800" b="1">
-                          <a:solidFill>
-                            <a:srgbClr val="16A34A"/>
-                          </a:solidFill>
-                        </a:defRPr>
-                      </a:pPr>
-                      <a:r>
-                        <a:t>250ms refractory lockout</a:t>
-                      </a:r>
-                    </a:p>
-                  </a:txBody>
-                  <a:tcPr/>
-                </a:tc>
-              </a:tr>
-              <a:tr h="389534">
-                <a:tc>
-                  <a:txBody>
-                    <a:bodyPr/>
-                    <a:lstStyle/>
-                    <a:p>
-                      <a:pPr>
-                        <a:defRPr sz="800" b="1">
-                          <a:solidFill>
-                            <a:srgbClr val="DC2626"/>
-                          </a:solidFill>
-                        </a:defRPr>
-                      </a:pPr>
-                      <a:r>
-                        <a:t>Micro-FPGA Capacity</a:t>
-                      </a:r>
-                    </a:p>
-                  </a:txBody>
-                  <a:tcPr/>
-                </a:tc>
-                <a:tc>
-                  <a:txBody>
-                    <a:bodyPr/>
-                    <a:lstStyle/>
-                    <a:p>
-                      <a:pPr>
-                        <a:defRPr sz="800">
-                          <a:solidFill>
-                            <a:srgbClr val="1E293B"/>
-                          </a:solidFill>
-                        </a:defRPr>
-                      </a:pPr>
-                      <a:r>
-                        <a:t>O(1) Bit-Shift Division (&gt;&gt;3)</a:t>
-                      </a:r>
-                    </a:p>
-                  </a:txBody>
-                  <a:tcPr/>
-                </a:tc>
-                <a:tc>
-                  <a:txBody>
-                    <a:bodyPr/>
-                    <a:lstStyle/>
-                    <a:p>
-                      <a:pPr>
-                        <a:defRPr sz="800" b="1">
-                          <a:solidFill>
-                            <a:srgbClr val="16A34A"/>
-                          </a:solidFill>
-                        </a:defRPr>
-                      </a:pPr>
-                      <a:r>
-                        <a:t>0 DSP, 0 BRAM used</a:t>
-                      </a:r>
-                    </a:p>
-                  </a:txBody>
-                  <a:tcPr/>
-                </a:tc>
-              </a:tr>
-              <a:tr h="389534">
-                <a:tc>
-                  <a:txBody>
-                    <a:bodyPr/>
-                    <a:lstStyle/>
-                    <a:p>
-                      <a:pPr>
-                        <a:defRPr sz="800" b="1">
-                          <a:solidFill>
-                            <a:srgbClr val="DC2626"/>
-                          </a:solidFill>
-                        </a:defRPr>
-                      </a:pPr>
-                      <a:r>
-                        <a:t>FPGA Pin Constraints</a:t>
-                      </a:r>
-                    </a:p>
-                  </a:txBody>
-                  <a:tcPr/>
-                </a:tc>
-                <a:tc>
-                  <a:txBody>
-                    <a:bodyPr/>
-                    <a:lstStyle/>
-                    <a:p>
-                      <a:pPr>
-                        <a:defRPr sz="800">
-                          <a:solidFill>
-                            <a:srgbClr val="1E293B"/>
-                          </a:solidFill>
-                        </a:defRPr>
-                      </a:pPr>
-                      <a:r>
-                        <a:t>4-Bit Clock-Strobed Bus</a:t>
-                      </a:r>
-                    </a:p>
-                  </a:txBody>
-                  <a:tcPr/>
-                </a:tc>
-                <a:tc>
-                  <a:txBody>
-                    <a:bodyPr/>
-                    <a:lstStyle/>
-                    <a:p>
-                      <a:pPr>
-                        <a:defRPr sz="800" b="1">
-                          <a:solidFill>
-                            <a:srgbClr val="16A34A"/>
-                          </a:solidFill>
-                        </a:defRPr>
-                      </a:pPr>
-                      <a:r>
-                        <a:t>Saves 12 GPIO pins</a:t>
-                      </a:r>
-                    </a:p>
-                  </a:txBody>
-                  <a:tcPr/>
-                </a:tc>
-              </a:tr>
-              <a:tr h="389536">
-                <a:tc>
-                  <a:txBody>
-                    <a:bodyPr/>
-                    <a:lstStyle/>
-                    <a:p>
-                      <a:pPr>
-                        <a:defRPr sz="800" b="1">
-                          <a:solidFill>
-                            <a:srgbClr val="DC2626"/>
-                          </a:solidFill>
-                        </a:defRPr>
-                      </a:pPr>
-                      <a:r>
-                        <a:t>Network Outages</a:t>
-                      </a:r>
-                    </a:p>
-                  </a:txBody>
-                  <a:tcPr/>
-                </a:tc>
-                <a:tc>
-                  <a:txBody>
-                    <a:bodyPr/>
-                    <a:lstStyle/>
-                    <a:p>
-                      <a:pPr>
-                        <a:defRPr sz="800">
-                          <a:solidFill>
-                            <a:srgbClr val="1E293B"/>
-                          </a:solidFill>
-                        </a:defRPr>
-                      </a:pPr>
-                      <a:r>
-                        <a:t>100% Autonomous Edge TinyML</a:t>
-                      </a:r>
-                    </a:p>
-                  </a:txBody>
-                  <a:tcPr/>
-                </a:tc>
-                <a:tc>
-                  <a:txBody>
-                    <a:bodyPr/>
-                    <a:lstStyle/>
-                    <a:p>
-                      <a:pPr>
-                        <a:defRPr sz="800" b="1">
-                          <a:solidFill>
-                            <a:srgbClr val="16A34A"/>
-                          </a:solidFill>
-                        </a:defRPr>
-                      </a:pPr>
-                      <a:r>
-                        <a:t>619-byte offline model</a:t>
-                      </a:r>
-                    </a:p>
-                  </a:txBody>
-                  <a:tcPr/>
-                </a:tc>
-              </a:tr>
-            </a:tbl>
-          </a:graphicData>
-        </a:graphic>
-      </p:graphicFrame>
-      <p:sp>
-        <p:nvSpPr>
-          <p:cNvPr id="16" name="Rounded Rectangle 15"/>
-          <p:cNvSpPr/>
-          <p:nvPr/>
-        </p:nvSpPr>
-        <p:spPr>
-          <a:xfrm>
-            <a:off x="6263640" y="3822191"/>
-            <a:ext cx="5303520" cy="2423160"/>
-          </a:xfrm>
-          <a:prstGeom prst="roundRect">
-            <a:avLst/>
-          </a:prstGeom>
-          <a:solidFill>
-            <a:srgbClr val="FFFFFF"/>
-          </a:solidFill>
-          <a:ln w="20320">
-            <a:solidFill>
-              <a:srgbClr val="1E3A8A"/>
-            </a:solidFill>
-          </a:ln>
-        </p:spPr>
-        <p:style>
-          <a:lnRef idx="1">
-            <a:schemeClr val="accent1"/>
-          </a:lnRef>
-          <a:fillRef idx="3">
-            <a:schemeClr val="accent1"/>
-          </a:fillRef>
-          <a:effectRef idx="2">
-            <a:schemeClr val="accent1"/>
-          </a:effectRef>
-          <a:fontRef idx="minor">
-            <a:schemeClr val="lt1"/>
-          </a:fontRef>
-        </p:style>
-        <p:txBody>
-          <a:bodyPr rtlCol="0" anchor="ctr"/>
-          <a:lstStyle/>
-          <a:p>
-            <a:pPr algn="ctr"/>
-          </a:p>
-        </p:txBody>
-      </p:sp>
-      <p:sp>
-        <p:nvSpPr>
-          <p:cNvPr id="17" name="Rectangle 16"/>
-          <p:cNvSpPr/>
-          <p:nvPr/>
-        </p:nvSpPr>
-        <p:spPr>
-          <a:xfrm>
-            <a:off x="6263640" y="3822191"/>
-            <a:ext cx="5303520" cy="347472"/>
+            <a:off x="6263640" y="1234440"/>
+            <a:ext cx="5166360" cy="411480"/>
           </a:xfrm>
           <a:prstGeom prst="rect">
             <a:avLst/>
@@ -6584,29 +5929,28 @@
           <a:lstStyle/>
           <a:p>
             <a:pPr algn="ctr">
-              <a:defRPr sz="1000" b="1">
+              <a:defRPr sz="1150" b="1">
                 <a:solidFill>
                   <a:srgbClr val="FFFFFF"/>
                 </a:solidFill>
-                <a:latin typeface="Arial"/>
-              </a:defRPr>
-            </a:pPr>
-            <a:r>
-              <a:t>4. VALIDATION &amp; SCALABLE DEPLOYMENT ROADMAP</a:t>
-            </a:r>
-          </a:p>
-        </p:txBody>
-      </p:sp>
-      <p:sp>
-        <p:nvSpPr>
-          <p:cNvPr id="18" name="TextBox 17"/>
+              </a:defRPr>
+            </a:pPr>
+            <a:r>
+              <a:t>🛡️ Potential Challenges, Risks &amp; Mitigation Strategies</a:t>
+            </a:r>
+          </a:p>
+        </p:txBody>
+      </p:sp>
+      <p:sp>
+        <p:nvSpPr>
+          <p:cNvPr id="12" name="TextBox 11"/>
           <p:cNvSpPr txBox="1"/>
           <p:nvPr/>
         </p:nvSpPr>
         <p:spPr>
           <a:xfrm>
-            <a:off x="6373368" y="4187951"/>
-            <a:ext cx="5084064" cy="2011680"/>
+            <a:off x="6446520" y="1691640"/>
+            <a:ext cx="4800600" cy="4389120"/>
           </a:xfrm>
           <a:prstGeom prst="rect">
             <a:avLst/>
@@ -6620,10 +5964,10 @@
           <a:lstStyle/>
           <a:p>
             <a:pPr>
-              <a:spcBef>
-                <a:spcPts val="0"/>
-              </a:spcBef>
-              <a:defRPr sz="919" b="1">
+              <a:spcAft>
+                <a:spcPts val="700"/>
+              </a:spcAft>
+              <a:defRPr b="1" sz="1100">
                 <a:solidFill>
                   <a:srgbClr val="1E293B"/>
                 </a:solidFill>
@@ -6631,24 +5975,47 @@
               </a:defRPr>
             </a:pPr>
             <a:r>
-              <a:t>• Phase 1: Lab Silicon Validation [COMPLETED]: </a:t>
-            </a:r>
-            <a:r>
-              <a:rPr sz="880" b="0">
+              <a:t>• Challenge 1: Motion &amp; Optical Noise: </a:t>
+            </a:r>
+            <a:r>
+              <a:rPr b="0">
                 <a:solidFill>
                   <a:srgbClr val="475569"/>
                 </a:solidFill>
+              </a:rPr>
+              <a:t>Mitigation -&gt; Dual 8-tap running-sum digital filter on FPGA plus Karlen/Elgendi Signal Quality Index (SQI) algorithm automatically discards corrupted beats.</a:t>
+            </a:r>
+          </a:p>
+          <a:p>
+            <a:pPr>
+              <a:spcAft>
+                <a:spcPts val="700"/>
+              </a:spcAft>
+              <a:defRPr b="1" sz="1100">
+                <a:solidFill>
+                  <a:srgbClr val="1E293B"/>
+                </a:solidFill>
                 <a:latin typeface="Arial"/>
+              </a:defRPr>
+            </a:pPr>
+            <a:r>
+              <a:t>• Challenge 2: Micro-FPGA Resource Limits: </a:t>
+            </a:r>
+            <a:r>
+              <a:rPr b="0">
+                <a:solidFill>
+                  <a:srgbClr val="475569"/>
+                </a:solidFill>
               </a:rPr>
-              <a:t>Hardware prototype tested on Renesas ForgeFPGA + ESP32-S3. Benchmarked on 16k+ MIMIC-III patient records (94.11% accuracy).</a:t>
+              <a:t>Mitigation -&gt; Pure logic O(1) bit-shift division (&gt;&gt; 3) requires 0 DSP48 multipliers and 0 Block RAM, running on the lowest-cost micro-FPGAs.</a:t>
             </a:r>
           </a:p>
           <a:p>
             <a:pPr>
-              <a:spcBef>
-                <a:spcPts val="300"/>
-              </a:spcBef>
-              <a:defRPr sz="919" b="1">
+              <a:spcAft>
+                <a:spcPts val="700"/>
+              </a:spcAft>
+              <a:defRPr b="1" sz="1100">
                 <a:solidFill>
                   <a:srgbClr val="1E293B"/>
                 </a:solidFill>
@@ -6656,24 +6023,47 @@
               </a:defRPr>
             </a:pPr>
             <a:r>
-              <a:t>• Phase 2: Pilot Field Deployment [NEAR-TERM]: </a:t>
-            </a:r>
-            <a:r>
-              <a:rPr sz="880" b="0">
+              <a:t>• Challenge 3: Grid &amp; Cellular Tower Outages: </a:t>
+            </a:r>
+            <a:r>
+              <a:rPr b="0">
                 <a:solidFill>
                   <a:srgbClr val="475569"/>
                 </a:solidFill>
+              </a:rPr>
+              <a:t>Mitigation -&gt; Fully on-device offline TinyML; 619 bytes of INT8 weight storage. Operates autonomously during catastrophic floods and storms without internet.</a:t>
+            </a:r>
+          </a:p>
+          <a:p>
+            <a:pPr>
+              <a:spcAft>
+                <a:spcPts val="700"/>
+              </a:spcAft>
+              <a:defRPr b="1" sz="1100">
+                <a:solidFill>
+                  <a:srgbClr val="1E293B"/>
+                </a:solidFill>
                 <a:latin typeface="Arial"/>
+              </a:defRPr>
+            </a:pPr>
+            <a:r>
+              <a:t>• Challenge 4: Clinical Real-World Accuracy: </a:t>
+            </a:r>
+            <a:r>
+              <a:rPr b="0">
+                <a:solidFill>
+                  <a:srgbClr val="475569"/>
+                </a:solidFill>
               </a:rPr>
-              <a:t>50-unit pilot trial targeting municipal sanitation workers, traffic police, and construction sites under 45°C heat.</a:t>
+              <a:t>Mitigation -&gt; Benchmarked against 16,387 gold-standard patient records from the MIT MIMIC-III ICU database (94.11% triage accuracy on real HR/SpO2 inputs).</a:t>
             </a:r>
           </a:p>
           <a:p>
             <a:pPr>
-              <a:spcBef>
-                <a:spcPts val="300"/>
-              </a:spcBef>
-              <a:defRPr sz="919" b="1">
+              <a:spcAft>
+                <a:spcPts val="700"/>
+              </a:spcAft>
+              <a:defRPr b="1" sz="1100">
                 <a:solidFill>
                   <a:srgbClr val="1E293B"/>
                 </a:solidFill>
@@ -6681,16 +6071,15 @@
               </a:defRPr>
             </a:pPr>
             <a:r>
-              <a:t>• Phase 3: Commercial Silicon Target [MASS SCALE]: </a:t>
-            </a:r>
-            <a:r>
-              <a:rPr sz="880" b="0">
+              <a:t>• Commercial Roadmap Target: </a:t>
+            </a:r>
+            <a:r>
+              <a:rPr b="0">
                 <a:solidFill>
                   <a:srgbClr val="475569"/>
                 </a:solidFill>
-                <a:latin typeface="Arial"/>
               </a:rPr>
-              <a:t>Direct migration of Verilog DSP to Qualcomm Hexagon DSP; TinyML deployed to Qualcomm NPU via Snapdragon Neural Processing SDK (SNPE).</a:t>
+              <a:t>Migration path identified to Qualcomm Snapdragon Wear W5+ Gen 1 Low-Power Island (target platform; power not yet measured).</a:t>
             </a:r>
           </a:p>
         </p:txBody>
@@ -6810,7 +6199,7 @@
       </p:sp>
       <p:pic>
         <p:nvPicPr>
-          <p:cNvPr id="4" name="Picture 3" descr="image.png"/>
+          <p:cNvPr id="4" name="Picture 3" descr="page_1_img_2.png"/>
           <p:cNvPicPr>
             <a:picLocks noChangeAspect="1"/>
           </p:cNvPicPr>
@@ -6834,7 +6223,7 @@
       </p:pic>
       <p:pic>
         <p:nvPicPr>
-          <p:cNvPr id="5" name="Picture 4" descr="image.png"/>
+          <p:cNvPr id="5" name="Picture 4" descr="page_2_img_1.png"/>
           <p:cNvPicPr>
             <a:picLocks noChangeAspect="1"/>
           </p:cNvPicPr>
@@ -6887,137 +6276,6 @@
               </a:defRPr>
             </a:pPr>
             <a:r>
-              <a:t>@SIH Idea submission- Template                                                                                                                5</a:t>
-            </a:r>
-          </a:p>
-        </p:txBody>
-      </p:sp>
-      <p:sp>
-        <p:nvSpPr>
-          <p:cNvPr id="7" name="Oval 1"/>
-          <p:cNvSpPr/>
-          <p:nvPr/>
-        </p:nvSpPr>
-        <p:spPr>
-          <a:xfrm>
-            <a:off x="365760" y="228600"/>
-            <a:ext cx="1371600" cy="822960"/>
-          </a:xfrm>
-          <a:prstGeom prst="ellipse">
-            <a:avLst/>
-          </a:prstGeom>
-          <a:solidFill>
-            <a:srgbClr val="FFFFFF"/>
-          </a:solidFill>
-          <a:ln w="19050">
-            <a:solidFill>
-              <a:srgbClr val="000000"/>
-            </a:solidFill>
-          </a:ln>
-        </p:spPr>
-        <p:style>
-          <a:lnRef idx="1">
-            <a:schemeClr val="accent1"/>
-          </a:lnRef>
-          <a:fillRef idx="3">
-            <a:schemeClr val="accent1"/>
-          </a:fillRef>
-          <a:effectRef idx="2">
-            <a:schemeClr val="accent1"/>
-          </a:effectRef>
-          <a:fontRef idx="minor">
-            <a:schemeClr val="lt1"/>
-          </a:fontRef>
-        </p:style>
-        <p:txBody>
-          <a:bodyPr rtlCol="0" anchor="ctr"/>
-          <a:lstStyle/>
-          <a:p>
-            <a:pPr algn="ctr">
-              <a:defRPr sz="1100" b="1">
-                <a:solidFill>
-                  <a:srgbClr val="000000"/>
-                </a:solidFill>
-                <a:latin typeface="Arial"/>
-              </a:defRPr>
-            </a:pPr>
-            <a:r>
-              <a:t>Team</a:t>
-            </a:r>
-            <a:br/>
-            <a:r>
-              <a:t>Chipsters</a:t>
-            </a:r>
-          </a:p>
-        </p:txBody>
-      </p:sp>
-      <p:sp>
-        <p:nvSpPr>
-          <p:cNvPr id="8" name="TextBox 2"/>
-          <p:cNvSpPr txBox="1"/>
-          <p:nvPr/>
-        </p:nvSpPr>
-        <p:spPr>
-          <a:xfrm>
-            <a:off x="2011680" y="320040"/>
-            <a:ext cx="8046720" cy="731520"/>
-          </a:xfrm>
-          <a:prstGeom prst="rect">
-            <a:avLst/>
-          </a:prstGeom>
-          <a:noFill/>
-        </p:spPr>
-        <p:txBody>
-          <a:bodyPr wrap="none">
-            <a:spAutoFit/>
-          </a:bodyPr>
-          <a:lstStyle/>
-          <a:p>
-            <a:pPr algn="ctr">
-              <a:defRPr sz="2800" b="1">
-                <a:solidFill>
-                  <a:srgbClr val="000000"/>
-                </a:solidFill>
-                <a:latin typeface="Times New Roman"/>
-              </a:defRPr>
-            </a:pPr>
-            <a:r>
-              <a:t>IMPACT AND BENEFITS</a:t>
-            </a:r>
-          </a:p>
-        </p:txBody>
-      </p:sp>
-      <p:sp>
-        <p:nvSpPr>
-          <p:cNvPr id="9" name="TextBox 5"/>
-          <p:cNvSpPr txBox="1"/>
-          <p:nvPr/>
-        </p:nvSpPr>
-        <p:spPr>
-          <a:xfrm>
-            <a:off x="914400" y="6492240"/>
-            <a:ext cx="10362895" cy="320040"/>
-          </a:xfrm>
-          <a:prstGeom prst="rect">
-            <a:avLst/>
-          </a:prstGeom>
-          <a:noFill/>
-        </p:spPr>
-        <p:txBody>
-          <a:bodyPr wrap="none">
-            <a:spAutoFit/>
-          </a:bodyPr>
-          <a:lstStyle/>
-          <a:p>
-            <a:pPr algn="ctr">
-              <a:defRPr sz="1050">
-                <a:solidFill>
-                  <a:srgbClr val="FFFFFF"/>
-                </a:solidFill>
-                <a:latin typeface="Arial"/>
-              </a:defRPr>
-            </a:pPr>
-            <a:r>
               <a:t>@SIH Idea submission- Template                                                                                                5</a:t>
             </a:r>
           </a:p>
@@ -7025,7 +6283,7 @@
       </p:sp>
       <p:sp>
         <p:nvSpPr>
-          <p:cNvPr id="10" name="Rounded Rectangle 6"/>
+          <p:cNvPr id="7" name="Rounded Rectangle 6"/>
           <p:cNvSpPr/>
           <p:nvPr/>
         </p:nvSpPr>
@@ -7070,7 +6328,7 @@
       </p:sp>
       <p:sp>
         <p:nvSpPr>
-          <p:cNvPr id="11" name="TextBox 7"/>
+          <p:cNvPr id="8" name="TextBox 7"/>
           <p:cNvSpPr txBox="1"/>
           <p:nvPr/>
         </p:nvSpPr>
@@ -7123,7 +6381,7 @@
       </p:sp>
       <p:sp>
         <p:nvSpPr>
-          <p:cNvPr id="12" name="Rounded Rectangle 8"/>
+          <p:cNvPr id="9" name="Rounded Rectangle 8"/>
           <p:cNvSpPr/>
           <p:nvPr/>
         </p:nvSpPr>
@@ -7168,7 +6426,7 @@
       </p:sp>
       <p:sp>
         <p:nvSpPr>
-          <p:cNvPr id="13" name="TextBox 9"/>
+          <p:cNvPr id="10" name="TextBox 9"/>
           <p:cNvSpPr txBox="1"/>
           <p:nvPr/>
         </p:nvSpPr>
@@ -7221,7 +6479,7 @@
       </p:sp>
       <p:sp>
         <p:nvSpPr>
-          <p:cNvPr id="14" name="Rounded Rectangle 10"/>
+          <p:cNvPr id="11" name="Rounded Rectangle 10"/>
           <p:cNvSpPr/>
           <p:nvPr/>
         </p:nvSpPr>
@@ -7266,7 +6524,7 @@
       </p:sp>
       <p:sp>
         <p:nvSpPr>
-          <p:cNvPr id="15" name="TextBox 11"/>
+          <p:cNvPr id="12" name="TextBox 11"/>
           <p:cNvSpPr txBox="1"/>
           <p:nvPr/>
         </p:nvSpPr>
@@ -7319,7 +6577,7 @@
       </p:sp>
       <p:sp>
         <p:nvSpPr>
-          <p:cNvPr id="16" name="Rounded Rectangle 12"/>
+          <p:cNvPr id="13" name="Rounded Rectangle 12"/>
           <p:cNvSpPr/>
           <p:nvPr/>
         </p:nvSpPr>
@@ -7364,7 +6622,7 @@
       </p:sp>
       <p:sp>
         <p:nvSpPr>
-          <p:cNvPr id="17" name="TextBox 13"/>
+          <p:cNvPr id="14" name="TextBox 13"/>
           <p:cNvSpPr txBox="1"/>
           <p:nvPr/>
         </p:nvSpPr>
@@ -7417,7 +6675,7 @@
       </p:sp>
       <p:sp>
         <p:nvSpPr>
-          <p:cNvPr id="18" name="Rounded Rectangle 14"/>
+          <p:cNvPr id="15" name="Rounded Rectangle 14"/>
           <p:cNvSpPr/>
           <p:nvPr/>
         </p:nvSpPr>
@@ -7462,7 +6720,7 @@
       </p:sp>
       <p:sp>
         <p:nvSpPr>
-          <p:cNvPr id="19" name="Rectangle 15"/>
+          <p:cNvPr id="16" name="Rectangle 15"/>
           <p:cNvSpPr/>
           <p:nvPr/>
         </p:nvSpPr>
@@ -7515,7 +6773,7 @@
       </p:sp>
       <p:sp>
         <p:nvSpPr>
-          <p:cNvPr id="20" name="TextBox 16"/>
+          <p:cNvPr id="17" name="TextBox 16"/>
           <p:cNvSpPr txBox="1"/>
           <p:nvPr/>
         </p:nvSpPr>
@@ -7570,7 +6828,7 @@
       </p:sp>
       <p:sp>
         <p:nvSpPr>
-          <p:cNvPr id="21" name="Rounded Rectangle 17"/>
+          <p:cNvPr id="18" name="Rounded Rectangle 17"/>
           <p:cNvSpPr/>
           <p:nvPr/>
         </p:nvSpPr>
@@ -7615,7 +6873,7 @@
       </p:sp>
       <p:sp>
         <p:nvSpPr>
-          <p:cNvPr id="22" name="Rectangle 18"/>
+          <p:cNvPr id="19" name="Rectangle 18"/>
           <p:cNvSpPr/>
           <p:nvPr/>
         </p:nvSpPr>
@@ -7668,7 +6926,7 @@
       </p:sp>
       <p:sp>
         <p:nvSpPr>
-          <p:cNvPr id="23" name="TextBox 19"/>
+          <p:cNvPr id="20" name="TextBox 19"/>
           <p:cNvSpPr txBox="1"/>
           <p:nvPr/>
         </p:nvSpPr>
@@ -7723,7 +6981,7 @@
       </p:sp>
       <p:sp>
         <p:nvSpPr>
-          <p:cNvPr id="24" name="Rounded Rectangle 20"/>
+          <p:cNvPr id="21" name="Rounded Rectangle 20"/>
           <p:cNvSpPr/>
           <p:nvPr/>
         </p:nvSpPr>
@@ -7768,7 +7026,7 @@
       </p:sp>
       <p:sp>
         <p:nvSpPr>
-          <p:cNvPr id="25" name="Rectangle 21"/>
+          <p:cNvPr id="22" name="Rectangle 21"/>
           <p:cNvSpPr/>
           <p:nvPr/>
         </p:nvSpPr>
@@ -7821,7 +7079,7 @@
       </p:sp>
       <p:sp>
         <p:nvSpPr>
-          <p:cNvPr id="26" name="TextBox 22"/>
+          <p:cNvPr id="23" name="TextBox 22"/>
           <p:cNvSpPr txBox="1"/>
           <p:nvPr/>
         </p:nvSpPr>
@@ -7876,7 +7134,7 @@
       </p:sp>
       <p:sp>
         <p:nvSpPr>
-          <p:cNvPr id="27" name="Rounded Rectangle 23"/>
+          <p:cNvPr id="24" name="Rounded Rectangle 23"/>
           <p:cNvSpPr/>
           <p:nvPr/>
         </p:nvSpPr>
@@ -8044,7 +7302,7 @@
       </p:sp>
       <p:pic>
         <p:nvPicPr>
-          <p:cNvPr id="4" name="Picture 3" descr="image.png"/>
+          <p:cNvPr id="4" name="Picture 3" descr="page_1_img_2.png"/>
           <p:cNvPicPr>
             <a:picLocks noChangeAspect="1"/>
           </p:cNvPicPr>
@@ -8068,7 +7326,7 @@
       </p:pic>
       <p:pic>
         <p:nvPicPr>
-          <p:cNvPr id="5" name="Picture 4" descr="image.png"/>
+          <p:cNvPr id="5" name="Picture 4" descr="page_2_img_1.png"/>
           <p:cNvPicPr>
             <a:picLocks noChangeAspect="1"/>
           </p:cNvPicPr>
@@ -8121,137 +7379,6 @@
               </a:defRPr>
             </a:pPr>
             <a:r>
-              <a:t>@SIH Idea submission- Template                                                                                                                6</a:t>
-            </a:r>
-          </a:p>
-        </p:txBody>
-      </p:sp>
-      <p:sp>
-        <p:nvSpPr>
-          <p:cNvPr id="7" name="Oval 1"/>
-          <p:cNvSpPr/>
-          <p:nvPr/>
-        </p:nvSpPr>
-        <p:spPr>
-          <a:xfrm>
-            <a:off x="365760" y="228600"/>
-            <a:ext cx="1371600" cy="822960"/>
-          </a:xfrm>
-          <a:prstGeom prst="ellipse">
-            <a:avLst/>
-          </a:prstGeom>
-          <a:solidFill>
-            <a:srgbClr val="FFFFFF"/>
-          </a:solidFill>
-          <a:ln w="19050">
-            <a:solidFill>
-              <a:srgbClr val="000000"/>
-            </a:solidFill>
-          </a:ln>
-        </p:spPr>
-        <p:style>
-          <a:lnRef idx="1">
-            <a:schemeClr val="accent1"/>
-          </a:lnRef>
-          <a:fillRef idx="3">
-            <a:schemeClr val="accent1"/>
-          </a:fillRef>
-          <a:effectRef idx="2">
-            <a:schemeClr val="accent1"/>
-          </a:effectRef>
-          <a:fontRef idx="minor">
-            <a:schemeClr val="lt1"/>
-          </a:fontRef>
-        </p:style>
-        <p:txBody>
-          <a:bodyPr rtlCol="0" anchor="ctr"/>
-          <a:lstStyle/>
-          <a:p>
-            <a:pPr algn="ctr">
-              <a:defRPr sz="1100" b="1">
-                <a:solidFill>
-                  <a:srgbClr val="000000"/>
-                </a:solidFill>
-                <a:latin typeface="Arial"/>
-              </a:defRPr>
-            </a:pPr>
-            <a:r>
-              <a:t>Team</a:t>
-            </a:r>
-            <a:br/>
-            <a:r>
-              <a:t>Chipsters</a:t>
-            </a:r>
-          </a:p>
-        </p:txBody>
-      </p:sp>
-      <p:sp>
-        <p:nvSpPr>
-          <p:cNvPr id="8" name="TextBox 2"/>
-          <p:cNvSpPr txBox="1"/>
-          <p:nvPr/>
-        </p:nvSpPr>
-        <p:spPr>
-          <a:xfrm>
-            <a:off x="2011680" y="320040"/>
-            <a:ext cx="8046720" cy="731520"/>
-          </a:xfrm>
-          <a:prstGeom prst="rect">
-            <a:avLst/>
-          </a:prstGeom>
-          <a:noFill/>
-        </p:spPr>
-        <p:txBody>
-          <a:bodyPr wrap="none">
-            <a:spAutoFit/>
-          </a:bodyPr>
-          <a:lstStyle/>
-          <a:p>
-            <a:pPr algn="ctr">
-              <a:defRPr sz="2800" b="1">
-                <a:solidFill>
-                  <a:srgbClr val="000000"/>
-                </a:solidFill>
-                <a:latin typeface="Times New Roman"/>
-              </a:defRPr>
-            </a:pPr>
-            <a:r>
-              <a:t>RESEARCH AND REFERENCES</a:t>
-            </a:r>
-          </a:p>
-        </p:txBody>
-      </p:sp>
-      <p:sp>
-        <p:nvSpPr>
-          <p:cNvPr id="9" name="TextBox 5"/>
-          <p:cNvSpPr txBox="1"/>
-          <p:nvPr/>
-        </p:nvSpPr>
-        <p:spPr>
-          <a:xfrm>
-            <a:off x="914400" y="6492240"/>
-            <a:ext cx="10362895" cy="320040"/>
-          </a:xfrm>
-          <a:prstGeom prst="rect">
-            <a:avLst/>
-          </a:prstGeom>
-          <a:noFill/>
-        </p:spPr>
-        <p:txBody>
-          <a:bodyPr wrap="none">
-            <a:spAutoFit/>
-          </a:bodyPr>
-          <a:lstStyle/>
-          <a:p>
-            <a:pPr algn="ctr">
-              <a:defRPr sz="1050">
-                <a:solidFill>
-                  <a:srgbClr val="FFFFFF"/>
-                </a:solidFill>
-                <a:latin typeface="Arial"/>
-              </a:defRPr>
-            </a:pPr>
-            <a:r>
               <a:t>@SIH Idea submission- Template                                                                                                6</a:t>
             </a:r>
           </a:p>
@@ -8259,7 +7386,7 @@
       </p:sp>
       <p:graphicFrame>
         <p:nvGraphicFramePr>
-          <p:cNvPr id="10" name="Table 6"/>
+          <p:cNvPr id="7" name="Table 6"/>
           <p:cNvGraphicFramePr>
             <a:graphicFrameLocks noGrp="1"/>
           </p:cNvGraphicFramePr>
@@ -8953,7 +8080,7 @@
       </p:graphicFrame>
       <p:sp>
         <p:nvSpPr>
-          <p:cNvPr id="11" name="TextBox 7"/>
+          <p:cNvPr id="8" name="TextBox 7"/>
           <p:cNvSpPr txBox="1"/>
           <p:nvPr/>
         </p:nvSpPr>
